--- a/pres-bigdata/12-sparkui-internals-plan-job-stage-task.pptx
+++ b/pres-bigdata/12-sparkui-internals-plan-job-stage-task.pptx
@@ -32,9 +32,24 @@
     <p:sldId id="372" r:id="rId26"/>
     <p:sldId id="373" r:id="rId27"/>
     <p:sldId id="374" r:id="rId28"/>
-    <p:sldId id="304" r:id="rId29"/>
-    <p:sldId id="332" r:id="rId30"/>
-    <p:sldId id="275" r:id="rId31"/>
+    <p:sldId id="460" r:id="rId29"/>
+    <p:sldId id="462" r:id="rId30"/>
+    <p:sldId id="461" r:id="rId31"/>
+    <p:sldId id="465" r:id="rId32"/>
+    <p:sldId id="464" r:id="rId33"/>
+    <p:sldId id="466" r:id="rId34"/>
+    <p:sldId id="467" r:id="rId35"/>
+    <p:sldId id="463" r:id="rId36"/>
+    <p:sldId id="468" r:id="rId37"/>
+    <p:sldId id="469" r:id="rId38"/>
+    <p:sldId id="470" r:id="rId39"/>
+    <p:sldId id="471" r:id="rId40"/>
+    <p:sldId id="472" r:id="rId41"/>
+    <p:sldId id="474" r:id="rId42"/>
+    <p:sldId id="473" r:id="rId43"/>
+    <p:sldId id="304" r:id="rId44"/>
+    <p:sldId id="332" r:id="rId45"/>
+    <p:sldId id="275" r:id="rId46"/>
   </p:sldIdLst>
   <p:sldSz cx="12192000" cy="6858000"/>
   <p:notesSz cx="6858000" cy="9144000"/>
@@ -290,7 +305,7 @@
           <a:p>
             <a:fld id="{518EA6B4-0BE9-4CC0-9073-5E5702DEE52C}" type="datetimeFigureOut">
               <a:rPr lang="fr-FR" smtClean="0"/>
-              <a:t>05/01/2025</a:t>
+              <a:t>09/12/2025</a:t>
             </a:fld>
             <a:endParaRPr lang="fr-FR"/>
           </a:p>
@@ -344,7 +359,7 @@
           <a:p>
             <a:fld id="{F8CAA94D-2E1D-4615-8C46-E09296313923}" type="slidenum">
               <a:rPr lang="fr-FR" smtClean="0"/>
-              <a:t>‹#›</a:t>
+              <a:t>‹N°›</a:t>
             </a:fld>
             <a:endParaRPr lang="fr-FR"/>
           </a:p>
@@ -490,7 +505,7 @@
           <a:p>
             <a:fld id="{518EA6B4-0BE9-4CC0-9073-5E5702DEE52C}" type="datetimeFigureOut">
               <a:rPr lang="fr-FR" smtClean="0"/>
-              <a:t>05/01/2025</a:t>
+              <a:t>09/12/2025</a:t>
             </a:fld>
             <a:endParaRPr lang="fr-FR"/>
           </a:p>
@@ -544,7 +559,7 @@
           <a:p>
             <a:fld id="{F8CAA94D-2E1D-4615-8C46-E09296313923}" type="slidenum">
               <a:rPr lang="fr-FR" smtClean="0"/>
-              <a:t>‹#›</a:t>
+              <a:t>‹N°›</a:t>
             </a:fld>
             <a:endParaRPr lang="fr-FR"/>
           </a:p>
@@ -700,7 +715,7 @@
           <a:p>
             <a:fld id="{518EA6B4-0BE9-4CC0-9073-5E5702DEE52C}" type="datetimeFigureOut">
               <a:rPr lang="fr-FR" smtClean="0"/>
-              <a:t>05/01/2025</a:t>
+              <a:t>09/12/2025</a:t>
             </a:fld>
             <a:endParaRPr lang="fr-FR"/>
           </a:p>
@@ -754,7 +769,7 @@
           <a:p>
             <a:fld id="{F8CAA94D-2E1D-4615-8C46-E09296313923}" type="slidenum">
               <a:rPr lang="fr-FR" smtClean="0"/>
-              <a:t>‹#›</a:t>
+              <a:t>‹N°›</a:t>
             </a:fld>
             <a:endParaRPr lang="fr-FR"/>
           </a:p>
@@ -900,7 +915,7 @@
           <a:p>
             <a:fld id="{518EA6B4-0BE9-4CC0-9073-5E5702DEE52C}" type="datetimeFigureOut">
               <a:rPr lang="fr-FR" smtClean="0"/>
-              <a:t>05/01/2025</a:t>
+              <a:t>09/12/2025</a:t>
             </a:fld>
             <a:endParaRPr lang="fr-FR"/>
           </a:p>
@@ -954,7 +969,7 @@
           <a:p>
             <a:fld id="{F8CAA94D-2E1D-4615-8C46-E09296313923}" type="slidenum">
               <a:rPr lang="fr-FR" smtClean="0"/>
-              <a:t>‹#›</a:t>
+              <a:t>‹N°›</a:t>
             </a:fld>
             <a:endParaRPr lang="fr-FR"/>
           </a:p>
@@ -1176,7 +1191,7 @@
           <a:p>
             <a:fld id="{518EA6B4-0BE9-4CC0-9073-5E5702DEE52C}" type="datetimeFigureOut">
               <a:rPr lang="fr-FR" smtClean="0"/>
-              <a:t>05/01/2025</a:t>
+              <a:t>09/12/2025</a:t>
             </a:fld>
             <a:endParaRPr lang="fr-FR"/>
           </a:p>
@@ -1230,7 +1245,7 @@
           <a:p>
             <a:fld id="{F8CAA94D-2E1D-4615-8C46-E09296313923}" type="slidenum">
               <a:rPr lang="fr-FR" smtClean="0"/>
-              <a:t>‹#›</a:t>
+              <a:t>‹N°›</a:t>
             </a:fld>
             <a:endParaRPr lang="fr-FR"/>
           </a:p>
@@ -1444,7 +1459,7 @@
           <a:p>
             <a:fld id="{518EA6B4-0BE9-4CC0-9073-5E5702DEE52C}" type="datetimeFigureOut">
               <a:rPr lang="fr-FR" smtClean="0"/>
-              <a:t>05/01/2025</a:t>
+              <a:t>09/12/2025</a:t>
             </a:fld>
             <a:endParaRPr lang="fr-FR"/>
           </a:p>
@@ -1498,7 +1513,7 @@
           <a:p>
             <a:fld id="{F8CAA94D-2E1D-4615-8C46-E09296313923}" type="slidenum">
               <a:rPr lang="fr-FR" smtClean="0"/>
-              <a:t>‹#›</a:t>
+              <a:t>‹N°›</a:t>
             </a:fld>
             <a:endParaRPr lang="fr-FR"/>
           </a:p>
@@ -1859,7 +1874,7 @@
           <a:p>
             <a:fld id="{518EA6B4-0BE9-4CC0-9073-5E5702DEE52C}" type="datetimeFigureOut">
               <a:rPr lang="fr-FR" smtClean="0"/>
-              <a:t>05/01/2025</a:t>
+              <a:t>09/12/2025</a:t>
             </a:fld>
             <a:endParaRPr lang="fr-FR"/>
           </a:p>
@@ -1913,7 +1928,7 @@
           <a:p>
             <a:fld id="{F8CAA94D-2E1D-4615-8C46-E09296313923}" type="slidenum">
               <a:rPr lang="fr-FR" smtClean="0"/>
-              <a:t>‹#›</a:t>
+              <a:t>‹N°›</a:t>
             </a:fld>
             <a:endParaRPr lang="fr-FR"/>
           </a:p>
@@ -2001,7 +2016,7 @@
           <a:p>
             <a:fld id="{518EA6B4-0BE9-4CC0-9073-5E5702DEE52C}" type="datetimeFigureOut">
               <a:rPr lang="fr-FR" smtClean="0"/>
-              <a:t>05/01/2025</a:t>
+              <a:t>09/12/2025</a:t>
             </a:fld>
             <a:endParaRPr lang="fr-FR"/>
           </a:p>
@@ -2055,7 +2070,7 @@
           <a:p>
             <a:fld id="{F8CAA94D-2E1D-4615-8C46-E09296313923}" type="slidenum">
               <a:rPr lang="fr-FR" smtClean="0"/>
-              <a:t>‹#›</a:t>
+              <a:t>‹N°›</a:t>
             </a:fld>
             <a:endParaRPr lang="fr-FR"/>
           </a:p>
@@ -2114,7 +2129,7 @@
           <a:p>
             <a:fld id="{518EA6B4-0BE9-4CC0-9073-5E5702DEE52C}" type="datetimeFigureOut">
               <a:rPr lang="fr-FR" smtClean="0"/>
-              <a:t>05/01/2025</a:t>
+              <a:t>09/12/2025</a:t>
             </a:fld>
             <a:endParaRPr lang="fr-FR"/>
           </a:p>
@@ -2168,7 +2183,7 @@
           <a:p>
             <a:fld id="{F8CAA94D-2E1D-4615-8C46-E09296313923}" type="slidenum">
               <a:rPr lang="fr-FR" smtClean="0"/>
-              <a:t>‹#›</a:t>
+              <a:t>‹N°›</a:t>
             </a:fld>
             <a:endParaRPr lang="fr-FR"/>
           </a:p>
@@ -2427,7 +2442,7 @@
           <a:p>
             <a:fld id="{518EA6B4-0BE9-4CC0-9073-5E5702DEE52C}" type="datetimeFigureOut">
               <a:rPr lang="fr-FR" smtClean="0"/>
-              <a:t>05/01/2025</a:t>
+              <a:t>09/12/2025</a:t>
             </a:fld>
             <a:endParaRPr lang="fr-FR"/>
           </a:p>
@@ -2481,7 +2496,7 @@
           <a:p>
             <a:fld id="{F8CAA94D-2E1D-4615-8C46-E09296313923}" type="slidenum">
               <a:rPr lang="fr-FR" smtClean="0"/>
-              <a:t>‹#›</a:t>
+              <a:t>‹N°›</a:t>
             </a:fld>
             <a:endParaRPr lang="fr-FR"/>
           </a:p>
@@ -2716,7 +2731,7 @@
           <a:p>
             <a:fld id="{518EA6B4-0BE9-4CC0-9073-5E5702DEE52C}" type="datetimeFigureOut">
               <a:rPr lang="fr-FR" smtClean="0"/>
-              <a:t>05/01/2025</a:t>
+              <a:t>09/12/2025</a:t>
             </a:fld>
             <a:endParaRPr lang="fr-FR"/>
           </a:p>
@@ -2770,7 +2785,7 @@
           <a:p>
             <a:fld id="{F8CAA94D-2E1D-4615-8C46-E09296313923}" type="slidenum">
               <a:rPr lang="fr-FR" smtClean="0"/>
-              <a:t>‹#›</a:t>
+              <a:t>‹N°›</a:t>
             </a:fld>
             <a:endParaRPr lang="fr-FR"/>
           </a:p>
@@ -2959,7 +2974,7 @@
           <a:p>
             <a:fld id="{518EA6B4-0BE9-4CC0-9073-5E5702DEE52C}" type="datetimeFigureOut">
               <a:rPr lang="fr-FR" smtClean="0"/>
-              <a:t>05/01/2025</a:t>
+              <a:t>09/12/2025</a:t>
             </a:fld>
             <a:endParaRPr lang="fr-FR"/>
           </a:p>
@@ -3049,7 +3064,7 @@
           <a:p>
             <a:fld id="{F8CAA94D-2E1D-4615-8C46-E09296313923}" type="slidenum">
               <a:rPr lang="fr-FR" smtClean="0"/>
-              <a:t>‹#›</a:t>
+              <a:t>‹N°›</a:t>
             </a:fld>
             <a:endParaRPr lang="fr-FR"/>
           </a:p>
@@ -11038,7 +11053,9 @@
           </a:xfrm>
         </p:spPr>
         <p:txBody>
-          <a:bodyPr/>
+          <a:bodyPr>
+            <a:normAutofit fontScale="90000"/>
+          </a:bodyPr>
           <a:lstStyle/>
           <a:p>
             <a:pPr algn="ctr"/>
@@ -11751,7 +11768,9 @@
           </a:xfrm>
         </p:spPr>
         <p:txBody>
-          <a:bodyPr/>
+          <a:bodyPr>
+            <a:normAutofit fontScale="90000"/>
+          </a:bodyPr>
           <a:lstStyle/>
           <a:p>
             <a:pPr algn="ctr"/>
@@ -13312,10 +13331,10 @@
       </p:grpSpPr>
       <p:sp>
         <p:nvSpPr>
-          <p:cNvPr id="2" name="Title 1">
-            <a:extLst>
-              <a:ext uri="{FF2B5EF4-FFF2-40B4-BE49-F238E27FC236}">
-                <a16:creationId xmlns:a16="http://schemas.microsoft.com/office/drawing/2014/main" id="{472F37BA-A4B2-46FC-948E-D0EF5DF2EC6F}"/>
+          <p:cNvPr id="2" name="Titre 1">
+            <a:extLst>
+              <a:ext uri="{FF2B5EF4-FFF2-40B4-BE49-F238E27FC236}">
+                <a16:creationId xmlns:a16="http://schemas.microsoft.com/office/drawing/2014/main" id="{229108BB-B122-49F6-8170-E0C40955C149}"/>
               </a:ext>
             </a:extLst>
           </p:cNvPr>
@@ -13328,52 +13347,26 @@
         </p:nvSpPr>
         <p:spPr>
           <a:xfrm>
-            <a:off x="878840" y="1685925"/>
-            <a:ext cx="10515600" cy="2667635"/>
-          </a:xfrm>
-        </p:spPr>
-        <p:txBody>
-          <a:bodyPr>
-            <a:normAutofit fontScale="90000"/>
-          </a:bodyPr>
+            <a:off x="973667" y="2380192"/>
+            <a:ext cx="10515600" cy="1325563"/>
+          </a:xfrm>
+        </p:spPr>
+        <p:txBody>
+          <a:bodyPr/>
           <a:lstStyle/>
           <a:p>
             <a:pPr algn="ctr"/>
             <a:r>
               <a:rPr lang="fr-FR" dirty="0"/>
-              <a:t>Architecture Components</a:t>
-            </a:r>
-            <a:br>
-              <a:rPr lang="fr-FR" dirty="0"/>
-            </a:br>
-            <a:br>
-              <a:rPr lang="fr-FR" dirty="0"/>
-            </a:br>
-            <a:r>
-              <a:rPr lang="fr-FR" dirty="0"/>
-              <a:t>Client-Cluster … Driver &amp; </a:t>
-            </a:r>
-            <a:r>
-              <a:rPr lang="fr-FR" dirty="0" err="1"/>
-              <a:t>Executors</a:t>
-            </a:r>
-            <a:br>
-              <a:rPr lang="fr-FR" dirty="0"/>
-            </a:br>
-            <a:br>
-              <a:rPr lang="fr-FR" dirty="0"/>
-            </a:br>
-            <a:r>
-              <a:rPr lang="fr-FR" dirty="0"/>
-              <a:t>program/</a:t>
-            </a:r>
-            <a:r>
-              <a:rPr lang="fr-FR" dirty="0" err="1"/>
-              <a:t>library</a:t>
-            </a:r>
-            <a:r>
-              <a:rPr lang="fr-FR" dirty="0"/>
-              <a:t>/servers</a:t>
+              <a:t>Spark </a:t>
+            </a:r>
+            <a:r>
+              <a:rPr lang="fr-FR" dirty="0" err="1"/>
+              <a:t>History</a:t>
+            </a:r>
+            <a:r>
+              <a:rPr lang="fr-FR" dirty="0"/>
+              <a:t> Server</a:t>
             </a:r>
           </a:p>
         </p:txBody>
@@ -13381,7 +13374,7 @@
     </p:spTree>
     <p:extLst>
       <p:ext uri="{BB962C8B-B14F-4D97-AF65-F5344CB8AC3E}">
-        <p14:creationId xmlns:p14="http://schemas.microsoft.com/office/powerpoint/2010/main" val="134856381"/>
+        <p14:creationId xmlns:p14="http://schemas.microsoft.com/office/powerpoint/2010/main" val="3011928043"/>
       </p:ext>
     </p:extLst>
   </p:cSld>
@@ -13410,10 +13403,10 @@
       </p:grpSpPr>
       <p:sp>
         <p:nvSpPr>
-          <p:cNvPr id="2" name="Title 1">
-            <a:extLst>
-              <a:ext uri="{FF2B5EF4-FFF2-40B4-BE49-F238E27FC236}">
-                <a16:creationId xmlns:a16="http://schemas.microsoft.com/office/drawing/2014/main" id="{4FFE38E8-F817-4E8A-87C5-4B2CD68D4F33}"/>
+          <p:cNvPr id="2" name="Titre 1">
+            <a:extLst>
+              <a:ext uri="{FF2B5EF4-FFF2-40B4-BE49-F238E27FC236}">
+                <a16:creationId xmlns:a16="http://schemas.microsoft.com/office/drawing/2014/main" id="{CEB989C1-1BEA-4F25-AF23-22989EA8E831}"/>
               </a:ext>
             </a:extLst>
           </p:cNvPr>
@@ -13424,96 +13417,48 @@
             <p:ph type="title"/>
           </p:nvPr>
         </p:nvSpPr>
-        <p:spPr>
-          <a:xfrm>
-            <a:off x="0" y="-118040"/>
-            <a:ext cx="12192000" cy="1325563"/>
-          </a:xfrm>
-        </p:spPr>
+        <p:spPr/>
         <p:txBody>
           <a:bodyPr/>
           <a:lstStyle/>
           <a:p>
             <a:r>
               <a:rPr lang="fr-FR" dirty="0"/>
-              <a:t>Cluster Client -&gt; Driver (-&gt; </a:t>
-            </a:r>
-            <a:r>
-              <a:rPr lang="fr-FR" dirty="0" err="1"/>
-              <a:t>SparkContext</a:t>
-            </a:r>
-            <a:r>
-              <a:rPr lang="fr-FR" dirty="0"/>
-              <a:t>) -&gt; </a:t>
-            </a:r>
-            <a:r>
-              <a:rPr lang="fr-FR" dirty="0" err="1"/>
-              <a:t>Executor</a:t>
-            </a:r>
-            <a:endParaRPr lang="fr-FR" dirty="0"/>
-          </a:p>
-        </p:txBody>
-      </p:sp>
-      <p:sp>
-        <p:nvSpPr>
-          <p:cNvPr id="4" name="Rectangle 3">
-            <a:extLst>
-              <a:ext uri="{FF2B5EF4-FFF2-40B4-BE49-F238E27FC236}">
-                <a16:creationId xmlns:a16="http://schemas.microsoft.com/office/drawing/2014/main" id="{CFEFCD3C-AAFE-4270-880F-097271C06F4C}"/>
-              </a:ext>
-            </a:extLst>
-          </p:cNvPr>
-          <p:cNvSpPr/>
-          <p:nvPr/>
-        </p:nvSpPr>
-        <p:spPr>
-          <a:xfrm>
-            <a:off x="105205" y="5176125"/>
-            <a:ext cx="2112010" cy="406400"/>
-          </a:xfrm>
-          <a:prstGeom prst="rect">
-            <a:avLst/>
-          </a:prstGeom>
-          <a:noFill/>
-          <a:ln w="25400">
-            <a:solidFill>
-              <a:schemeClr val="accent1">
-                <a:shade val="50000"/>
-              </a:schemeClr>
-            </a:solidFill>
-          </a:ln>
-        </p:spPr>
-        <p:style>
-          <a:lnRef idx="2">
-            <a:schemeClr val="accent1">
-              <a:shade val="50000"/>
-            </a:schemeClr>
-          </a:lnRef>
-          <a:fillRef idx="1">
-            <a:schemeClr val="accent1"/>
-          </a:fillRef>
-          <a:effectRef idx="0">
-            <a:schemeClr val="accent1"/>
-          </a:effectRef>
-          <a:fontRef idx="minor">
-            <a:schemeClr val="lt1"/>
-          </a:fontRef>
-        </p:style>
-        <p:txBody>
-          <a:bodyPr rtlCol="0" anchor="ctr"/>
-          <a:lstStyle/>
-          <a:p>
-            <a:pPr algn="ctr"/>
-            <a:endParaRPr lang="fr-FR"/>
-          </a:p>
-        </p:txBody>
-      </p:sp>
-      <p:sp>
-        <p:nvSpPr>
-          <p:cNvPr id="5" name="TextBox 4">
-            <a:extLst>
-              <a:ext uri="{FF2B5EF4-FFF2-40B4-BE49-F238E27FC236}">
-                <a16:creationId xmlns:a16="http://schemas.microsoft.com/office/drawing/2014/main" id="{5F5BF260-79AA-45F1-9048-E1A834BD7948}"/>
+              <a:t>How to </a:t>
+            </a:r>
+            <a:r>
+              <a:rPr lang="fr-FR" dirty="0" err="1"/>
+              <a:t>analyze</a:t>
+            </a:r>
+            <a:r>
+              <a:rPr lang="fr-FR" dirty="0"/>
+              <a:t> a </a:t>
+            </a:r>
+            <a:r>
+              <a:rPr lang="fr-FR" dirty="0" err="1"/>
+              <a:t>finished</a:t>
+            </a:r>
+            <a:r>
+              <a:rPr lang="fr-FR" dirty="0"/>
+              <a:t> </a:t>
+            </a:r>
+            <a:r>
+              <a:rPr lang="fr-FR" dirty="0" err="1"/>
+              <a:t>spark-submit</a:t>
+            </a:r>
+            <a:r>
+              <a:rPr lang="fr-FR" dirty="0"/>
+              <a:t> App?</a:t>
+            </a:r>
+          </a:p>
+        </p:txBody>
+      </p:sp>
+      <p:sp>
+        <p:nvSpPr>
+          <p:cNvPr id="4" name="ZoneTexte 3">
+            <a:extLst>
+              <a:ext uri="{FF2B5EF4-FFF2-40B4-BE49-F238E27FC236}">
+                <a16:creationId xmlns:a16="http://schemas.microsoft.com/office/drawing/2014/main" id="{CAA2AF04-3BB1-45C0-8B35-3F48A655276A}"/>
               </a:ext>
             </a:extLst>
           </p:cNvPr>
@@ -13522,62 +13467,8 @@
         </p:nvSpPr>
         <p:spPr>
           <a:xfrm>
-            <a:off x="3837464" y="4418360"/>
-            <a:ext cx="2542300" cy="646331"/>
-          </a:xfrm>
-          <a:prstGeom prst="rect">
-            <a:avLst/>
-          </a:prstGeom>
-          <a:noFill/>
-        </p:spPr>
-        <p:txBody>
-          <a:bodyPr wrap="square" rtlCol="0">
-            <a:spAutoFit/>
-          </a:bodyPr>
-          <a:lstStyle/>
-          <a:p>
-            <a:r>
-              <a:rPr lang="fr-FR" dirty="0"/>
-              <a:t>OS </a:t>
-            </a:r>
-            <a:r>
-              <a:rPr lang="fr-FR" dirty="0" err="1"/>
-              <a:t>WorkerNode</a:t>
-            </a:r>
-            <a:endParaRPr lang="fr-FR" dirty="0"/>
-          </a:p>
-          <a:p>
-            <a:r>
-              <a:rPr lang="fr-FR" dirty="0"/>
-              <a:t>( + </a:t>
-            </a:r>
-            <a:r>
-              <a:rPr lang="fr-FR" dirty="0" err="1"/>
-              <a:t>YarnNodeManager</a:t>
-            </a:r>
-            <a:r>
-              <a:rPr lang="fr-FR" dirty="0"/>
-              <a:t>)</a:t>
-            </a:r>
-          </a:p>
-        </p:txBody>
-      </p:sp>
-      <p:sp>
-        <p:nvSpPr>
-          <p:cNvPr id="9" name="TextBox 8">
-            <a:extLst>
-              <a:ext uri="{FF2B5EF4-FFF2-40B4-BE49-F238E27FC236}">
-                <a16:creationId xmlns:a16="http://schemas.microsoft.com/office/drawing/2014/main" id="{965F2946-7BD7-4140-9BD3-D80231C1C828}"/>
-              </a:ext>
-            </a:extLst>
-          </p:cNvPr>
-          <p:cNvSpPr txBox="1"/>
-          <p:nvPr/>
-        </p:nvSpPr>
-        <p:spPr>
-          <a:xfrm>
-            <a:off x="667815" y="5176125"/>
-            <a:ext cx="442750" cy="369332"/>
+            <a:off x="1608666" y="2599267"/>
+            <a:ext cx="7539436" cy="2862322"/>
           </a:xfrm>
           <a:prstGeom prst="rect">
             <a:avLst/>
@@ -13591,2187 +13482,145 @@
           <a:lstStyle/>
           <a:p>
             <a:r>
-              <a:rPr lang="fr-FR" dirty="0"/>
-              <a:t>OS</a:t>
-            </a:r>
-          </a:p>
-        </p:txBody>
-      </p:sp>
-      <p:sp>
-        <p:nvSpPr>
-          <p:cNvPr id="11" name="Rectangle 10">
-            <a:extLst>
-              <a:ext uri="{FF2B5EF4-FFF2-40B4-BE49-F238E27FC236}">
-                <a16:creationId xmlns:a16="http://schemas.microsoft.com/office/drawing/2014/main" id="{B7D3F584-137C-4FF7-8374-3B67BE117CA5}"/>
-              </a:ext>
-            </a:extLst>
-          </p:cNvPr>
-          <p:cNvSpPr/>
-          <p:nvPr/>
-        </p:nvSpPr>
-        <p:spPr>
-          <a:xfrm>
-            <a:off x="313485" y="4032223"/>
-            <a:ext cx="1781810" cy="1000918"/>
-          </a:xfrm>
-          <a:prstGeom prst="rect">
-            <a:avLst/>
-          </a:prstGeom>
-        </p:spPr>
-        <p:style>
-          <a:lnRef idx="2">
-            <a:schemeClr val="accent1">
-              <a:shade val="50000"/>
-            </a:schemeClr>
-          </a:lnRef>
-          <a:fillRef idx="1">
-            <a:schemeClr val="accent1"/>
-          </a:fillRef>
-          <a:effectRef idx="0">
-            <a:schemeClr val="accent1"/>
-          </a:effectRef>
-          <a:fontRef idx="minor">
-            <a:schemeClr val="lt1"/>
-          </a:fontRef>
-        </p:style>
-        <p:txBody>
-          <a:bodyPr rtlCol="0" anchor="ctr"/>
-          <a:lstStyle/>
-          <a:p>
-            <a:pPr algn="ctr"/>
-            <a:endParaRPr lang="fr-FR"/>
-          </a:p>
-        </p:txBody>
-      </p:sp>
-      <p:sp>
-        <p:nvSpPr>
-          <p:cNvPr id="10" name="TextBox 9">
-            <a:extLst>
-              <a:ext uri="{FF2B5EF4-FFF2-40B4-BE49-F238E27FC236}">
-                <a16:creationId xmlns:a16="http://schemas.microsoft.com/office/drawing/2014/main" id="{FE2C648D-F9E4-46AE-8FDE-F17FF7E3246F}"/>
-              </a:ext>
-            </a:extLst>
-          </p:cNvPr>
-          <p:cNvSpPr txBox="1"/>
-          <p:nvPr/>
-        </p:nvSpPr>
-        <p:spPr>
-          <a:xfrm>
-            <a:off x="313485" y="4069291"/>
-            <a:ext cx="1854162" cy="923330"/>
-          </a:xfrm>
-          <a:prstGeom prst="rect">
-            <a:avLst/>
-          </a:prstGeom>
-          <a:noFill/>
-        </p:spPr>
-        <p:txBody>
-          <a:bodyPr wrap="none" rtlCol="0">
-            <a:spAutoFit/>
-          </a:bodyPr>
-          <a:lstStyle/>
-          <a:p>
-            <a:r>
-              <a:rPr lang="fr-FR" dirty="0"/>
-              <a:t>Java </a:t>
-            </a:r>
-            <a:r>
-              <a:rPr lang="fr-FR" dirty="0" err="1"/>
-              <a:t>spark-submit</a:t>
-            </a:r>
-            <a:endParaRPr lang="fr-FR" dirty="0"/>
-          </a:p>
-          <a:p>
-            <a:r>
-              <a:rPr lang="fr-FR" dirty="0"/>
-              <a:t>  -master </a:t>
-            </a:r>
-            <a:r>
-              <a:rPr lang="fr-FR" dirty="0" err="1"/>
-              <a:t>yarn</a:t>
+              <a:rPr lang="fr-FR" sz="2000" dirty="0" err="1"/>
+              <a:t>Typical</a:t>
+            </a:r>
+            <a:r>
+              <a:rPr lang="fr-FR" sz="2000" dirty="0"/>
+              <a:t> use-case :  </a:t>
             </a:r>
             <a:br>
-              <a:rPr lang="fr-FR" dirty="0"/>
+              <a:rPr lang="fr-FR" sz="2000" dirty="0"/>
             </a:br>
-            <a:r>
-              <a:rPr lang="fr-FR" dirty="0"/>
-              <a:t>   -mode cluster</a:t>
-            </a:r>
-          </a:p>
-        </p:txBody>
-      </p:sp>
-      <p:sp>
-        <p:nvSpPr>
-          <p:cNvPr id="12" name="Arrow: Curved Down 11">
-            <a:extLst>
-              <a:ext uri="{FF2B5EF4-FFF2-40B4-BE49-F238E27FC236}">
-                <a16:creationId xmlns:a16="http://schemas.microsoft.com/office/drawing/2014/main" id="{C3C4D66E-E21B-43A4-A714-D5B4327E9F32}"/>
-              </a:ext>
-            </a:extLst>
-          </p:cNvPr>
-          <p:cNvSpPr/>
-          <p:nvPr/>
-        </p:nvSpPr>
-        <p:spPr>
-          <a:xfrm>
-            <a:off x="2368187" y="4474388"/>
-            <a:ext cx="1254760" cy="391002"/>
-          </a:xfrm>
-          <a:prstGeom prst="curvedDownArrow">
-            <a:avLst/>
-          </a:prstGeom>
-        </p:spPr>
-        <p:style>
-          <a:lnRef idx="2">
-            <a:schemeClr val="accent1">
-              <a:shade val="50000"/>
-            </a:schemeClr>
-          </a:lnRef>
-          <a:fillRef idx="1">
-            <a:schemeClr val="accent1"/>
-          </a:fillRef>
-          <a:effectRef idx="0">
-            <a:schemeClr val="accent1"/>
-          </a:effectRef>
-          <a:fontRef idx="minor">
-            <a:schemeClr val="lt1"/>
-          </a:fontRef>
-        </p:style>
-        <p:txBody>
-          <a:bodyPr rtlCol="0" anchor="ctr"/>
-          <a:lstStyle/>
-          <a:p>
-            <a:pPr algn="ctr"/>
-            <a:endParaRPr lang="fr-FR">
-              <a:solidFill>
-                <a:schemeClr val="tx1"/>
-              </a:solidFill>
-            </a:endParaRPr>
-          </a:p>
-        </p:txBody>
-      </p:sp>
-      <p:sp>
-        <p:nvSpPr>
-          <p:cNvPr id="13" name="TextBox 12">
-            <a:extLst>
-              <a:ext uri="{FF2B5EF4-FFF2-40B4-BE49-F238E27FC236}">
-                <a16:creationId xmlns:a16="http://schemas.microsoft.com/office/drawing/2014/main" id="{E1F9DA26-A1C2-49C9-A5F2-5608E531DCD5}"/>
-              </a:ext>
-            </a:extLst>
-          </p:cNvPr>
-          <p:cNvSpPr txBox="1"/>
-          <p:nvPr/>
-        </p:nvSpPr>
-        <p:spPr>
-          <a:xfrm>
-            <a:off x="111930" y="3067256"/>
-            <a:ext cx="3237105" cy="923330"/>
-          </a:xfrm>
-          <a:prstGeom prst="rect">
-            <a:avLst/>
-          </a:prstGeom>
-          <a:noFill/>
-        </p:spPr>
-        <p:txBody>
-          <a:bodyPr wrap="none" rtlCol="0">
-            <a:spAutoFit/>
-          </a:bodyPr>
-          <a:lstStyle/>
-          <a:p>
-            <a:r>
-              <a:rPr lang="fr-FR" b="1" dirty="0"/>
-              <a:t>Case 3</a:t>
-            </a:r>
-            <a:r>
-              <a:rPr lang="fr-FR" dirty="0"/>
-              <a:t>/ </a:t>
-            </a:r>
-          </a:p>
-          <a:p>
-            <a:r>
-              <a:rPr lang="fr-FR" dirty="0" err="1"/>
-              <a:t>Yarn</a:t>
-            </a:r>
-            <a:r>
-              <a:rPr lang="fr-FR" dirty="0"/>
-              <a:t> launch </a:t>
-            </a:r>
-            <a:r>
-              <a:rPr lang="fr-FR" dirty="0" err="1"/>
-              <a:t>spark</a:t>
-            </a:r>
-            <a:r>
-              <a:rPr lang="fr-FR" dirty="0"/>
-              <a:t> –mode </a:t>
-            </a:r>
-            <a:r>
-              <a:rPr lang="fr-FR" b="1" dirty="0"/>
-              <a:t>cluster</a:t>
-            </a:r>
-          </a:p>
-          <a:p>
-            <a:r>
-              <a:rPr lang="fr-FR" dirty="0"/>
-              <a:t>+ </a:t>
-            </a:r>
-            <a:r>
-              <a:rPr lang="fr-FR" dirty="0" err="1"/>
-              <a:t>relaunch</a:t>
-            </a:r>
-            <a:r>
-              <a:rPr lang="fr-FR" dirty="0"/>
-              <a:t> if </a:t>
-            </a:r>
-            <a:r>
-              <a:rPr lang="fr-FR" dirty="0" err="1"/>
-              <a:t>failed</a:t>
-            </a:r>
-            <a:endParaRPr lang="fr-FR" dirty="0"/>
-          </a:p>
-        </p:txBody>
-      </p:sp>
-      <p:sp>
-        <p:nvSpPr>
-          <p:cNvPr id="15" name="Rectangle 14">
-            <a:extLst>
-              <a:ext uri="{FF2B5EF4-FFF2-40B4-BE49-F238E27FC236}">
-                <a16:creationId xmlns:a16="http://schemas.microsoft.com/office/drawing/2014/main" id="{BEE731C0-40EE-4361-BF2A-E831E6A7818D}"/>
-              </a:ext>
-            </a:extLst>
-          </p:cNvPr>
-          <p:cNvSpPr/>
-          <p:nvPr/>
-        </p:nvSpPr>
-        <p:spPr>
-          <a:xfrm>
-            <a:off x="4105459" y="1994021"/>
-            <a:ext cx="2645862" cy="2312579"/>
-          </a:xfrm>
-          <a:prstGeom prst="rect">
-            <a:avLst/>
-          </a:prstGeom>
-        </p:spPr>
-        <p:style>
-          <a:lnRef idx="2">
-            <a:schemeClr val="accent1">
-              <a:shade val="50000"/>
-            </a:schemeClr>
-          </a:lnRef>
-          <a:fillRef idx="1">
-            <a:schemeClr val="accent1"/>
-          </a:fillRef>
-          <a:effectRef idx="0">
-            <a:schemeClr val="accent1"/>
-          </a:effectRef>
-          <a:fontRef idx="minor">
-            <a:schemeClr val="lt1"/>
-          </a:fontRef>
-        </p:style>
-        <p:txBody>
-          <a:bodyPr rtlCol="0" anchor="ctr"/>
-          <a:lstStyle/>
-          <a:p>
-            <a:pPr algn="ctr"/>
-            <a:endParaRPr lang="fr-FR"/>
-          </a:p>
-        </p:txBody>
-      </p:sp>
-      <p:sp>
-        <p:nvSpPr>
-          <p:cNvPr id="16" name="TextBox 15">
-            <a:extLst>
-              <a:ext uri="{FF2B5EF4-FFF2-40B4-BE49-F238E27FC236}">
-                <a16:creationId xmlns:a16="http://schemas.microsoft.com/office/drawing/2014/main" id="{37C3DBF3-D775-42C6-AFB1-A3F59BA08400}"/>
-              </a:ext>
-            </a:extLst>
-          </p:cNvPr>
-          <p:cNvSpPr txBox="1"/>
-          <p:nvPr/>
-        </p:nvSpPr>
-        <p:spPr>
-          <a:xfrm>
-            <a:off x="4093210" y="1931187"/>
-            <a:ext cx="1854162" cy="923330"/>
-          </a:xfrm>
-          <a:prstGeom prst="rect">
-            <a:avLst/>
-          </a:prstGeom>
-          <a:noFill/>
-        </p:spPr>
-        <p:txBody>
-          <a:bodyPr wrap="none" rtlCol="0">
-            <a:spAutoFit/>
-          </a:bodyPr>
-          <a:lstStyle/>
-          <a:p>
-            <a:r>
-              <a:rPr lang="fr-FR" dirty="0"/>
-              <a:t>Java </a:t>
-            </a:r>
-            <a:r>
-              <a:rPr lang="fr-FR" dirty="0" err="1"/>
-              <a:t>spark-submit</a:t>
-            </a:r>
-            <a:endParaRPr lang="fr-FR" dirty="0"/>
-          </a:p>
-          <a:p>
-            <a:r>
-              <a:rPr lang="fr-FR" dirty="0"/>
-              <a:t>  -master </a:t>
-            </a:r>
-            <a:r>
-              <a:rPr lang="fr-FR" dirty="0" err="1"/>
-              <a:t>yarn</a:t>
-            </a:r>
             <a:br>
-              <a:rPr lang="fr-FR" dirty="0"/>
+              <a:rPr lang="fr-FR" sz="2000" dirty="0"/>
             </a:br>
             <a:r>
-              <a:rPr lang="fr-FR" dirty="0"/>
-              <a:t>   -mode client</a:t>
-            </a:r>
-          </a:p>
-        </p:txBody>
-      </p:sp>
-      <p:sp>
-        <p:nvSpPr>
-          <p:cNvPr id="17" name="Rectangle 16">
-            <a:extLst>
-              <a:ext uri="{FF2B5EF4-FFF2-40B4-BE49-F238E27FC236}">
-                <a16:creationId xmlns:a16="http://schemas.microsoft.com/office/drawing/2014/main" id="{4EC04A1E-F075-4714-96F3-D99E53E91A5B}"/>
-              </a:ext>
-            </a:extLst>
-          </p:cNvPr>
-          <p:cNvSpPr/>
-          <p:nvPr/>
-        </p:nvSpPr>
-        <p:spPr>
-          <a:xfrm>
-            <a:off x="3784599" y="4418360"/>
-            <a:ext cx="2870202" cy="664864"/>
-          </a:xfrm>
-          <a:prstGeom prst="rect">
-            <a:avLst/>
-          </a:prstGeom>
-          <a:noFill/>
-          <a:ln w="25400">
-            <a:solidFill>
-              <a:schemeClr val="accent1">
-                <a:shade val="50000"/>
-              </a:schemeClr>
-            </a:solidFill>
-          </a:ln>
-        </p:spPr>
-        <p:style>
-          <a:lnRef idx="2">
-            <a:schemeClr val="accent1">
-              <a:shade val="50000"/>
-            </a:schemeClr>
-          </a:lnRef>
-          <a:fillRef idx="1">
-            <a:schemeClr val="accent1"/>
-          </a:fillRef>
-          <a:effectRef idx="0">
-            <a:schemeClr val="accent1"/>
-          </a:effectRef>
-          <a:fontRef idx="minor">
-            <a:schemeClr val="lt1"/>
-          </a:fontRef>
-        </p:style>
-        <p:txBody>
-          <a:bodyPr rtlCol="0" anchor="ctr"/>
-          <a:lstStyle/>
-          <a:p>
-            <a:pPr algn="ctr"/>
-            <a:endParaRPr lang="fr-FR"/>
-          </a:p>
-        </p:txBody>
-      </p:sp>
-      <p:sp>
-        <p:nvSpPr>
-          <p:cNvPr id="19" name="TextBox 18">
-            <a:extLst>
-              <a:ext uri="{FF2B5EF4-FFF2-40B4-BE49-F238E27FC236}">
-                <a16:creationId xmlns:a16="http://schemas.microsoft.com/office/drawing/2014/main" id="{9F0E91F7-E956-493A-8239-23D504C1ED44}"/>
-              </a:ext>
-            </a:extLst>
-          </p:cNvPr>
-          <p:cNvSpPr txBox="1"/>
-          <p:nvPr/>
-        </p:nvSpPr>
-        <p:spPr>
-          <a:xfrm>
-            <a:off x="8254536" y="6037263"/>
-            <a:ext cx="2542300" cy="646331"/>
-          </a:xfrm>
-          <a:prstGeom prst="rect">
-            <a:avLst/>
-          </a:prstGeom>
-          <a:noFill/>
-        </p:spPr>
-        <p:txBody>
-          <a:bodyPr wrap="square" rtlCol="0">
-            <a:spAutoFit/>
-          </a:bodyPr>
-          <a:lstStyle/>
-          <a:p>
-            <a:r>
-              <a:rPr lang="fr-FR" dirty="0"/>
-              <a:t>OS </a:t>
-            </a:r>
-            <a:r>
-              <a:rPr lang="fr-FR" dirty="0" err="1"/>
-              <a:t>WorkerNode</a:t>
-            </a:r>
-            <a:endParaRPr lang="fr-FR" dirty="0"/>
-          </a:p>
-          <a:p>
-            <a:r>
-              <a:rPr lang="fr-FR" dirty="0"/>
-              <a:t>( + </a:t>
-            </a:r>
-            <a:r>
-              <a:rPr lang="fr-FR" dirty="0" err="1"/>
-              <a:t>YarnNodeManager</a:t>
-            </a:r>
-            <a:r>
-              <a:rPr lang="fr-FR" dirty="0"/>
-              <a:t>)</a:t>
-            </a:r>
-          </a:p>
-        </p:txBody>
-      </p:sp>
-      <p:sp>
-        <p:nvSpPr>
-          <p:cNvPr id="20" name="Rectangle 19">
-            <a:extLst>
-              <a:ext uri="{FF2B5EF4-FFF2-40B4-BE49-F238E27FC236}">
-                <a16:creationId xmlns:a16="http://schemas.microsoft.com/office/drawing/2014/main" id="{9D4CEC5C-878F-468F-9DF6-366EE1AC7C0A}"/>
-              </a:ext>
-            </a:extLst>
-          </p:cNvPr>
-          <p:cNvSpPr/>
-          <p:nvPr/>
-        </p:nvSpPr>
-        <p:spPr>
-          <a:xfrm>
-            <a:off x="8169445" y="6018730"/>
-            <a:ext cx="2870202" cy="664864"/>
-          </a:xfrm>
-          <a:prstGeom prst="rect">
-            <a:avLst/>
-          </a:prstGeom>
-          <a:noFill/>
-          <a:ln w="25400">
-            <a:solidFill>
-              <a:schemeClr val="accent1">
-                <a:shade val="50000"/>
-              </a:schemeClr>
-            </a:solidFill>
-          </a:ln>
-        </p:spPr>
-        <p:style>
-          <a:lnRef idx="2">
-            <a:schemeClr val="accent1">
-              <a:shade val="50000"/>
-            </a:schemeClr>
-          </a:lnRef>
-          <a:fillRef idx="1">
-            <a:schemeClr val="accent1"/>
-          </a:fillRef>
-          <a:effectRef idx="0">
-            <a:schemeClr val="accent1"/>
-          </a:effectRef>
-          <a:fontRef idx="minor">
-            <a:schemeClr val="lt1"/>
-          </a:fontRef>
-        </p:style>
-        <p:txBody>
-          <a:bodyPr rtlCol="0" anchor="ctr"/>
-          <a:lstStyle/>
-          <a:p>
-            <a:pPr algn="ctr"/>
-            <a:endParaRPr lang="fr-FR"/>
-          </a:p>
-        </p:txBody>
-      </p:sp>
-      <p:sp>
-        <p:nvSpPr>
-          <p:cNvPr id="23" name="TextBox 22">
-            <a:extLst>
-              <a:ext uri="{FF2B5EF4-FFF2-40B4-BE49-F238E27FC236}">
-                <a16:creationId xmlns:a16="http://schemas.microsoft.com/office/drawing/2014/main" id="{E26BF7DA-46FE-4DF8-9962-3C8065136574}"/>
-              </a:ext>
-            </a:extLst>
-          </p:cNvPr>
-          <p:cNvSpPr txBox="1"/>
-          <p:nvPr/>
-        </p:nvSpPr>
-        <p:spPr>
-          <a:xfrm>
-            <a:off x="8287540" y="3265219"/>
-            <a:ext cx="2542300" cy="646331"/>
-          </a:xfrm>
-          <a:prstGeom prst="rect">
-            <a:avLst/>
-          </a:prstGeom>
-          <a:noFill/>
-        </p:spPr>
-        <p:txBody>
-          <a:bodyPr wrap="square" rtlCol="0">
-            <a:spAutoFit/>
-          </a:bodyPr>
-          <a:lstStyle/>
-          <a:p>
-            <a:r>
-              <a:rPr lang="fr-FR" dirty="0"/>
-              <a:t>OS </a:t>
-            </a:r>
-            <a:r>
-              <a:rPr lang="fr-FR" dirty="0" err="1"/>
-              <a:t>WorkerNode</a:t>
-            </a:r>
-            <a:endParaRPr lang="fr-FR" dirty="0"/>
-          </a:p>
-          <a:p>
-            <a:r>
-              <a:rPr lang="fr-FR" dirty="0"/>
-              <a:t>( + </a:t>
-            </a:r>
-            <a:r>
-              <a:rPr lang="fr-FR" dirty="0" err="1"/>
-              <a:t>YarnNodeManager</a:t>
-            </a:r>
-            <a:r>
-              <a:rPr lang="fr-FR" dirty="0"/>
-              <a:t>)</a:t>
-            </a:r>
-          </a:p>
-        </p:txBody>
-      </p:sp>
-      <p:sp>
-        <p:nvSpPr>
-          <p:cNvPr id="24" name="Rectangle 23">
-            <a:extLst>
-              <a:ext uri="{FF2B5EF4-FFF2-40B4-BE49-F238E27FC236}">
-                <a16:creationId xmlns:a16="http://schemas.microsoft.com/office/drawing/2014/main" id="{EB96970E-38EA-4BAB-8890-A26E3BCE5F70}"/>
-              </a:ext>
-            </a:extLst>
-          </p:cNvPr>
-          <p:cNvSpPr/>
-          <p:nvPr/>
-        </p:nvSpPr>
-        <p:spPr>
-          <a:xfrm>
-            <a:off x="8202449" y="3246686"/>
-            <a:ext cx="2870202" cy="664864"/>
-          </a:xfrm>
-          <a:prstGeom prst="rect">
-            <a:avLst/>
-          </a:prstGeom>
-          <a:noFill/>
-          <a:ln w="25400">
-            <a:solidFill>
-              <a:schemeClr val="accent1">
-                <a:shade val="50000"/>
-              </a:schemeClr>
-            </a:solidFill>
-          </a:ln>
-        </p:spPr>
-        <p:style>
-          <a:lnRef idx="2">
-            <a:schemeClr val="accent1">
-              <a:shade val="50000"/>
-            </a:schemeClr>
-          </a:lnRef>
-          <a:fillRef idx="1">
-            <a:schemeClr val="accent1"/>
-          </a:fillRef>
-          <a:effectRef idx="0">
-            <a:schemeClr val="accent1"/>
-          </a:effectRef>
-          <a:fontRef idx="minor">
-            <a:schemeClr val="lt1"/>
-          </a:fontRef>
-        </p:style>
-        <p:txBody>
-          <a:bodyPr rtlCol="0" anchor="ctr"/>
-          <a:lstStyle/>
-          <a:p>
-            <a:pPr algn="ctr"/>
-            <a:endParaRPr lang="fr-FR"/>
-          </a:p>
-        </p:txBody>
-      </p:sp>
-      <p:sp>
-        <p:nvSpPr>
-          <p:cNvPr id="25" name="Rectangle 24">
-            <a:extLst>
-              <a:ext uri="{FF2B5EF4-FFF2-40B4-BE49-F238E27FC236}">
-                <a16:creationId xmlns:a16="http://schemas.microsoft.com/office/drawing/2014/main" id="{BECF9066-FB34-4814-8725-5EDAF63511F1}"/>
-              </a:ext>
-            </a:extLst>
-          </p:cNvPr>
-          <p:cNvSpPr/>
-          <p:nvPr/>
-        </p:nvSpPr>
-        <p:spPr>
-          <a:xfrm>
-            <a:off x="8436780" y="1795821"/>
-            <a:ext cx="2511622" cy="1403313"/>
-          </a:xfrm>
-          <a:prstGeom prst="rect">
-            <a:avLst/>
-          </a:prstGeom>
-        </p:spPr>
-        <p:style>
-          <a:lnRef idx="2">
-            <a:schemeClr val="accent1">
-              <a:shade val="50000"/>
-            </a:schemeClr>
-          </a:lnRef>
-          <a:fillRef idx="1">
-            <a:schemeClr val="accent1"/>
-          </a:fillRef>
-          <a:effectRef idx="0">
-            <a:schemeClr val="accent1"/>
-          </a:effectRef>
-          <a:fontRef idx="minor">
-            <a:schemeClr val="lt1"/>
-          </a:fontRef>
-        </p:style>
-        <p:txBody>
-          <a:bodyPr rtlCol="0" anchor="ctr"/>
-          <a:lstStyle/>
-          <a:p>
-            <a:pPr algn="ctr"/>
-            <a:endParaRPr lang="fr-FR"/>
-          </a:p>
-        </p:txBody>
-      </p:sp>
-      <p:sp>
-        <p:nvSpPr>
-          <p:cNvPr id="27" name="Rectangle 26">
-            <a:extLst>
-              <a:ext uri="{FF2B5EF4-FFF2-40B4-BE49-F238E27FC236}">
-                <a16:creationId xmlns:a16="http://schemas.microsoft.com/office/drawing/2014/main" id="{B6A02087-4E98-45D8-8B00-77A3759B8CCE}"/>
-              </a:ext>
-            </a:extLst>
-          </p:cNvPr>
-          <p:cNvSpPr/>
-          <p:nvPr/>
-        </p:nvSpPr>
-        <p:spPr>
-          <a:xfrm>
-            <a:off x="4271552" y="2822928"/>
-            <a:ext cx="1852927" cy="1337592"/>
-          </a:xfrm>
-          <a:prstGeom prst="rect">
-            <a:avLst/>
-          </a:prstGeom>
-          <a:noFill/>
-          <a:ln w="25400">
-            <a:solidFill>
-              <a:schemeClr val="accent1">
-                <a:shade val="50000"/>
-              </a:schemeClr>
-            </a:solidFill>
-          </a:ln>
-        </p:spPr>
-        <p:style>
-          <a:lnRef idx="2">
-            <a:schemeClr val="accent1">
-              <a:shade val="50000"/>
-            </a:schemeClr>
-          </a:lnRef>
-          <a:fillRef idx="1">
-            <a:schemeClr val="accent1"/>
-          </a:fillRef>
-          <a:effectRef idx="0">
-            <a:schemeClr val="accent1"/>
-          </a:effectRef>
-          <a:fontRef idx="minor">
-            <a:schemeClr val="lt1"/>
-          </a:fontRef>
-        </p:style>
-        <p:txBody>
-          <a:bodyPr rtlCol="0" anchor="ctr"/>
-          <a:lstStyle/>
-          <a:p>
-            <a:pPr algn="ctr"/>
-            <a:endParaRPr lang="fr-FR"/>
-          </a:p>
-        </p:txBody>
-      </p:sp>
-      <p:sp>
-        <p:nvSpPr>
-          <p:cNvPr id="14" name="TextBox 13">
-            <a:extLst>
-              <a:ext uri="{FF2B5EF4-FFF2-40B4-BE49-F238E27FC236}">
-                <a16:creationId xmlns:a16="http://schemas.microsoft.com/office/drawing/2014/main" id="{1BC7EAAA-8160-488C-BC60-E3B718C59543}"/>
-              </a:ext>
-            </a:extLst>
-          </p:cNvPr>
-          <p:cNvSpPr txBox="1"/>
-          <p:nvPr/>
-        </p:nvSpPr>
-        <p:spPr>
-          <a:xfrm>
-            <a:off x="4337570" y="2813650"/>
-            <a:ext cx="1435649" cy="369332"/>
-          </a:xfrm>
-          <a:prstGeom prst="rect">
-            <a:avLst/>
-          </a:prstGeom>
-          <a:noFill/>
-        </p:spPr>
-        <p:txBody>
-          <a:bodyPr wrap="none" rtlCol="0">
-            <a:spAutoFit/>
-          </a:bodyPr>
-          <a:lstStyle/>
-          <a:p>
-            <a:r>
-              <a:rPr lang="fr-FR" dirty="0" err="1"/>
-              <a:t>SparkContext</a:t>
-            </a:r>
-            <a:endParaRPr lang="fr-FR" dirty="0"/>
-          </a:p>
-        </p:txBody>
-      </p:sp>
-      <p:sp>
-        <p:nvSpPr>
-          <p:cNvPr id="31" name="Rectangle 30">
-            <a:extLst>
-              <a:ext uri="{FF2B5EF4-FFF2-40B4-BE49-F238E27FC236}">
-                <a16:creationId xmlns:a16="http://schemas.microsoft.com/office/drawing/2014/main" id="{2C57B120-F5A6-43ED-AE7E-D35504036E0D}"/>
-              </a:ext>
-            </a:extLst>
-          </p:cNvPr>
-          <p:cNvSpPr/>
-          <p:nvPr/>
-        </p:nvSpPr>
-        <p:spPr>
-          <a:xfrm>
-            <a:off x="4320378" y="3389158"/>
-            <a:ext cx="1349267" cy="490665"/>
-          </a:xfrm>
-          <a:prstGeom prst="rect">
-            <a:avLst/>
-          </a:prstGeom>
-          <a:solidFill>
-            <a:schemeClr val="accent1">
-              <a:lumMod val="40000"/>
-              <a:lumOff val="60000"/>
-            </a:schemeClr>
-          </a:solidFill>
-          <a:ln w="25400">
-            <a:solidFill>
-              <a:schemeClr val="accent1">
-                <a:shade val="50000"/>
-              </a:schemeClr>
-            </a:solidFill>
-          </a:ln>
-        </p:spPr>
-        <p:style>
-          <a:lnRef idx="2">
-            <a:schemeClr val="accent1">
-              <a:shade val="50000"/>
-            </a:schemeClr>
-          </a:lnRef>
-          <a:fillRef idx="1">
-            <a:schemeClr val="accent1"/>
-          </a:fillRef>
-          <a:effectRef idx="0">
-            <a:schemeClr val="accent1"/>
-          </a:effectRef>
-          <a:fontRef idx="minor">
-            <a:schemeClr val="lt1"/>
-          </a:fontRef>
-        </p:style>
-        <p:txBody>
-          <a:bodyPr rtlCol="0" anchor="ctr"/>
-          <a:lstStyle/>
-          <a:p>
-            <a:pPr algn="ctr"/>
-            <a:endParaRPr lang="fr-FR"/>
-          </a:p>
-        </p:txBody>
-      </p:sp>
-      <p:sp>
-        <p:nvSpPr>
-          <p:cNvPr id="32" name="Rectangle 31">
-            <a:extLst>
-              <a:ext uri="{FF2B5EF4-FFF2-40B4-BE49-F238E27FC236}">
-                <a16:creationId xmlns:a16="http://schemas.microsoft.com/office/drawing/2014/main" id="{AD66F58A-6443-48C6-800A-80BB42CAE590}"/>
-              </a:ext>
-            </a:extLst>
-          </p:cNvPr>
-          <p:cNvSpPr/>
-          <p:nvPr/>
-        </p:nvSpPr>
-        <p:spPr>
-          <a:xfrm>
-            <a:off x="4472778" y="3541558"/>
-            <a:ext cx="1349267" cy="490665"/>
-          </a:xfrm>
-          <a:prstGeom prst="rect">
-            <a:avLst/>
-          </a:prstGeom>
-          <a:solidFill>
-            <a:schemeClr val="accent1">
-              <a:lumMod val="40000"/>
-              <a:lumOff val="60000"/>
-            </a:schemeClr>
-          </a:solidFill>
-          <a:ln w="25400">
-            <a:solidFill>
-              <a:schemeClr val="accent1">
-                <a:shade val="50000"/>
-              </a:schemeClr>
-            </a:solidFill>
-          </a:ln>
-        </p:spPr>
-        <p:style>
-          <a:lnRef idx="2">
-            <a:schemeClr val="accent1">
-              <a:shade val="50000"/>
-            </a:schemeClr>
-          </a:lnRef>
-          <a:fillRef idx="1">
-            <a:schemeClr val="accent1"/>
-          </a:fillRef>
-          <a:effectRef idx="0">
-            <a:schemeClr val="accent1"/>
-          </a:effectRef>
-          <a:fontRef idx="minor">
-            <a:schemeClr val="lt1"/>
-          </a:fontRef>
-        </p:style>
-        <p:txBody>
-          <a:bodyPr rtlCol="0" anchor="ctr"/>
-          <a:lstStyle/>
-          <a:p>
-            <a:pPr algn="ctr"/>
-            <a:endParaRPr lang="fr-FR"/>
-          </a:p>
-        </p:txBody>
-      </p:sp>
-      <p:sp>
-        <p:nvSpPr>
-          <p:cNvPr id="33" name="TextBox 32">
-            <a:extLst>
-              <a:ext uri="{FF2B5EF4-FFF2-40B4-BE49-F238E27FC236}">
-                <a16:creationId xmlns:a16="http://schemas.microsoft.com/office/drawing/2014/main" id="{A9B66817-E19E-4A8A-8239-A585D9148346}"/>
-              </a:ext>
-            </a:extLst>
-          </p:cNvPr>
-          <p:cNvSpPr txBox="1"/>
-          <p:nvPr/>
-        </p:nvSpPr>
-        <p:spPr>
-          <a:xfrm>
-            <a:off x="4445115" y="3509024"/>
-            <a:ext cx="1404552" cy="369332"/>
-          </a:xfrm>
-          <a:prstGeom prst="rect">
-            <a:avLst/>
-          </a:prstGeom>
-          <a:noFill/>
-        </p:spPr>
-        <p:txBody>
-          <a:bodyPr wrap="none" rtlCol="0">
-            <a:spAutoFit/>
-          </a:bodyPr>
-          <a:lstStyle/>
-          <a:p>
-            <a:r>
-              <a:rPr lang="fr-FR" dirty="0" err="1"/>
-              <a:t>SparkSession</a:t>
-            </a:r>
-            <a:endParaRPr lang="fr-FR" dirty="0"/>
-          </a:p>
-        </p:txBody>
-      </p:sp>
-      <p:sp>
-        <p:nvSpPr>
-          <p:cNvPr id="28" name="TextBox 27">
-            <a:extLst>
-              <a:ext uri="{FF2B5EF4-FFF2-40B4-BE49-F238E27FC236}">
-                <a16:creationId xmlns:a16="http://schemas.microsoft.com/office/drawing/2014/main" id="{6A6D8EC3-8C0E-4585-9BDD-748DE3162F26}"/>
-              </a:ext>
-            </a:extLst>
-          </p:cNvPr>
-          <p:cNvSpPr txBox="1"/>
-          <p:nvPr/>
-        </p:nvSpPr>
-        <p:spPr>
-          <a:xfrm rot="16200000">
-            <a:off x="5538315" y="3163262"/>
-            <a:ext cx="1682897" cy="369332"/>
-          </a:xfrm>
-          <a:prstGeom prst="rect">
-            <a:avLst/>
-          </a:prstGeom>
-          <a:noFill/>
-        </p:spPr>
-        <p:txBody>
-          <a:bodyPr wrap="none" rtlCol="0">
-            <a:spAutoFit/>
-          </a:bodyPr>
-          <a:lstStyle/>
-          <a:p>
-            <a:r>
-              <a:rPr lang="fr-FR" dirty="0" err="1"/>
-              <a:t>ClusterManager</a:t>
-            </a:r>
-            <a:endParaRPr lang="fr-FR" dirty="0"/>
-          </a:p>
-        </p:txBody>
-      </p:sp>
-      <p:sp>
-        <p:nvSpPr>
-          <p:cNvPr id="35" name="Rectangle 34">
-            <a:extLst>
-              <a:ext uri="{FF2B5EF4-FFF2-40B4-BE49-F238E27FC236}">
-                <a16:creationId xmlns:a16="http://schemas.microsoft.com/office/drawing/2014/main" id="{B425C1A7-0143-4629-A8D1-579EFAF3009A}"/>
-              </a:ext>
-            </a:extLst>
-          </p:cNvPr>
-          <p:cNvSpPr/>
-          <p:nvPr/>
-        </p:nvSpPr>
-        <p:spPr>
-          <a:xfrm>
-            <a:off x="6173305" y="2452682"/>
-            <a:ext cx="440855" cy="1731546"/>
-          </a:xfrm>
-          <a:prstGeom prst="rect">
-            <a:avLst/>
-          </a:prstGeom>
-          <a:noFill/>
-          <a:ln w="25400">
-            <a:solidFill>
-              <a:schemeClr val="accent1">
-                <a:shade val="50000"/>
-              </a:schemeClr>
-            </a:solidFill>
-          </a:ln>
-        </p:spPr>
-        <p:style>
-          <a:lnRef idx="2">
-            <a:schemeClr val="accent1">
-              <a:shade val="50000"/>
-            </a:schemeClr>
-          </a:lnRef>
-          <a:fillRef idx="1">
-            <a:schemeClr val="accent1"/>
-          </a:fillRef>
-          <a:effectRef idx="0">
-            <a:schemeClr val="accent1"/>
-          </a:effectRef>
-          <a:fontRef idx="minor">
-            <a:schemeClr val="lt1"/>
-          </a:fontRef>
-        </p:style>
-        <p:txBody>
-          <a:bodyPr rtlCol="0" anchor="ctr"/>
-          <a:lstStyle/>
-          <a:p>
-            <a:pPr algn="ctr"/>
-            <a:endParaRPr lang="fr-FR"/>
-          </a:p>
-        </p:txBody>
-      </p:sp>
-      <p:sp>
-        <p:nvSpPr>
-          <p:cNvPr id="36" name="Arrow: Curved Down 35">
-            <a:extLst>
-              <a:ext uri="{FF2B5EF4-FFF2-40B4-BE49-F238E27FC236}">
-                <a16:creationId xmlns:a16="http://schemas.microsoft.com/office/drawing/2014/main" id="{D0E9FAE1-A0C2-44B7-9EBC-D59765820D6D}"/>
-              </a:ext>
-            </a:extLst>
-          </p:cNvPr>
-          <p:cNvSpPr/>
-          <p:nvPr/>
-        </p:nvSpPr>
-        <p:spPr>
-          <a:xfrm>
-            <a:off x="6814342" y="1774151"/>
-            <a:ext cx="1254760" cy="391002"/>
-          </a:xfrm>
-          <a:prstGeom prst="curvedDownArrow">
-            <a:avLst/>
-          </a:prstGeom>
-        </p:spPr>
-        <p:style>
-          <a:lnRef idx="2">
-            <a:schemeClr val="accent1">
-              <a:shade val="50000"/>
-            </a:schemeClr>
-          </a:lnRef>
-          <a:fillRef idx="1">
-            <a:schemeClr val="accent1"/>
-          </a:fillRef>
-          <a:effectRef idx="0">
-            <a:schemeClr val="accent1"/>
-          </a:effectRef>
-          <a:fontRef idx="minor">
-            <a:schemeClr val="lt1"/>
-          </a:fontRef>
-        </p:style>
-        <p:txBody>
-          <a:bodyPr rtlCol="0" anchor="ctr"/>
-          <a:lstStyle/>
-          <a:p>
-            <a:pPr algn="ctr"/>
-            <a:endParaRPr lang="fr-FR">
-              <a:solidFill>
-                <a:schemeClr val="tx1"/>
-              </a:solidFill>
-            </a:endParaRPr>
-          </a:p>
-        </p:txBody>
-      </p:sp>
-      <p:sp>
-        <p:nvSpPr>
-          <p:cNvPr id="37" name="Arrow: Curved Down 36">
-            <a:extLst>
-              <a:ext uri="{FF2B5EF4-FFF2-40B4-BE49-F238E27FC236}">
-                <a16:creationId xmlns:a16="http://schemas.microsoft.com/office/drawing/2014/main" id="{02618661-6882-40B4-8418-F21665E73A34}"/>
-              </a:ext>
-            </a:extLst>
-          </p:cNvPr>
-          <p:cNvSpPr/>
-          <p:nvPr/>
-        </p:nvSpPr>
-        <p:spPr>
-          <a:xfrm>
-            <a:off x="6800147" y="3873790"/>
-            <a:ext cx="1254760" cy="391002"/>
-          </a:xfrm>
-          <a:prstGeom prst="curvedDownArrow">
-            <a:avLst/>
-          </a:prstGeom>
-        </p:spPr>
-        <p:style>
-          <a:lnRef idx="2">
-            <a:schemeClr val="accent1">
-              <a:shade val="50000"/>
-            </a:schemeClr>
-          </a:lnRef>
-          <a:fillRef idx="1">
-            <a:schemeClr val="accent1"/>
-          </a:fillRef>
-          <a:effectRef idx="0">
-            <a:schemeClr val="accent1"/>
-          </a:effectRef>
-          <a:fontRef idx="minor">
-            <a:schemeClr val="lt1"/>
-          </a:fontRef>
-        </p:style>
-        <p:txBody>
-          <a:bodyPr rtlCol="0" anchor="ctr"/>
-          <a:lstStyle/>
-          <a:p>
-            <a:pPr algn="ctr"/>
-            <a:endParaRPr lang="fr-FR">
-              <a:solidFill>
-                <a:schemeClr val="tx1"/>
-              </a:solidFill>
-            </a:endParaRPr>
-          </a:p>
-        </p:txBody>
-      </p:sp>
-      <p:sp>
-        <p:nvSpPr>
-          <p:cNvPr id="38" name="TextBox 37">
-            <a:extLst>
-              <a:ext uri="{FF2B5EF4-FFF2-40B4-BE49-F238E27FC236}">
-                <a16:creationId xmlns:a16="http://schemas.microsoft.com/office/drawing/2014/main" id="{46702B82-07AE-44AD-B057-A63A8ABBE91A}"/>
-              </a:ext>
-            </a:extLst>
-          </p:cNvPr>
-          <p:cNvSpPr txBox="1"/>
-          <p:nvPr/>
-        </p:nvSpPr>
-        <p:spPr>
-          <a:xfrm>
-            <a:off x="8406837" y="1795821"/>
-            <a:ext cx="2590517" cy="369332"/>
-          </a:xfrm>
-          <a:prstGeom prst="rect">
-            <a:avLst/>
-          </a:prstGeom>
-          <a:noFill/>
-        </p:spPr>
-        <p:txBody>
-          <a:bodyPr wrap="none" rtlCol="0">
-            <a:spAutoFit/>
-          </a:bodyPr>
-          <a:lstStyle/>
-          <a:p>
-            <a:r>
-              <a:rPr lang="fr-FR" dirty="0"/>
-              <a:t>Java </a:t>
-            </a:r>
-            <a:r>
-              <a:rPr lang="fr-FR" dirty="0" err="1"/>
-              <a:t>CoarseGrainExecutor</a:t>
-            </a:r>
-            <a:endParaRPr lang="fr-FR" dirty="0"/>
-          </a:p>
-        </p:txBody>
-      </p:sp>
-      <p:sp>
-        <p:nvSpPr>
-          <p:cNvPr id="39" name="Rectangle 38">
-            <a:extLst>
-              <a:ext uri="{FF2B5EF4-FFF2-40B4-BE49-F238E27FC236}">
-                <a16:creationId xmlns:a16="http://schemas.microsoft.com/office/drawing/2014/main" id="{38EF6290-BAA6-41CD-9EFF-2092440FFBD3}"/>
-              </a:ext>
-            </a:extLst>
-          </p:cNvPr>
-          <p:cNvSpPr/>
-          <p:nvPr/>
-        </p:nvSpPr>
-        <p:spPr>
-          <a:xfrm>
-            <a:off x="8438516" y="4418360"/>
-            <a:ext cx="2511622" cy="1506329"/>
-          </a:xfrm>
-          <a:prstGeom prst="rect">
-            <a:avLst/>
-          </a:prstGeom>
-        </p:spPr>
-        <p:style>
-          <a:lnRef idx="2">
-            <a:schemeClr val="accent1">
-              <a:shade val="50000"/>
-            </a:schemeClr>
-          </a:lnRef>
-          <a:fillRef idx="1">
-            <a:schemeClr val="accent1"/>
-          </a:fillRef>
-          <a:effectRef idx="0">
-            <a:schemeClr val="accent1"/>
-          </a:effectRef>
-          <a:fontRef idx="minor">
-            <a:schemeClr val="lt1"/>
-          </a:fontRef>
-        </p:style>
-        <p:txBody>
-          <a:bodyPr rtlCol="0" anchor="ctr"/>
-          <a:lstStyle/>
-          <a:p>
-            <a:pPr algn="ctr"/>
-            <a:endParaRPr lang="fr-FR"/>
-          </a:p>
-        </p:txBody>
-      </p:sp>
-      <p:sp>
-        <p:nvSpPr>
-          <p:cNvPr id="40" name="TextBox 39">
-            <a:extLst>
-              <a:ext uri="{FF2B5EF4-FFF2-40B4-BE49-F238E27FC236}">
-                <a16:creationId xmlns:a16="http://schemas.microsoft.com/office/drawing/2014/main" id="{900A5D35-67BD-47FF-AFFD-69400E472F96}"/>
-              </a:ext>
-            </a:extLst>
-          </p:cNvPr>
-          <p:cNvSpPr txBox="1"/>
-          <p:nvPr/>
-        </p:nvSpPr>
-        <p:spPr>
-          <a:xfrm>
-            <a:off x="8406837" y="4418361"/>
-            <a:ext cx="2590517" cy="369332"/>
-          </a:xfrm>
-          <a:prstGeom prst="rect">
-            <a:avLst/>
-          </a:prstGeom>
-          <a:noFill/>
-        </p:spPr>
-        <p:txBody>
-          <a:bodyPr wrap="none" rtlCol="0">
-            <a:spAutoFit/>
-          </a:bodyPr>
-          <a:lstStyle/>
-          <a:p>
-            <a:r>
-              <a:rPr lang="fr-FR" dirty="0"/>
-              <a:t>Java </a:t>
-            </a:r>
-            <a:r>
-              <a:rPr lang="fr-FR" dirty="0" err="1"/>
-              <a:t>CoarseGrainExecutor</a:t>
-            </a:r>
-            <a:endParaRPr lang="fr-FR" dirty="0"/>
-          </a:p>
-        </p:txBody>
-      </p:sp>
-      <p:sp>
-        <p:nvSpPr>
-          <p:cNvPr id="41" name="TextBox 40">
-            <a:extLst>
-              <a:ext uri="{FF2B5EF4-FFF2-40B4-BE49-F238E27FC236}">
-                <a16:creationId xmlns:a16="http://schemas.microsoft.com/office/drawing/2014/main" id="{1D7EF325-DC3D-4D42-ACF4-3151A129E85E}"/>
-              </a:ext>
-            </a:extLst>
-          </p:cNvPr>
-          <p:cNvSpPr txBox="1"/>
-          <p:nvPr/>
-        </p:nvSpPr>
-        <p:spPr>
-          <a:xfrm>
-            <a:off x="105205" y="1308406"/>
-            <a:ext cx="5088400" cy="923330"/>
-          </a:xfrm>
-          <a:prstGeom prst="rect">
-            <a:avLst/>
-          </a:prstGeom>
-          <a:noFill/>
-        </p:spPr>
-        <p:txBody>
-          <a:bodyPr wrap="square" rtlCol="0">
-            <a:spAutoFit/>
-          </a:bodyPr>
-          <a:lstStyle/>
-          <a:p>
-            <a:r>
-              <a:rPr lang="fr-FR" b="1" dirty="0"/>
-              <a:t>Case 1</a:t>
-            </a:r>
-            <a:r>
-              <a:rPr lang="fr-FR" dirty="0"/>
-              <a:t>/ </a:t>
-            </a:r>
-            <a:r>
-              <a:rPr lang="fr-FR" dirty="0" err="1"/>
-              <a:t>Lauch</a:t>
-            </a:r>
-            <a:r>
-              <a:rPr lang="fr-FR" dirty="0"/>
+              <a:rPr lang="fr-FR" sz="2000" dirty="0"/>
+              <a:t>    </a:t>
+            </a:r>
+            <a:r>
+              <a:rPr lang="fr-FR" sz="2000" dirty="0" err="1"/>
+              <a:t>most</a:t>
+            </a:r>
+            <a:r>
+              <a:rPr lang="fr-FR" sz="2000" dirty="0"/>
               <a:t> </a:t>
             </a:r>
             <a:r>
-              <a:rPr lang="fr-FR" dirty="0" err="1"/>
-              <a:t>directly</a:t>
-            </a:r>
-            <a:r>
-              <a:rPr lang="fr-FR" dirty="0"/>
-              <a:t> java.. main(String[] args) {</a:t>
-            </a:r>
-          </a:p>
-          <a:p>
-            <a:r>
-              <a:rPr lang="fr-FR" dirty="0"/>
-              <a:t>   </a:t>
-            </a:r>
-            <a:r>
-              <a:rPr lang="fr-FR" b="1" dirty="0" err="1"/>
-              <a:t>SparkContext</a:t>
-            </a:r>
-            <a:r>
-              <a:rPr lang="fr-FR" dirty="0" err="1"/>
-              <a:t>.getOrCreate</a:t>
-            </a:r>
-            <a:r>
-              <a:rPr lang="fr-FR" dirty="0"/>
-              <a:t>()..</a:t>
-            </a:r>
-          </a:p>
-          <a:p>
-            <a:r>
-              <a:rPr lang="fr-FR" dirty="0"/>
-              <a:t>}</a:t>
-            </a:r>
-          </a:p>
-        </p:txBody>
-      </p:sp>
-      <p:sp>
-        <p:nvSpPr>
-          <p:cNvPr id="42" name="TextBox 41">
-            <a:extLst>
-              <a:ext uri="{FF2B5EF4-FFF2-40B4-BE49-F238E27FC236}">
-                <a16:creationId xmlns:a16="http://schemas.microsoft.com/office/drawing/2014/main" id="{E55C1252-4CAC-4A4A-9571-76937B1E3DF9}"/>
-              </a:ext>
-            </a:extLst>
-          </p:cNvPr>
-          <p:cNvSpPr txBox="1"/>
-          <p:nvPr/>
-        </p:nvSpPr>
-        <p:spPr>
-          <a:xfrm>
-            <a:off x="86998" y="2225967"/>
-            <a:ext cx="5088400" cy="369332"/>
-          </a:xfrm>
-          <a:prstGeom prst="rect">
-            <a:avLst/>
-          </a:prstGeom>
-          <a:noFill/>
-        </p:spPr>
-        <p:txBody>
-          <a:bodyPr wrap="square" rtlCol="0">
-            <a:spAutoFit/>
-          </a:bodyPr>
-          <a:lstStyle/>
-          <a:p>
-            <a:r>
-              <a:rPr lang="fr-FR" b="1" dirty="0"/>
-              <a:t>Case 2</a:t>
-            </a:r>
-            <a:r>
-              <a:rPr lang="fr-FR" dirty="0"/>
-              <a:t>/ </a:t>
-            </a:r>
-            <a:r>
-              <a:rPr lang="fr-FR" dirty="0" err="1"/>
-              <a:t>spark-submit</a:t>
-            </a:r>
-            <a:r>
-              <a:rPr lang="fr-FR" dirty="0"/>
-              <a:t> –mode </a:t>
-            </a:r>
-            <a:r>
-              <a:rPr lang="fr-FR" b="1" dirty="0"/>
-              <a:t>client</a:t>
-            </a:r>
-          </a:p>
-        </p:txBody>
-      </p:sp>
-      <p:sp>
-        <p:nvSpPr>
-          <p:cNvPr id="43" name="Arrow: Curved Down 42">
-            <a:extLst>
-              <a:ext uri="{FF2B5EF4-FFF2-40B4-BE49-F238E27FC236}">
-                <a16:creationId xmlns:a16="http://schemas.microsoft.com/office/drawing/2014/main" id="{97911A94-ED92-4FC9-9E93-3344F766A868}"/>
-              </a:ext>
-            </a:extLst>
-          </p:cNvPr>
-          <p:cNvSpPr/>
-          <p:nvPr/>
-        </p:nvSpPr>
-        <p:spPr>
-          <a:xfrm>
-            <a:off x="2775429" y="1810959"/>
-            <a:ext cx="1254760" cy="391002"/>
-          </a:xfrm>
-          <a:prstGeom prst="curvedDownArrow">
-            <a:avLst/>
-          </a:prstGeom>
-        </p:spPr>
-        <p:style>
-          <a:lnRef idx="2">
-            <a:schemeClr val="accent1">
-              <a:shade val="50000"/>
-            </a:schemeClr>
-          </a:lnRef>
-          <a:fillRef idx="1">
-            <a:schemeClr val="accent1"/>
-          </a:fillRef>
-          <a:effectRef idx="0">
-            <a:schemeClr val="accent1"/>
-          </a:effectRef>
-          <a:fontRef idx="minor">
-            <a:schemeClr val="lt1"/>
-          </a:fontRef>
-        </p:style>
-        <p:txBody>
-          <a:bodyPr rtlCol="0" anchor="ctr"/>
-          <a:lstStyle/>
-          <a:p>
-            <a:pPr algn="ctr"/>
-            <a:endParaRPr lang="fr-FR">
-              <a:solidFill>
-                <a:schemeClr val="tx1"/>
-              </a:solidFill>
-            </a:endParaRPr>
-          </a:p>
-        </p:txBody>
-      </p:sp>
-      <p:sp>
-        <p:nvSpPr>
-          <p:cNvPr id="44" name="Arrow: Curved Down 43">
-            <a:extLst>
-              <a:ext uri="{FF2B5EF4-FFF2-40B4-BE49-F238E27FC236}">
-                <a16:creationId xmlns:a16="http://schemas.microsoft.com/office/drawing/2014/main" id="{C532762B-8624-43D0-8C8D-25533C268C30}"/>
-              </a:ext>
-            </a:extLst>
-          </p:cNvPr>
-          <p:cNvSpPr/>
-          <p:nvPr/>
-        </p:nvSpPr>
-        <p:spPr>
-          <a:xfrm>
-            <a:off x="2800969" y="2553704"/>
-            <a:ext cx="1254760" cy="391002"/>
-          </a:xfrm>
-          <a:prstGeom prst="curvedDownArrow">
-            <a:avLst/>
-          </a:prstGeom>
-        </p:spPr>
-        <p:style>
-          <a:lnRef idx="2">
-            <a:schemeClr val="accent1">
-              <a:shade val="50000"/>
-            </a:schemeClr>
-          </a:lnRef>
-          <a:fillRef idx="1">
-            <a:schemeClr val="accent1"/>
-          </a:fillRef>
-          <a:effectRef idx="0">
-            <a:schemeClr val="accent1"/>
-          </a:effectRef>
-          <a:fontRef idx="minor">
-            <a:schemeClr val="lt1"/>
-          </a:fontRef>
-        </p:style>
-        <p:txBody>
-          <a:bodyPr rtlCol="0" anchor="ctr"/>
-          <a:lstStyle/>
-          <a:p>
-            <a:pPr algn="ctr"/>
-            <a:endParaRPr lang="fr-FR">
-              <a:solidFill>
-                <a:schemeClr val="tx1"/>
-              </a:solidFill>
-            </a:endParaRPr>
-          </a:p>
-        </p:txBody>
-      </p:sp>
-      <p:sp>
-        <p:nvSpPr>
-          <p:cNvPr id="45" name="TextBox 44">
-            <a:extLst>
-              <a:ext uri="{FF2B5EF4-FFF2-40B4-BE49-F238E27FC236}">
-                <a16:creationId xmlns:a16="http://schemas.microsoft.com/office/drawing/2014/main" id="{B308151B-221C-47B1-A835-480A43C03EF2}"/>
-              </a:ext>
-            </a:extLst>
-          </p:cNvPr>
-          <p:cNvSpPr txBox="1"/>
-          <p:nvPr/>
-        </p:nvSpPr>
-        <p:spPr>
-          <a:xfrm>
-            <a:off x="4767248" y="1639650"/>
-            <a:ext cx="1363963" cy="369332"/>
-          </a:xfrm>
-          <a:prstGeom prst="rect">
-            <a:avLst/>
-          </a:prstGeom>
-          <a:noFill/>
-        </p:spPr>
-        <p:txBody>
-          <a:bodyPr wrap="none" rtlCol="0">
-            <a:spAutoFit/>
-          </a:bodyPr>
-          <a:lstStyle/>
-          <a:p>
-            <a:r>
-              <a:rPr lang="fr-FR" b="1" dirty="0"/>
-              <a:t>Spark Driver</a:t>
-            </a:r>
-          </a:p>
-        </p:txBody>
-      </p:sp>
-      <p:sp>
-        <p:nvSpPr>
-          <p:cNvPr id="46" name="Rectangle 45">
-            <a:extLst>
-              <a:ext uri="{FF2B5EF4-FFF2-40B4-BE49-F238E27FC236}">
-                <a16:creationId xmlns:a16="http://schemas.microsoft.com/office/drawing/2014/main" id="{3C627AB8-084E-46D9-BD6D-EA1C20411E64}"/>
-              </a:ext>
-            </a:extLst>
-          </p:cNvPr>
-          <p:cNvSpPr/>
-          <p:nvPr/>
-        </p:nvSpPr>
-        <p:spPr>
-          <a:xfrm>
-            <a:off x="8642123" y="4938645"/>
-            <a:ext cx="781123" cy="490665"/>
-          </a:xfrm>
-          <a:prstGeom prst="rect">
-            <a:avLst/>
-          </a:prstGeom>
-          <a:solidFill>
-            <a:schemeClr val="accent1">
-              <a:lumMod val="40000"/>
-              <a:lumOff val="60000"/>
-            </a:schemeClr>
-          </a:solidFill>
-          <a:ln w="25400">
-            <a:solidFill>
-              <a:schemeClr val="accent1">
-                <a:shade val="50000"/>
-              </a:schemeClr>
-            </a:solidFill>
-          </a:ln>
-        </p:spPr>
-        <p:style>
-          <a:lnRef idx="2">
-            <a:schemeClr val="accent1">
-              <a:shade val="50000"/>
-            </a:schemeClr>
-          </a:lnRef>
-          <a:fillRef idx="1">
-            <a:schemeClr val="accent1"/>
-          </a:fillRef>
-          <a:effectRef idx="0">
-            <a:schemeClr val="accent1"/>
-          </a:effectRef>
-          <a:fontRef idx="minor">
-            <a:schemeClr val="lt1"/>
-          </a:fontRef>
-        </p:style>
-        <p:txBody>
-          <a:bodyPr rtlCol="0" anchor="ctr"/>
-          <a:lstStyle/>
-          <a:p>
-            <a:pPr algn="ctr"/>
-            <a:endParaRPr lang="fr-FR"/>
-          </a:p>
-        </p:txBody>
-      </p:sp>
-      <p:sp>
-        <p:nvSpPr>
-          <p:cNvPr id="47" name="Rectangle 46">
-            <a:extLst>
-              <a:ext uri="{FF2B5EF4-FFF2-40B4-BE49-F238E27FC236}">
-                <a16:creationId xmlns:a16="http://schemas.microsoft.com/office/drawing/2014/main" id="{2EB17D59-BB96-4BE5-9594-DC7AE5F6428D}"/>
-              </a:ext>
-            </a:extLst>
-          </p:cNvPr>
-          <p:cNvSpPr/>
-          <p:nvPr/>
-        </p:nvSpPr>
-        <p:spPr>
-          <a:xfrm>
-            <a:off x="8714475" y="5050079"/>
-            <a:ext cx="781123" cy="490665"/>
-          </a:xfrm>
-          <a:prstGeom prst="rect">
-            <a:avLst/>
-          </a:prstGeom>
-          <a:solidFill>
-            <a:schemeClr val="accent1">
-              <a:lumMod val="40000"/>
-              <a:lumOff val="60000"/>
-            </a:schemeClr>
-          </a:solidFill>
-          <a:ln w="25400">
-            <a:solidFill>
-              <a:schemeClr val="accent1">
-                <a:shade val="50000"/>
-              </a:schemeClr>
-            </a:solidFill>
-          </a:ln>
-        </p:spPr>
-        <p:style>
-          <a:lnRef idx="2">
-            <a:schemeClr val="accent1">
-              <a:shade val="50000"/>
-            </a:schemeClr>
-          </a:lnRef>
-          <a:fillRef idx="1">
-            <a:schemeClr val="accent1"/>
-          </a:fillRef>
-          <a:effectRef idx="0">
-            <a:schemeClr val="accent1"/>
-          </a:effectRef>
-          <a:fontRef idx="minor">
-            <a:schemeClr val="lt1"/>
-          </a:fontRef>
-        </p:style>
-        <p:txBody>
-          <a:bodyPr rtlCol="0" anchor="ctr"/>
-          <a:lstStyle/>
-          <a:p>
-            <a:pPr algn="ctr"/>
-            <a:endParaRPr lang="fr-FR"/>
-          </a:p>
-        </p:txBody>
-      </p:sp>
-      <p:sp>
-        <p:nvSpPr>
-          <p:cNvPr id="50" name="Rectangle 49">
-            <a:extLst>
-              <a:ext uri="{FF2B5EF4-FFF2-40B4-BE49-F238E27FC236}">
-                <a16:creationId xmlns:a16="http://schemas.microsoft.com/office/drawing/2014/main" id="{EDBC0C3F-E91B-4A15-88C0-7CA6FE5CDE30}"/>
-              </a:ext>
-            </a:extLst>
-          </p:cNvPr>
-          <p:cNvSpPr/>
-          <p:nvPr/>
-        </p:nvSpPr>
-        <p:spPr>
-          <a:xfrm>
-            <a:off x="8801751" y="5182154"/>
-            <a:ext cx="781123" cy="490665"/>
-          </a:xfrm>
-          <a:prstGeom prst="rect">
-            <a:avLst/>
-          </a:prstGeom>
-          <a:solidFill>
-            <a:schemeClr val="accent1">
-              <a:lumMod val="40000"/>
-              <a:lumOff val="60000"/>
-            </a:schemeClr>
-          </a:solidFill>
-          <a:ln w="25400">
-            <a:solidFill>
-              <a:schemeClr val="accent1">
-                <a:shade val="50000"/>
-              </a:schemeClr>
-            </a:solidFill>
-          </a:ln>
-        </p:spPr>
-        <p:style>
-          <a:lnRef idx="2">
-            <a:schemeClr val="accent1">
-              <a:shade val="50000"/>
-            </a:schemeClr>
-          </a:lnRef>
-          <a:fillRef idx="1">
-            <a:schemeClr val="accent1"/>
-          </a:fillRef>
-          <a:effectRef idx="0">
-            <a:schemeClr val="accent1"/>
-          </a:effectRef>
-          <a:fontRef idx="minor">
-            <a:schemeClr val="lt1"/>
-          </a:fontRef>
-        </p:style>
-        <p:txBody>
-          <a:bodyPr rtlCol="0" anchor="ctr"/>
-          <a:lstStyle/>
-          <a:p>
-            <a:pPr algn="ctr"/>
-            <a:endParaRPr lang="fr-FR"/>
-          </a:p>
-        </p:txBody>
-      </p:sp>
-      <p:sp>
-        <p:nvSpPr>
-          <p:cNvPr id="48" name="TextBox 47">
-            <a:extLst>
-              <a:ext uri="{FF2B5EF4-FFF2-40B4-BE49-F238E27FC236}">
-                <a16:creationId xmlns:a16="http://schemas.microsoft.com/office/drawing/2014/main" id="{5018F8A2-F4AE-4CE1-9093-E1C1116667DB}"/>
-              </a:ext>
-            </a:extLst>
-          </p:cNvPr>
-          <p:cNvSpPr txBox="1"/>
-          <p:nvPr/>
-        </p:nvSpPr>
-        <p:spPr>
-          <a:xfrm>
-            <a:off x="8875993" y="5218433"/>
-            <a:ext cx="583429" cy="369332"/>
-          </a:xfrm>
-          <a:prstGeom prst="rect">
-            <a:avLst/>
-          </a:prstGeom>
-          <a:noFill/>
-        </p:spPr>
-        <p:txBody>
-          <a:bodyPr wrap="none" rtlCol="0">
-            <a:spAutoFit/>
-          </a:bodyPr>
-          <a:lstStyle/>
-          <a:p>
-            <a:r>
-              <a:rPr lang="fr-FR" dirty="0" err="1"/>
-              <a:t>Task</a:t>
-            </a:r>
-            <a:endParaRPr lang="fr-FR" dirty="0"/>
-          </a:p>
-        </p:txBody>
-      </p:sp>
-      <p:sp>
-        <p:nvSpPr>
-          <p:cNvPr id="51" name="Rectangle 50">
-            <a:extLst>
-              <a:ext uri="{FF2B5EF4-FFF2-40B4-BE49-F238E27FC236}">
-                <a16:creationId xmlns:a16="http://schemas.microsoft.com/office/drawing/2014/main" id="{828F0CBC-1F42-42D8-B6DB-BE2157936898}"/>
-              </a:ext>
-            </a:extLst>
-          </p:cNvPr>
-          <p:cNvSpPr/>
-          <p:nvPr/>
-        </p:nvSpPr>
-        <p:spPr>
-          <a:xfrm>
-            <a:off x="9852291" y="4949818"/>
-            <a:ext cx="781123" cy="490665"/>
-          </a:xfrm>
-          <a:prstGeom prst="rect">
-            <a:avLst/>
-          </a:prstGeom>
-          <a:solidFill>
-            <a:schemeClr val="accent1">
-              <a:lumMod val="40000"/>
-              <a:lumOff val="60000"/>
-            </a:schemeClr>
-          </a:solidFill>
-          <a:ln w="25400">
-            <a:solidFill>
-              <a:schemeClr val="accent1">
-                <a:shade val="50000"/>
-              </a:schemeClr>
-            </a:solidFill>
-          </a:ln>
-        </p:spPr>
-        <p:style>
-          <a:lnRef idx="2">
-            <a:schemeClr val="accent1">
-              <a:shade val="50000"/>
-            </a:schemeClr>
-          </a:lnRef>
-          <a:fillRef idx="1">
-            <a:schemeClr val="accent1"/>
-          </a:fillRef>
-          <a:effectRef idx="0">
-            <a:schemeClr val="accent1"/>
-          </a:effectRef>
-          <a:fontRef idx="minor">
-            <a:schemeClr val="lt1"/>
-          </a:fontRef>
-        </p:style>
-        <p:txBody>
-          <a:bodyPr rtlCol="0" anchor="ctr"/>
-          <a:lstStyle/>
-          <a:p>
-            <a:pPr algn="ctr"/>
-            <a:endParaRPr lang="fr-FR"/>
-          </a:p>
-        </p:txBody>
-      </p:sp>
-      <p:sp>
-        <p:nvSpPr>
-          <p:cNvPr id="52" name="TextBox 51">
-            <a:extLst>
-              <a:ext uri="{FF2B5EF4-FFF2-40B4-BE49-F238E27FC236}">
-                <a16:creationId xmlns:a16="http://schemas.microsoft.com/office/drawing/2014/main" id="{C7DC6C03-F906-41E1-99DE-0C563A765B5A}"/>
-              </a:ext>
-            </a:extLst>
-          </p:cNvPr>
-          <p:cNvSpPr txBox="1"/>
-          <p:nvPr/>
-        </p:nvSpPr>
-        <p:spPr>
-          <a:xfrm>
-            <a:off x="9926533" y="4986097"/>
-            <a:ext cx="753732" cy="369332"/>
-          </a:xfrm>
-          <a:prstGeom prst="rect">
-            <a:avLst/>
-          </a:prstGeom>
-          <a:noFill/>
-        </p:spPr>
-        <p:txBody>
-          <a:bodyPr wrap="none" rtlCol="0">
-            <a:spAutoFit/>
-          </a:bodyPr>
-          <a:lstStyle/>
-          <a:p>
-            <a:r>
-              <a:rPr lang="fr-FR" dirty="0"/>
-              <a:t>Cache</a:t>
-            </a:r>
-          </a:p>
-        </p:txBody>
-      </p:sp>
-      <p:sp>
-        <p:nvSpPr>
-          <p:cNvPr id="53" name="Rectangle 52">
-            <a:extLst>
-              <a:ext uri="{FF2B5EF4-FFF2-40B4-BE49-F238E27FC236}">
-                <a16:creationId xmlns:a16="http://schemas.microsoft.com/office/drawing/2014/main" id="{C0670CF4-4535-4531-BE41-EDA4402AFA73}"/>
-              </a:ext>
-            </a:extLst>
-          </p:cNvPr>
-          <p:cNvSpPr/>
-          <p:nvPr/>
-        </p:nvSpPr>
-        <p:spPr>
-          <a:xfrm>
-            <a:off x="8640357" y="2355681"/>
-            <a:ext cx="781123" cy="490665"/>
-          </a:xfrm>
-          <a:prstGeom prst="rect">
-            <a:avLst/>
-          </a:prstGeom>
-          <a:solidFill>
-            <a:schemeClr val="accent1">
-              <a:lumMod val="40000"/>
-              <a:lumOff val="60000"/>
-            </a:schemeClr>
-          </a:solidFill>
-          <a:ln w="25400">
-            <a:solidFill>
-              <a:schemeClr val="accent1">
-                <a:shade val="50000"/>
-              </a:schemeClr>
-            </a:solidFill>
-          </a:ln>
-        </p:spPr>
-        <p:style>
-          <a:lnRef idx="2">
-            <a:schemeClr val="accent1">
-              <a:shade val="50000"/>
-            </a:schemeClr>
-          </a:lnRef>
-          <a:fillRef idx="1">
-            <a:schemeClr val="accent1"/>
-          </a:fillRef>
-          <a:effectRef idx="0">
-            <a:schemeClr val="accent1"/>
-          </a:effectRef>
-          <a:fontRef idx="minor">
-            <a:schemeClr val="lt1"/>
-          </a:fontRef>
-        </p:style>
-        <p:txBody>
-          <a:bodyPr rtlCol="0" anchor="ctr"/>
-          <a:lstStyle/>
-          <a:p>
-            <a:pPr algn="ctr"/>
-            <a:endParaRPr lang="fr-FR"/>
-          </a:p>
-        </p:txBody>
-      </p:sp>
-      <p:sp>
-        <p:nvSpPr>
-          <p:cNvPr id="54" name="Rectangle 53">
-            <a:extLst>
-              <a:ext uri="{FF2B5EF4-FFF2-40B4-BE49-F238E27FC236}">
-                <a16:creationId xmlns:a16="http://schemas.microsoft.com/office/drawing/2014/main" id="{62E40109-6680-43CD-B679-65273F6EE75D}"/>
-              </a:ext>
-            </a:extLst>
-          </p:cNvPr>
-          <p:cNvSpPr/>
-          <p:nvPr/>
-        </p:nvSpPr>
-        <p:spPr>
-          <a:xfrm>
-            <a:off x="8712709" y="2467115"/>
-            <a:ext cx="781123" cy="490665"/>
-          </a:xfrm>
-          <a:prstGeom prst="rect">
-            <a:avLst/>
-          </a:prstGeom>
-          <a:solidFill>
-            <a:schemeClr val="accent1">
-              <a:lumMod val="40000"/>
-              <a:lumOff val="60000"/>
-            </a:schemeClr>
-          </a:solidFill>
-          <a:ln w="25400">
-            <a:solidFill>
-              <a:schemeClr val="accent1">
-                <a:shade val="50000"/>
-              </a:schemeClr>
-            </a:solidFill>
-          </a:ln>
-        </p:spPr>
-        <p:style>
-          <a:lnRef idx="2">
-            <a:schemeClr val="accent1">
-              <a:shade val="50000"/>
-            </a:schemeClr>
-          </a:lnRef>
-          <a:fillRef idx="1">
-            <a:schemeClr val="accent1"/>
-          </a:fillRef>
-          <a:effectRef idx="0">
-            <a:schemeClr val="accent1"/>
-          </a:effectRef>
-          <a:fontRef idx="minor">
-            <a:schemeClr val="lt1"/>
-          </a:fontRef>
-        </p:style>
-        <p:txBody>
-          <a:bodyPr rtlCol="0" anchor="ctr"/>
-          <a:lstStyle/>
-          <a:p>
-            <a:pPr algn="ctr"/>
-            <a:endParaRPr lang="fr-FR"/>
-          </a:p>
-        </p:txBody>
-      </p:sp>
-      <p:sp>
-        <p:nvSpPr>
-          <p:cNvPr id="55" name="Rectangle 54">
-            <a:extLst>
-              <a:ext uri="{FF2B5EF4-FFF2-40B4-BE49-F238E27FC236}">
-                <a16:creationId xmlns:a16="http://schemas.microsoft.com/office/drawing/2014/main" id="{8FD87FE6-7C79-4A19-A8ED-FE6F964347C2}"/>
-              </a:ext>
-            </a:extLst>
-          </p:cNvPr>
-          <p:cNvSpPr/>
-          <p:nvPr/>
-        </p:nvSpPr>
-        <p:spPr>
-          <a:xfrm>
-            <a:off x="8799985" y="2599190"/>
-            <a:ext cx="781123" cy="490665"/>
-          </a:xfrm>
-          <a:prstGeom prst="rect">
-            <a:avLst/>
-          </a:prstGeom>
-          <a:solidFill>
-            <a:schemeClr val="accent1">
-              <a:lumMod val="40000"/>
-              <a:lumOff val="60000"/>
-            </a:schemeClr>
-          </a:solidFill>
-          <a:ln w="25400">
-            <a:solidFill>
-              <a:schemeClr val="accent1">
-                <a:shade val="50000"/>
-              </a:schemeClr>
-            </a:solidFill>
-          </a:ln>
-        </p:spPr>
-        <p:style>
-          <a:lnRef idx="2">
-            <a:schemeClr val="accent1">
-              <a:shade val="50000"/>
-            </a:schemeClr>
-          </a:lnRef>
-          <a:fillRef idx="1">
-            <a:schemeClr val="accent1"/>
-          </a:fillRef>
-          <a:effectRef idx="0">
-            <a:schemeClr val="accent1"/>
-          </a:effectRef>
-          <a:fontRef idx="minor">
-            <a:schemeClr val="lt1"/>
-          </a:fontRef>
-        </p:style>
-        <p:txBody>
-          <a:bodyPr rtlCol="0" anchor="ctr"/>
-          <a:lstStyle/>
-          <a:p>
-            <a:pPr algn="ctr"/>
-            <a:endParaRPr lang="fr-FR"/>
-          </a:p>
-        </p:txBody>
-      </p:sp>
-      <p:sp>
-        <p:nvSpPr>
-          <p:cNvPr id="56" name="TextBox 55">
-            <a:extLst>
-              <a:ext uri="{FF2B5EF4-FFF2-40B4-BE49-F238E27FC236}">
-                <a16:creationId xmlns:a16="http://schemas.microsoft.com/office/drawing/2014/main" id="{BB86DAC6-3D15-4D28-90DD-428C621403D5}"/>
-              </a:ext>
-            </a:extLst>
-          </p:cNvPr>
-          <p:cNvSpPr txBox="1"/>
-          <p:nvPr/>
-        </p:nvSpPr>
-        <p:spPr>
-          <a:xfrm>
-            <a:off x="8874227" y="2635469"/>
-            <a:ext cx="583429" cy="369332"/>
-          </a:xfrm>
-          <a:prstGeom prst="rect">
-            <a:avLst/>
-          </a:prstGeom>
-          <a:noFill/>
-        </p:spPr>
-        <p:txBody>
-          <a:bodyPr wrap="none" rtlCol="0">
-            <a:spAutoFit/>
-          </a:bodyPr>
-          <a:lstStyle/>
-          <a:p>
-            <a:r>
-              <a:rPr lang="fr-FR" dirty="0" err="1"/>
-              <a:t>Task</a:t>
-            </a:r>
-            <a:endParaRPr lang="fr-FR" dirty="0"/>
-          </a:p>
-        </p:txBody>
-      </p:sp>
-      <p:sp>
-        <p:nvSpPr>
-          <p:cNvPr id="57" name="Rectangle 56">
-            <a:extLst>
-              <a:ext uri="{FF2B5EF4-FFF2-40B4-BE49-F238E27FC236}">
-                <a16:creationId xmlns:a16="http://schemas.microsoft.com/office/drawing/2014/main" id="{592DDE6D-903B-421E-B514-E204EB682DD1}"/>
-              </a:ext>
-            </a:extLst>
-          </p:cNvPr>
-          <p:cNvSpPr/>
-          <p:nvPr/>
-        </p:nvSpPr>
-        <p:spPr>
-          <a:xfrm>
-            <a:off x="9850525" y="2366854"/>
-            <a:ext cx="781123" cy="490665"/>
-          </a:xfrm>
-          <a:prstGeom prst="rect">
-            <a:avLst/>
-          </a:prstGeom>
-          <a:solidFill>
-            <a:schemeClr val="accent1">
-              <a:lumMod val="40000"/>
-              <a:lumOff val="60000"/>
-            </a:schemeClr>
-          </a:solidFill>
-          <a:ln w="25400">
-            <a:solidFill>
-              <a:schemeClr val="accent1">
-                <a:shade val="50000"/>
-              </a:schemeClr>
-            </a:solidFill>
-          </a:ln>
-        </p:spPr>
-        <p:style>
-          <a:lnRef idx="2">
-            <a:schemeClr val="accent1">
-              <a:shade val="50000"/>
-            </a:schemeClr>
-          </a:lnRef>
-          <a:fillRef idx="1">
-            <a:schemeClr val="accent1"/>
-          </a:fillRef>
-          <a:effectRef idx="0">
-            <a:schemeClr val="accent1"/>
-          </a:effectRef>
-          <a:fontRef idx="minor">
-            <a:schemeClr val="lt1"/>
-          </a:fontRef>
-        </p:style>
-        <p:txBody>
-          <a:bodyPr rtlCol="0" anchor="ctr"/>
-          <a:lstStyle/>
-          <a:p>
-            <a:pPr algn="ctr"/>
-            <a:endParaRPr lang="fr-FR"/>
-          </a:p>
-        </p:txBody>
-      </p:sp>
-      <p:sp>
-        <p:nvSpPr>
-          <p:cNvPr id="58" name="TextBox 57">
-            <a:extLst>
-              <a:ext uri="{FF2B5EF4-FFF2-40B4-BE49-F238E27FC236}">
-                <a16:creationId xmlns:a16="http://schemas.microsoft.com/office/drawing/2014/main" id="{0A21A801-2CC7-42CE-B597-FC74EE53736B}"/>
-              </a:ext>
-            </a:extLst>
-          </p:cNvPr>
-          <p:cNvSpPr txBox="1"/>
-          <p:nvPr/>
-        </p:nvSpPr>
-        <p:spPr>
-          <a:xfrm>
-            <a:off x="9924767" y="2403133"/>
-            <a:ext cx="753732" cy="369332"/>
-          </a:xfrm>
-          <a:prstGeom prst="rect">
-            <a:avLst/>
-          </a:prstGeom>
-          <a:noFill/>
-        </p:spPr>
-        <p:txBody>
-          <a:bodyPr wrap="none" rtlCol="0">
-            <a:spAutoFit/>
-          </a:bodyPr>
-          <a:lstStyle/>
-          <a:p>
-            <a:r>
-              <a:rPr lang="fr-FR" dirty="0"/>
-              <a:t>Cache</a:t>
-            </a:r>
-          </a:p>
-        </p:txBody>
-      </p:sp>
-      <p:sp>
-        <p:nvSpPr>
-          <p:cNvPr id="59" name="TextBox 58">
-            <a:extLst>
-              <a:ext uri="{FF2B5EF4-FFF2-40B4-BE49-F238E27FC236}">
-                <a16:creationId xmlns:a16="http://schemas.microsoft.com/office/drawing/2014/main" id="{05E08A0E-485F-4E58-B53B-ADF0355AF041}"/>
-              </a:ext>
-            </a:extLst>
-          </p:cNvPr>
-          <p:cNvSpPr txBox="1"/>
-          <p:nvPr/>
-        </p:nvSpPr>
-        <p:spPr>
-          <a:xfrm>
-            <a:off x="8943412" y="1447291"/>
-            <a:ext cx="1606787" cy="369332"/>
-          </a:xfrm>
-          <a:prstGeom prst="rect">
-            <a:avLst/>
-          </a:prstGeom>
-          <a:noFill/>
-        </p:spPr>
-        <p:txBody>
-          <a:bodyPr wrap="none" rtlCol="0">
-            <a:spAutoFit/>
-          </a:bodyPr>
-          <a:lstStyle/>
-          <a:p>
-            <a:r>
-              <a:rPr lang="fr-FR" b="1" dirty="0"/>
-              <a:t>Spark </a:t>
-            </a:r>
-            <a:r>
-              <a:rPr lang="fr-FR" b="1" dirty="0" err="1"/>
-              <a:t>Executor</a:t>
-            </a:r>
-            <a:endParaRPr lang="fr-FR" b="1" dirty="0"/>
-          </a:p>
-        </p:txBody>
-      </p:sp>
-      <p:sp>
-        <p:nvSpPr>
-          <p:cNvPr id="60" name="TextBox 59">
-            <a:extLst>
-              <a:ext uri="{FF2B5EF4-FFF2-40B4-BE49-F238E27FC236}">
-                <a16:creationId xmlns:a16="http://schemas.microsoft.com/office/drawing/2014/main" id="{6C7EF164-4FD7-4F08-A746-5E1CA1BF22F9}"/>
-              </a:ext>
-            </a:extLst>
-          </p:cNvPr>
-          <p:cNvSpPr txBox="1"/>
-          <p:nvPr/>
-        </p:nvSpPr>
-        <p:spPr>
-          <a:xfrm>
-            <a:off x="8892024" y="4084531"/>
-            <a:ext cx="1606787" cy="369332"/>
-          </a:xfrm>
-          <a:prstGeom prst="rect">
-            <a:avLst/>
-          </a:prstGeom>
-          <a:noFill/>
-        </p:spPr>
-        <p:txBody>
-          <a:bodyPr wrap="none" rtlCol="0">
-            <a:spAutoFit/>
-          </a:bodyPr>
-          <a:lstStyle/>
-          <a:p>
-            <a:r>
-              <a:rPr lang="fr-FR" b="1" dirty="0"/>
-              <a:t>Spark </a:t>
-            </a:r>
-            <a:r>
-              <a:rPr lang="fr-FR" b="1" dirty="0" err="1"/>
-              <a:t>Executor</a:t>
-            </a:r>
-            <a:endParaRPr lang="fr-FR" b="1" dirty="0"/>
+              <a:rPr lang="fr-FR" sz="2000" dirty="0" err="1"/>
+              <a:t>daily</a:t>
+            </a:r>
+            <a:r>
+              <a:rPr lang="fr-FR" sz="2000" dirty="0"/>
+              <a:t> </a:t>
+            </a:r>
+            <a:r>
+              <a:rPr lang="fr-FR" sz="2000" dirty="0" err="1"/>
+              <a:t>batches</a:t>
+            </a:r>
+            <a:r>
+              <a:rPr lang="fr-FR" sz="2000" dirty="0"/>
+              <a:t> run once per </a:t>
+            </a:r>
+            <a:r>
+              <a:rPr lang="fr-FR" sz="2000" dirty="0" err="1"/>
+              <a:t>day</a:t>
+            </a:r>
+            <a:r>
+              <a:rPr lang="fr-FR" sz="2000" dirty="0"/>
+              <a:t>, </a:t>
+            </a:r>
+            <a:r>
+              <a:rPr lang="fr-FR" sz="2000" dirty="0" err="1"/>
+              <a:t>late</a:t>
+            </a:r>
+            <a:r>
+              <a:rPr lang="fr-FR" sz="2000" dirty="0"/>
+              <a:t> or </a:t>
+            </a:r>
+            <a:r>
+              <a:rPr lang="fr-FR" sz="2000" dirty="0" err="1"/>
+              <a:t>during</a:t>
+            </a:r>
+            <a:r>
+              <a:rPr lang="fr-FR" sz="2000" dirty="0"/>
+              <a:t> night </a:t>
+            </a:r>
+          </a:p>
+          <a:p>
+            <a:endParaRPr lang="fr-FR" sz="2000" dirty="0"/>
+          </a:p>
+          <a:p>
+            <a:endParaRPr lang="fr-FR" sz="2000" dirty="0"/>
+          </a:p>
+          <a:p>
+            <a:r>
+              <a:rPr lang="fr-FR" sz="2000" dirty="0"/>
+              <a:t>How to </a:t>
+            </a:r>
+            <a:r>
+              <a:rPr lang="fr-FR" sz="2000" dirty="0" err="1"/>
+              <a:t>analyze</a:t>
+            </a:r>
+            <a:r>
+              <a:rPr lang="fr-FR" sz="2000" dirty="0"/>
+              <a:t> performances, but OFFLINE ?</a:t>
+            </a:r>
+          </a:p>
+          <a:p>
+            <a:r>
+              <a:rPr lang="fr-FR" sz="2000" dirty="0"/>
+              <a:t>(process </a:t>
+            </a:r>
+            <a:r>
+              <a:rPr lang="fr-FR" sz="2000" dirty="0" err="1"/>
+              <a:t>finished</a:t>
+            </a:r>
+            <a:r>
+              <a:rPr lang="fr-FR" sz="2000" dirty="0"/>
+              <a:t>  =&gt; not able to </a:t>
+            </a:r>
+            <a:r>
+              <a:rPr lang="fr-FR" sz="2000" dirty="0" err="1"/>
+              <a:t>connect</a:t>
+            </a:r>
+            <a:r>
+              <a:rPr lang="fr-FR" sz="2000" dirty="0"/>
+              <a:t> to « http://localhost:4040 »  )</a:t>
+            </a:r>
+          </a:p>
+          <a:p>
+            <a:endParaRPr lang="fr-FR" sz="2000" dirty="0"/>
+          </a:p>
+          <a:p>
+            <a:r>
+              <a:rPr lang="fr-FR" sz="2000" dirty="0"/>
+              <a:t>How to compare performances </a:t>
+            </a:r>
+            <a:r>
+              <a:rPr lang="fr-FR" sz="2000" dirty="0" err="1"/>
+              <a:t>with</a:t>
+            </a:r>
+            <a:r>
+              <a:rPr lang="fr-FR" sz="2000" dirty="0"/>
+              <a:t> </a:t>
+            </a:r>
+            <a:r>
+              <a:rPr lang="fr-FR" sz="2000" dirty="0" err="1"/>
+              <a:t>older</a:t>
+            </a:r>
+            <a:r>
+              <a:rPr lang="fr-FR" sz="2000" dirty="0"/>
+              <a:t> applications</a:t>
+            </a:r>
           </a:p>
         </p:txBody>
       </p:sp>
     </p:spTree>
     <p:extLst>
       <p:ext uri="{BB962C8B-B14F-4D97-AF65-F5344CB8AC3E}">
-        <p14:creationId xmlns:p14="http://schemas.microsoft.com/office/powerpoint/2010/main" val="1950401596"/>
+        <p14:creationId xmlns:p14="http://schemas.microsoft.com/office/powerpoint/2010/main" val="1468514709"/>
       </p:ext>
     </p:extLst>
   </p:cSld>
@@ -15964,10 +13813,10 @@
       </p:grpSpPr>
       <p:sp>
         <p:nvSpPr>
-          <p:cNvPr id="2" name="Title 1">
-            <a:extLst>
-              <a:ext uri="{FF2B5EF4-FFF2-40B4-BE49-F238E27FC236}">
-                <a16:creationId xmlns:a16="http://schemas.microsoft.com/office/drawing/2014/main" id="{A4316124-B2A9-445F-AFB6-89439E90290E}"/>
+          <p:cNvPr id="2" name="Titre 1">
+            <a:extLst>
+              <a:ext uri="{FF2B5EF4-FFF2-40B4-BE49-F238E27FC236}">
+                <a16:creationId xmlns:a16="http://schemas.microsoft.com/office/drawing/2014/main" id="{66351D2C-BA24-416A-B120-BC31131114D1}"/>
               </a:ext>
             </a:extLst>
           </p:cNvPr>
@@ -15980,8 +13829,8 @@
         </p:nvSpPr>
         <p:spPr>
           <a:xfrm>
-            <a:off x="528320" y="2695098"/>
-            <a:ext cx="10515600" cy="1890059"/>
+            <a:off x="838200" y="1"/>
+            <a:ext cx="10515600" cy="1066800"/>
           </a:xfrm>
         </p:spPr>
         <p:txBody>
@@ -15990,26 +13839,326 @@
           <a:p>
             <a:pPr algn="ctr"/>
             <a:r>
-              <a:rPr lang="fr-FR" dirty="0"/>
-              <a:t>Questions ?</a:t>
-            </a:r>
-            <a:br>
-              <a:rPr lang="fr-FR" dirty="0"/>
-            </a:br>
-            <a:br>
-              <a:rPr lang="fr-FR" dirty="0"/>
-            </a:br>
-            <a:r>
-              <a:rPr lang="fr-FR" dirty="0"/>
-              <a:t>... Next </a:t>
-            </a:r>
-            <a:r>
-              <a:rPr lang="fr-FR" dirty="0" err="1"/>
-              <a:t>Steps</a:t>
-            </a:r>
-            <a:r>
-              <a:rPr lang="fr-FR" dirty="0"/>
-              <a:t> ?</a:t>
+              <a:rPr lang="fr-FR" dirty="0" err="1"/>
+              <a:t>eventLog</a:t>
+            </a:r>
+            <a:r>
+              <a:rPr lang="fr-FR" dirty="0"/>
+              <a:t> Files, </a:t>
+            </a:r>
+            <a:r>
+              <a:rPr lang="fr-FR" dirty="0" err="1"/>
+              <a:t>disabled</a:t>
+            </a:r>
+            <a:r>
+              <a:rPr lang="fr-FR" dirty="0"/>
+              <a:t> by default</a:t>
+            </a:r>
+          </a:p>
+        </p:txBody>
+      </p:sp>
+      <p:sp>
+        <p:nvSpPr>
+          <p:cNvPr id="5" name="ZoneTexte 4">
+            <a:extLst>
+              <a:ext uri="{FF2B5EF4-FFF2-40B4-BE49-F238E27FC236}">
+                <a16:creationId xmlns:a16="http://schemas.microsoft.com/office/drawing/2014/main" id="{48BF46B2-85C8-46F3-ADC6-B4AA17660D7E}"/>
+              </a:ext>
+            </a:extLst>
+          </p:cNvPr>
+          <p:cNvSpPr txBox="1"/>
+          <p:nvPr/>
+        </p:nvSpPr>
+        <p:spPr>
+          <a:xfrm>
+            <a:off x="2980265" y="2258537"/>
+            <a:ext cx="7306733" cy="923330"/>
+          </a:xfrm>
+          <a:prstGeom prst="rect">
+            <a:avLst/>
+          </a:prstGeom>
+          <a:noFill/>
+        </p:spPr>
+        <p:txBody>
+          <a:bodyPr wrap="square">
+            <a:spAutoFit/>
+          </a:bodyPr>
+          <a:lstStyle/>
+          <a:p>
+            <a:r>
+              <a:rPr lang="fr-FR" dirty="0"/>
+              <a:t># </a:t>
+            </a:r>
+            <a:r>
+              <a:rPr lang="fr-FR" dirty="0" err="1"/>
+              <a:t>spark.eventLog.enabled</a:t>
+            </a:r>
+            <a:r>
+              <a:rPr lang="fr-FR" dirty="0"/>
+              <a:t>     </a:t>
+            </a:r>
+            <a:r>
+              <a:rPr lang="fr-FR" dirty="0" err="1"/>
+              <a:t>true</a:t>
+            </a:r>
+            <a:endParaRPr lang="fr-FR" dirty="0"/>
+          </a:p>
+          <a:p>
+            <a:r>
+              <a:rPr lang="fr-FR" dirty="0"/>
+              <a:t># </a:t>
+            </a:r>
+            <a:r>
+              <a:rPr lang="fr-FR" dirty="0" err="1"/>
+              <a:t>spark.eventLog.dir</a:t>
+            </a:r>
+            <a:r>
+              <a:rPr lang="fr-FR" dirty="0"/>
+              <a:t>               hdfs://namenode:8021/directory</a:t>
+            </a:r>
+          </a:p>
+          <a:p>
+            <a:r>
+              <a:rPr lang="fr-FR" dirty="0"/>
+              <a:t>…</a:t>
+            </a:r>
+          </a:p>
+        </p:txBody>
+      </p:sp>
+      <p:sp>
+        <p:nvSpPr>
+          <p:cNvPr id="7" name="ZoneTexte 6">
+            <a:extLst>
+              <a:ext uri="{FF2B5EF4-FFF2-40B4-BE49-F238E27FC236}">
+                <a16:creationId xmlns:a16="http://schemas.microsoft.com/office/drawing/2014/main" id="{3C2A73B6-A123-48DB-8E18-DC749D381157}"/>
+              </a:ext>
+            </a:extLst>
+          </p:cNvPr>
+          <p:cNvSpPr txBox="1"/>
+          <p:nvPr/>
+        </p:nvSpPr>
+        <p:spPr>
+          <a:xfrm>
+            <a:off x="914400" y="1673413"/>
+            <a:ext cx="7645400" cy="369332"/>
+          </a:xfrm>
+          <a:prstGeom prst="rect">
+            <a:avLst/>
+          </a:prstGeom>
+          <a:noFill/>
+        </p:spPr>
+        <p:txBody>
+          <a:bodyPr wrap="square">
+            <a:spAutoFit/>
+          </a:bodyPr>
+          <a:lstStyle/>
+          <a:p>
+            <a:r>
+              <a:rPr lang="fr-FR" dirty="0" err="1"/>
+              <a:t>Extract</a:t>
+            </a:r>
+            <a:r>
+              <a:rPr lang="fr-FR" dirty="0"/>
+              <a:t> of file ${SPARK_HOME} / conf / </a:t>
+            </a:r>
+            <a:r>
+              <a:rPr lang="fr-FR" dirty="0" err="1"/>
+              <a:t>spark-default.conf.template</a:t>
+            </a:r>
+            <a:endParaRPr lang="fr-FR" dirty="0"/>
+          </a:p>
+        </p:txBody>
+      </p:sp>
+      <p:sp>
+        <p:nvSpPr>
+          <p:cNvPr id="14" name="ZoneTexte 13">
+            <a:extLst>
+              <a:ext uri="{FF2B5EF4-FFF2-40B4-BE49-F238E27FC236}">
+                <a16:creationId xmlns:a16="http://schemas.microsoft.com/office/drawing/2014/main" id="{D7C0C16D-FF17-41D6-8692-CD98A4F0EB1B}"/>
+              </a:ext>
+            </a:extLst>
+          </p:cNvPr>
+          <p:cNvSpPr txBox="1"/>
+          <p:nvPr/>
+        </p:nvSpPr>
+        <p:spPr>
+          <a:xfrm>
+            <a:off x="914400" y="3903133"/>
+            <a:ext cx="7209602" cy="923330"/>
+          </a:xfrm>
+          <a:prstGeom prst="rect">
+            <a:avLst/>
+          </a:prstGeom>
+          <a:noFill/>
+        </p:spPr>
+        <p:txBody>
+          <a:bodyPr wrap="none" rtlCol="0">
+            <a:spAutoFit/>
+          </a:bodyPr>
+          <a:lstStyle/>
+          <a:p>
+            <a:r>
+              <a:rPr lang="fr-FR" b="1" dirty="0"/>
+              <a:t>By default, </a:t>
+            </a:r>
+            <a:r>
+              <a:rPr lang="fr-FR" b="1" dirty="0" err="1"/>
+              <a:t>eventLog</a:t>
+            </a:r>
+            <a:r>
+              <a:rPr lang="fr-FR" b="1" dirty="0"/>
+              <a:t>  Files are </a:t>
+            </a:r>
+            <a:r>
+              <a:rPr lang="fr-FR" b="1" dirty="0" err="1"/>
+              <a:t>disabled</a:t>
+            </a:r>
+            <a:endParaRPr lang="fr-FR" b="1" dirty="0"/>
+          </a:p>
+          <a:p>
+            <a:endParaRPr lang="fr-FR" dirty="0"/>
+          </a:p>
+          <a:p>
+            <a:r>
+              <a:rPr lang="fr-FR" dirty="0"/>
+              <a:t>(no « </a:t>
+            </a:r>
+            <a:r>
+              <a:rPr lang="fr-FR" dirty="0" err="1"/>
+              <a:t>spark-default.conf</a:t>
+            </a:r>
+            <a:r>
+              <a:rPr lang="fr-FR" dirty="0"/>
+              <a:t> » file, and in the </a:t>
+            </a:r>
+            <a:r>
+              <a:rPr lang="fr-FR" dirty="0" err="1"/>
+              <a:t>template</a:t>
+            </a:r>
+            <a:r>
+              <a:rPr lang="fr-FR" dirty="0"/>
+              <a:t> </a:t>
+            </a:r>
+            <a:r>
+              <a:rPr lang="fr-FR" dirty="0" err="1"/>
+              <a:t>it</a:t>
+            </a:r>
+            <a:r>
+              <a:rPr lang="fr-FR" dirty="0"/>
+              <a:t> </a:t>
+            </a:r>
+            <a:r>
+              <a:rPr lang="fr-FR" dirty="0" err="1"/>
+              <a:t>is</a:t>
+            </a:r>
+            <a:r>
+              <a:rPr lang="fr-FR" dirty="0"/>
+              <a:t> </a:t>
+            </a:r>
+            <a:r>
+              <a:rPr lang="fr-FR" dirty="0" err="1"/>
+              <a:t>commented</a:t>
+            </a:r>
+            <a:r>
+              <a:rPr lang="fr-FR" dirty="0"/>
+              <a:t> « # »  )</a:t>
+            </a:r>
+          </a:p>
+        </p:txBody>
+      </p:sp>
+      <p:sp>
+        <p:nvSpPr>
+          <p:cNvPr id="15" name="ZoneTexte 14">
+            <a:extLst>
+              <a:ext uri="{FF2B5EF4-FFF2-40B4-BE49-F238E27FC236}">
+                <a16:creationId xmlns:a16="http://schemas.microsoft.com/office/drawing/2014/main" id="{0A63ABCB-6174-4B2C-8113-F115DFC59A63}"/>
+              </a:ext>
+            </a:extLst>
+          </p:cNvPr>
+          <p:cNvSpPr txBox="1"/>
+          <p:nvPr/>
+        </p:nvSpPr>
+        <p:spPr>
+          <a:xfrm>
+            <a:off x="926235" y="5300133"/>
+            <a:ext cx="7633565" cy="646331"/>
+          </a:xfrm>
+          <a:prstGeom prst="rect">
+            <a:avLst/>
+          </a:prstGeom>
+          <a:noFill/>
+        </p:spPr>
+        <p:txBody>
+          <a:bodyPr wrap="none" rtlCol="0">
+            <a:spAutoFit/>
+          </a:bodyPr>
+          <a:lstStyle/>
+          <a:p>
+            <a:r>
+              <a:rPr lang="fr-FR" dirty="0"/>
+              <a:t>Notice:  </a:t>
+            </a:r>
+            <a:r>
+              <a:rPr lang="fr-FR" dirty="0" err="1"/>
+              <a:t>eventLog</a:t>
+            </a:r>
+            <a:r>
+              <a:rPr lang="fr-FR" dirty="0"/>
+              <a:t> Files  are DIFFERENT FROM   log4j  </a:t>
+            </a:r>
+            <a:r>
+              <a:rPr lang="fr-FR" dirty="0" err="1"/>
+              <a:t>stdout</a:t>
+            </a:r>
+            <a:r>
+              <a:rPr lang="fr-FR" dirty="0"/>
+              <a:t> files</a:t>
+            </a:r>
+          </a:p>
+          <a:p>
+            <a:r>
+              <a:rPr lang="fr-FR" dirty="0"/>
+              <a:t>By default, </a:t>
+            </a:r>
+            <a:r>
+              <a:rPr lang="fr-FR" dirty="0" err="1"/>
+              <a:t>there</a:t>
+            </a:r>
+            <a:r>
+              <a:rPr lang="fr-FR" dirty="0"/>
+              <a:t> </a:t>
+            </a:r>
+            <a:r>
+              <a:rPr lang="fr-FR" dirty="0" err="1"/>
+              <a:t>is</a:t>
+            </a:r>
+            <a:r>
+              <a:rPr lang="fr-FR" dirty="0"/>
+              <a:t> </a:t>
+            </a:r>
+            <a:r>
+              <a:rPr lang="fr-FR" dirty="0" err="1"/>
+              <a:t>also</a:t>
+            </a:r>
+            <a:r>
+              <a:rPr lang="fr-FR" dirty="0"/>
+              <a:t> NO log file (</a:t>
+            </a:r>
+            <a:r>
+              <a:rPr lang="fr-FR" dirty="0" err="1"/>
+              <a:t>only</a:t>
+            </a:r>
+            <a:r>
+              <a:rPr lang="fr-FR" dirty="0"/>
+              <a:t> WARN message are </a:t>
+            </a:r>
+            <a:r>
+              <a:rPr lang="fr-FR" dirty="0" err="1"/>
+              <a:t>written</a:t>
+            </a:r>
+            <a:r>
+              <a:rPr lang="fr-FR" dirty="0"/>
+              <a:t> to console)</a:t>
             </a:r>
           </a:p>
         </p:txBody>
@@ -16017,7 +14166,2057 @@
     </p:spTree>
     <p:extLst>
       <p:ext uri="{BB962C8B-B14F-4D97-AF65-F5344CB8AC3E}">
-        <p14:creationId xmlns:p14="http://schemas.microsoft.com/office/powerpoint/2010/main" val="2074433196"/>
+        <p14:creationId xmlns:p14="http://schemas.microsoft.com/office/powerpoint/2010/main" val="331506344"/>
+      </p:ext>
+    </p:extLst>
+  </p:cSld>
+  <p:clrMapOvr>
+    <a:masterClrMapping/>
+  </p:clrMapOvr>
+</p:sld>
+</file>
+
+<file path=ppt/slides/slide31.xml><?xml version="1.0" encoding="utf-8"?>
+<p:sld xmlns:a="http://schemas.openxmlformats.org/drawingml/2006/main" xmlns:r="http://schemas.openxmlformats.org/officeDocument/2006/relationships" xmlns:p="http://schemas.openxmlformats.org/presentationml/2006/main">
+  <p:cSld>
+    <p:spTree>
+      <p:nvGrpSpPr>
+        <p:cNvPr id="1" name=""/>
+        <p:cNvGrpSpPr/>
+        <p:nvPr/>
+      </p:nvGrpSpPr>
+      <p:grpSpPr>
+        <a:xfrm>
+          <a:off x="0" y="0"/>
+          <a:ext cx="0" cy="0"/>
+          <a:chOff x="0" y="0"/>
+          <a:chExt cx="0" cy="0"/>
+        </a:xfrm>
+      </p:grpSpPr>
+      <p:sp>
+        <p:nvSpPr>
+          <p:cNvPr id="2" name="Titre 1">
+            <a:extLst>
+              <a:ext uri="{FF2B5EF4-FFF2-40B4-BE49-F238E27FC236}">
+                <a16:creationId xmlns:a16="http://schemas.microsoft.com/office/drawing/2014/main" id="{9D52EBE3-4055-490B-A141-D4E4AC15C088}"/>
+              </a:ext>
+            </a:extLst>
+          </p:cNvPr>
+          <p:cNvSpPr>
+            <a:spLocks noGrp="1"/>
+          </p:cNvSpPr>
+          <p:nvPr>
+            <p:ph type="title"/>
+          </p:nvPr>
+        </p:nvSpPr>
+        <p:spPr>
+          <a:xfrm>
+            <a:off x="838200" y="0"/>
+            <a:ext cx="10515600" cy="855134"/>
+          </a:xfrm>
+        </p:spPr>
+        <p:txBody>
+          <a:bodyPr>
+            <a:normAutofit/>
+          </a:bodyPr>
+          <a:lstStyle/>
+          <a:p>
+            <a:pPr algn="ctr"/>
+            <a:r>
+              <a:rPr lang="fr-FR" dirty="0" err="1"/>
+              <a:t>Enabling</a:t>
+            </a:r>
+            <a:r>
+              <a:rPr lang="fr-FR" dirty="0"/>
+              <a:t> </a:t>
+            </a:r>
+            <a:r>
+              <a:rPr lang="fr-FR" dirty="0" err="1"/>
+              <a:t>eventLog</a:t>
+            </a:r>
+            <a:r>
+              <a:rPr lang="fr-FR" dirty="0"/>
+              <a:t> Files</a:t>
+            </a:r>
+          </a:p>
+        </p:txBody>
+      </p:sp>
+      <p:pic>
+        <p:nvPicPr>
+          <p:cNvPr id="5" name="Image 4">
+            <a:extLst>
+              <a:ext uri="{FF2B5EF4-FFF2-40B4-BE49-F238E27FC236}">
+                <a16:creationId xmlns:a16="http://schemas.microsoft.com/office/drawing/2014/main" id="{71A63E94-AF4E-44CC-AB85-616D5E0A4290}"/>
+              </a:ext>
+            </a:extLst>
+          </p:cNvPr>
+          <p:cNvPicPr>
+            <a:picLocks noChangeAspect="1"/>
+          </p:cNvPicPr>
+          <p:nvPr/>
+        </p:nvPicPr>
+        <p:blipFill>
+          <a:blip r:embed="rId2"/>
+          <a:stretch>
+            <a:fillRect/>
+          </a:stretch>
+        </p:blipFill>
+        <p:spPr>
+          <a:xfrm>
+            <a:off x="6578599" y="875979"/>
+            <a:ext cx="3392925" cy="1992507"/>
+          </a:xfrm>
+          <a:prstGeom prst="rect">
+            <a:avLst/>
+          </a:prstGeom>
+        </p:spPr>
+      </p:pic>
+      <p:sp>
+        <p:nvSpPr>
+          <p:cNvPr id="6" name="ZoneTexte 5">
+            <a:extLst>
+              <a:ext uri="{FF2B5EF4-FFF2-40B4-BE49-F238E27FC236}">
+                <a16:creationId xmlns:a16="http://schemas.microsoft.com/office/drawing/2014/main" id="{F0BA3921-275E-4E75-BA0E-AEEAC5B07F0C}"/>
+              </a:ext>
+            </a:extLst>
+          </p:cNvPr>
+          <p:cNvSpPr txBox="1"/>
+          <p:nvPr/>
+        </p:nvSpPr>
+        <p:spPr>
+          <a:xfrm>
+            <a:off x="714329" y="3051538"/>
+            <a:ext cx="7645400" cy="369332"/>
+          </a:xfrm>
+          <a:prstGeom prst="rect">
+            <a:avLst/>
+          </a:prstGeom>
+          <a:noFill/>
+        </p:spPr>
+        <p:txBody>
+          <a:bodyPr wrap="square">
+            <a:spAutoFit/>
+          </a:bodyPr>
+          <a:lstStyle/>
+          <a:p>
+            <a:r>
+              <a:rPr lang="fr-FR" dirty="0"/>
+              <a:t>+ Edit to </a:t>
+            </a:r>
+            <a:r>
+              <a:rPr lang="fr-FR" dirty="0" err="1"/>
+              <a:t>uncomment</a:t>
+            </a:r>
+            <a:r>
+              <a:rPr lang="fr-FR" dirty="0"/>
+              <a:t> and configure log </a:t>
+            </a:r>
+            <a:r>
+              <a:rPr lang="fr-FR" dirty="0" err="1"/>
+              <a:t>dir</a:t>
+            </a:r>
+            <a:endParaRPr lang="fr-FR" dirty="0"/>
+          </a:p>
+        </p:txBody>
+      </p:sp>
+      <p:sp>
+        <p:nvSpPr>
+          <p:cNvPr id="7" name="ZoneTexte 6">
+            <a:extLst>
+              <a:ext uri="{FF2B5EF4-FFF2-40B4-BE49-F238E27FC236}">
+                <a16:creationId xmlns:a16="http://schemas.microsoft.com/office/drawing/2014/main" id="{23B31A96-B2B9-45D8-8D4D-DECF9E560F83}"/>
+              </a:ext>
+            </a:extLst>
+          </p:cNvPr>
+          <p:cNvSpPr txBox="1"/>
+          <p:nvPr/>
+        </p:nvSpPr>
+        <p:spPr>
+          <a:xfrm>
+            <a:off x="2910323" y="3506675"/>
+            <a:ext cx="7196668" cy="1754326"/>
+          </a:xfrm>
+          <a:prstGeom prst="rect">
+            <a:avLst/>
+          </a:prstGeom>
+          <a:noFill/>
+        </p:spPr>
+        <p:txBody>
+          <a:bodyPr wrap="square">
+            <a:spAutoFit/>
+          </a:bodyPr>
+          <a:lstStyle/>
+          <a:p>
+            <a:r>
+              <a:rPr lang="fr-FR" b="1" dirty="0" err="1"/>
+              <a:t>spark.eventLog.enabled</a:t>
+            </a:r>
+            <a:r>
+              <a:rPr lang="fr-FR" dirty="0"/>
+              <a:t>     </a:t>
+            </a:r>
+            <a:r>
+              <a:rPr lang="fr-FR" dirty="0" err="1"/>
+              <a:t>true</a:t>
+            </a:r>
+            <a:endParaRPr lang="fr-FR" dirty="0"/>
+          </a:p>
+          <a:p>
+            <a:r>
+              <a:rPr lang="fr-FR" b="1" dirty="0" err="1"/>
+              <a:t>spark.eventLog.dir</a:t>
+            </a:r>
+            <a:r>
+              <a:rPr lang="fr-FR" dirty="0"/>
+              <a:t>               </a:t>
+            </a:r>
+            <a:r>
+              <a:rPr lang="fr-FR" dirty="0">
+                <a:hlinkClick r:id="rId3" action="ppaction://hlinkfile"/>
+              </a:rPr>
+              <a:t>file:///C:/apps/spark/spark-eventLog</a:t>
+            </a:r>
+            <a:br>
+              <a:rPr lang="fr-FR" dirty="0"/>
+            </a:br>
+            <a:endParaRPr lang="fr-FR" dirty="0"/>
+          </a:p>
+          <a:p>
+            <a:r>
+              <a:rPr lang="fr-FR" dirty="0"/>
+              <a:t># </a:t>
+            </a:r>
+            <a:r>
+              <a:rPr lang="fr-FR" dirty="0" err="1"/>
+              <a:t>also</a:t>
+            </a:r>
+            <a:r>
+              <a:rPr lang="fr-FR" dirty="0"/>
+              <a:t> </a:t>
+            </a:r>
+            <a:r>
+              <a:rPr lang="fr-FR" dirty="0" err="1"/>
+              <a:t>edit</a:t>
+            </a:r>
+            <a:r>
+              <a:rPr lang="fr-FR" dirty="0"/>
+              <a:t> for </a:t>
+            </a:r>
+            <a:r>
+              <a:rPr lang="fr-FR" dirty="0" err="1"/>
+              <a:t>HistoryServer</a:t>
+            </a:r>
+            <a:endParaRPr lang="fr-FR" dirty="0"/>
+          </a:p>
+          <a:p>
+            <a:r>
+              <a:rPr lang="en-US" b="1" dirty="0" err="1"/>
+              <a:t>spark.history.fs.logDirectory</a:t>
+            </a:r>
+            <a:r>
+              <a:rPr lang="en-US" dirty="0"/>
+              <a:t>	file:///C:/apps/spark/spark-eventLog</a:t>
+            </a:r>
+            <a:br>
+              <a:rPr lang="fr-FR" dirty="0"/>
+            </a:br>
+            <a:endParaRPr lang="fr-FR" dirty="0"/>
+          </a:p>
+        </p:txBody>
+      </p:sp>
+      <p:sp>
+        <p:nvSpPr>
+          <p:cNvPr id="8" name="ZoneTexte 7">
+            <a:extLst>
+              <a:ext uri="{FF2B5EF4-FFF2-40B4-BE49-F238E27FC236}">
+                <a16:creationId xmlns:a16="http://schemas.microsoft.com/office/drawing/2014/main" id="{0FBED0B8-6764-412C-861B-AF4C84B009B0}"/>
+              </a:ext>
+            </a:extLst>
+          </p:cNvPr>
+          <p:cNvSpPr txBox="1"/>
+          <p:nvPr/>
+        </p:nvSpPr>
+        <p:spPr>
+          <a:xfrm>
+            <a:off x="714329" y="5318667"/>
+            <a:ext cx="2810932" cy="369332"/>
+          </a:xfrm>
+          <a:prstGeom prst="rect">
+            <a:avLst/>
+          </a:prstGeom>
+          <a:noFill/>
+        </p:spPr>
+        <p:txBody>
+          <a:bodyPr wrap="square">
+            <a:spAutoFit/>
+          </a:bodyPr>
+          <a:lstStyle/>
+          <a:p>
+            <a:r>
+              <a:rPr lang="fr-FR" dirty="0"/>
+              <a:t>Or </a:t>
+            </a:r>
+            <a:r>
+              <a:rPr lang="fr-FR" dirty="0" err="1"/>
+              <a:t>also</a:t>
+            </a:r>
+            <a:r>
+              <a:rPr lang="fr-FR" dirty="0"/>
+              <a:t> explicit launch:</a:t>
+            </a:r>
+          </a:p>
+        </p:txBody>
+      </p:sp>
+      <p:sp>
+        <p:nvSpPr>
+          <p:cNvPr id="9" name="ZoneTexte 8">
+            <a:extLst>
+              <a:ext uri="{FF2B5EF4-FFF2-40B4-BE49-F238E27FC236}">
+                <a16:creationId xmlns:a16="http://schemas.microsoft.com/office/drawing/2014/main" id="{598B90AB-6EEA-427B-9FC9-65B3B613ABF3}"/>
+              </a:ext>
+            </a:extLst>
+          </p:cNvPr>
+          <p:cNvSpPr txBox="1"/>
+          <p:nvPr/>
+        </p:nvSpPr>
+        <p:spPr>
+          <a:xfrm>
+            <a:off x="714329" y="1244831"/>
+            <a:ext cx="7645400" cy="369332"/>
+          </a:xfrm>
+          <a:prstGeom prst="rect">
+            <a:avLst/>
+          </a:prstGeom>
+          <a:noFill/>
+        </p:spPr>
+        <p:txBody>
+          <a:bodyPr wrap="square">
+            <a:spAutoFit/>
+          </a:bodyPr>
+          <a:lstStyle/>
+          <a:p>
+            <a:r>
+              <a:rPr lang="fr-FR" dirty="0"/>
+              <a:t>Copy file </a:t>
+            </a:r>
+            <a:r>
+              <a:rPr lang="fr-FR" dirty="0" err="1"/>
+              <a:t>spark-defaults.conf.template</a:t>
+            </a:r>
+            <a:r>
+              <a:rPr lang="fr-FR" dirty="0"/>
+              <a:t> to </a:t>
+            </a:r>
+            <a:r>
+              <a:rPr lang="fr-FR" dirty="0" err="1"/>
+              <a:t>spark-defaults.conf</a:t>
+            </a:r>
+            <a:endParaRPr lang="fr-FR" dirty="0"/>
+          </a:p>
+        </p:txBody>
+      </p:sp>
+      <p:sp>
+        <p:nvSpPr>
+          <p:cNvPr id="10" name="ZoneTexte 9">
+            <a:extLst>
+              <a:ext uri="{FF2B5EF4-FFF2-40B4-BE49-F238E27FC236}">
+                <a16:creationId xmlns:a16="http://schemas.microsoft.com/office/drawing/2014/main" id="{C405EAA4-43F2-4554-B1DA-067A29D5C6C4}"/>
+              </a:ext>
+            </a:extLst>
+          </p:cNvPr>
+          <p:cNvSpPr txBox="1"/>
+          <p:nvPr/>
+        </p:nvSpPr>
+        <p:spPr>
+          <a:xfrm>
+            <a:off x="2980265" y="5617275"/>
+            <a:ext cx="8813801" cy="923330"/>
+          </a:xfrm>
+          <a:prstGeom prst="rect">
+            <a:avLst/>
+          </a:prstGeom>
+          <a:noFill/>
+        </p:spPr>
+        <p:txBody>
+          <a:bodyPr wrap="square">
+            <a:spAutoFit/>
+          </a:bodyPr>
+          <a:lstStyle/>
+          <a:p>
+            <a:r>
+              <a:rPr lang="fr-FR" dirty="0" err="1"/>
+              <a:t>spark-shell</a:t>
+            </a:r>
+            <a:r>
+              <a:rPr lang="fr-FR" dirty="0"/>
+              <a:t> \</a:t>
+            </a:r>
+          </a:p>
+          <a:p>
+            <a:r>
+              <a:rPr lang="fr-FR" dirty="0"/>
+              <a:t>          --conf </a:t>
+            </a:r>
+            <a:r>
+              <a:rPr lang="fr-FR" dirty="0" err="1"/>
+              <a:t>spark.evenLog.enabled</a:t>
+            </a:r>
+            <a:r>
+              <a:rPr lang="fr-FR" dirty="0"/>
+              <a:t>=</a:t>
+            </a:r>
+            <a:r>
+              <a:rPr lang="fr-FR" dirty="0" err="1"/>
+              <a:t>true</a:t>
+            </a:r>
+            <a:r>
+              <a:rPr lang="fr-FR" dirty="0"/>
+              <a:t>  \</a:t>
+            </a:r>
+            <a:br>
+              <a:rPr lang="fr-FR" dirty="0"/>
+            </a:br>
+            <a:r>
+              <a:rPr lang="fr-FR" dirty="0"/>
+              <a:t>          --conf </a:t>
+            </a:r>
+            <a:r>
+              <a:rPr lang="fr-FR" dirty="0" err="1"/>
+              <a:t>spark.eventLog.dir</a:t>
+            </a:r>
+            <a:r>
+              <a:rPr lang="fr-FR" dirty="0"/>
+              <a:t>=file:///C:/apps/spark/spark-eventLog</a:t>
+            </a:r>
+          </a:p>
+        </p:txBody>
+      </p:sp>
+    </p:spTree>
+    <p:extLst>
+      <p:ext uri="{BB962C8B-B14F-4D97-AF65-F5344CB8AC3E}">
+        <p14:creationId xmlns:p14="http://schemas.microsoft.com/office/powerpoint/2010/main" val="1076031931"/>
+      </p:ext>
+    </p:extLst>
+  </p:cSld>
+  <p:clrMapOvr>
+    <a:masterClrMapping/>
+  </p:clrMapOvr>
+</p:sld>
+</file>
+
+<file path=ppt/slides/slide32.xml><?xml version="1.0" encoding="utf-8"?>
+<p:sld xmlns:a="http://schemas.openxmlformats.org/drawingml/2006/main" xmlns:r="http://schemas.openxmlformats.org/officeDocument/2006/relationships" xmlns:p="http://schemas.openxmlformats.org/presentationml/2006/main">
+  <p:cSld>
+    <p:spTree>
+      <p:nvGrpSpPr>
+        <p:cNvPr id="1" name=""/>
+        <p:cNvGrpSpPr/>
+        <p:nvPr/>
+      </p:nvGrpSpPr>
+      <p:grpSpPr>
+        <a:xfrm>
+          <a:off x="0" y="0"/>
+          <a:ext cx="0" cy="0"/>
+          <a:chOff x="0" y="0"/>
+          <a:chExt cx="0" cy="0"/>
+        </a:xfrm>
+      </p:grpSpPr>
+      <p:sp>
+        <p:nvSpPr>
+          <p:cNvPr id="2" name="Titre 1">
+            <a:extLst>
+              <a:ext uri="{FF2B5EF4-FFF2-40B4-BE49-F238E27FC236}">
+                <a16:creationId xmlns:a16="http://schemas.microsoft.com/office/drawing/2014/main" id="{765DA1CF-FF66-450E-BCA4-21B159C281CA}"/>
+              </a:ext>
+            </a:extLst>
+          </p:cNvPr>
+          <p:cNvSpPr>
+            <a:spLocks noGrp="1"/>
+          </p:cNvSpPr>
+          <p:nvPr>
+            <p:ph type="title"/>
+          </p:nvPr>
+        </p:nvSpPr>
+        <p:spPr>
+          <a:xfrm>
+            <a:off x="838200" y="0"/>
+            <a:ext cx="10515600" cy="922868"/>
+          </a:xfrm>
+        </p:spPr>
+        <p:txBody>
+          <a:bodyPr>
+            <a:normAutofit/>
+          </a:bodyPr>
+          <a:lstStyle/>
+          <a:p>
+            <a:pPr algn="ctr"/>
+            <a:r>
+              <a:rPr lang="fr-FR" dirty="0" err="1"/>
+              <a:t>Launching</a:t>
+            </a:r>
+            <a:r>
+              <a:rPr lang="fr-FR" dirty="0"/>
+              <a:t> </a:t>
+            </a:r>
+            <a:r>
+              <a:rPr lang="fr-FR" dirty="0" err="1"/>
+              <a:t>spark</a:t>
+            </a:r>
+            <a:r>
+              <a:rPr lang="fr-FR" dirty="0"/>
+              <a:t> =&gt; 1 </a:t>
+            </a:r>
+            <a:r>
+              <a:rPr lang="fr-FR" dirty="0" err="1"/>
+              <a:t>Dir</a:t>
+            </a:r>
+            <a:r>
+              <a:rPr lang="fr-FR" dirty="0"/>
+              <a:t> + N x </a:t>
+            </a:r>
+            <a:r>
+              <a:rPr lang="fr-FR" dirty="0" err="1"/>
+              <a:t>written</a:t>
+            </a:r>
+            <a:r>
+              <a:rPr lang="fr-FR" dirty="0"/>
+              <a:t> Files</a:t>
+            </a:r>
+          </a:p>
+        </p:txBody>
+      </p:sp>
+      <p:pic>
+        <p:nvPicPr>
+          <p:cNvPr id="7" name="Image 6">
+            <a:extLst>
+              <a:ext uri="{FF2B5EF4-FFF2-40B4-BE49-F238E27FC236}">
+                <a16:creationId xmlns:a16="http://schemas.microsoft.com/office/drawing/2014/main" id="{01667304-95EB-4F94-91F5-860DCD177EB8}"/>
+              </a:ext>
+            </a:extLst>
+          </p:cNvPr>
+          <p:cNvPicPr>
+            <a:picLocks noChangeAspect="1"/>
+          </p:cNvPicPr>
+          <p:nvPr/>
+        </p:nvPicPr>
+        <p:blipFill>
+          <a:blip r:embed="rId2"/>
+          <a:stretch>
+            <a:fillRect/>
+          </a:stretch>
+        </p:blipFill>
+        <p:spPr>
+          <a:xfrm>
+            <a:off x="399595" y="1281379"/>
+            <a:ext cx="6516009" cy="1876687"/>
+          </a:xfrm>
+          <a:prstGeom prst="rect">
+            <a:avLst/>
+          </a:prstGeom>
+        </p:spPr>
+      </p:pic>
+      <p:pic>
+        <p:nvPicPr>
+          <p:cNvPr id="9" name="Image 8">
+            <a:extLst>
+              <a:ext uri="{FF2B5EF4-FFF2-40B4-BE49-F238E27FC236}">
+                <a16:creationId xmlns:a16="http://schemas.microsoft.com/office/drawing/2014/main" id="{BE398016-94A8-4CFB-AAED-0CAE4C321328}"/>
+              </a:ext>
+            </a:extLst>
+          </p:cNvPr>
+          <p:cNvPicPr>
+            <a:picLocks noChangeAspect="1"/>
+          </p:cNvPicPr>
+          <p:nvPr/>
+        </p:nvPicPr>
+        <p:blipFill>
+          <a:blip r:embed="rId3"/>
+          <a:stretch>
+            <a:fillRect/>
+          </a:stretch>
+        </p:blipFill>
+        <p:spPr>
+          <a:xfrm>
+            <a:off x="3502581" y="3516577"/>
+            <a:ext cx="7201905" cy="3134162"/>
+          </a:xfrm>
+          <a:prstGeom prst="rect">
+            <a:avLst/>
+          </a:prstGeom>
+        </p:spPr>
+      </p:pic>
+    </p:spTree>
+    <p:extLst>
+      <p:ext uri="{BB962C8B-B14F-4D97-AF65-F5344CB8AC3E}">
+        <p14:creationId xmlns:p14="http://schemas.microsoft.com/office/powerpoint/2010/main" val="2585613147"/>
+      </p:ext>
+    </p:extLst>
+  </p:cSld>
+  <p:clrMapOvr>
+    <a:masterClrMapping/>
+  </p:clrMapOvr>
+</p:sld>
+</file>
+
+<file path=ppt/slides/slide33.xml><?xml version="1.0" encoding="utf-8"?>
+<p:sld xmlns:a="http://schemas.openxmlformats.org/drawingml/2006/main" xmlns:r="http://schemas.openxmlformats.org/officeDocument/2006/relationships" xmlns:p="http://schemas.openxmlformats.org/presentationml/2006/main">
+  <p:cSld>
+    <p:spTree>
+      <p:nvGrpSpPr>
+        <p:cNvPr id="1" name=""/>
+        <p:cNvGrpSpPr/>
+        <p:nvPr/>
+      </p:nvGrpSpPr>
+      <p:grpSpPr>
+        <a:xfrm>
+          <a:off x="0" y="0"/>
+          <a:ext cx="0" cy="0"/>
+          <a:chOff x="0" y="0"/>
+          <a:chExt cx="0" cy="0"/>
+        </a:xfrm>
+      </p:grpSpPr>
+      <p:sp>
+        <p:nvSpPr>
+          <p:cNvPr id="2" name="Titre 1">
+            <a:extLst>
+              <a:ext uri="{FF2B5EF4-FFF2-40B4-BE49-F238E27FC236}">
+                <a16:creationId xmlns:a16="http://schemas.microsoft.com/office/drawing/2014/main" id="{7CFE88EF-6378-4811-B962-B7F803A4B1C1}"/>
+              </a:ext>
+            </a:extLst>
+          </p:cNvPr>
+          <p:cNvSpPr>
+            <a:spLocks noGrp="1"/>
+          </p:cNvSpPr>
+          <p:nvPr>
+            <p:ph type="title"/>
+          </p:nvPr>
+        </p:nvSpPr>
+        <p:spPr>
+          <a:xfrm>
+            <a:off x="838200" y="0"/>
+            <a:ext cx="10515600" cy="829733"/>
+          </a:xfrm>
+        </p:spPr>
+        <p:txBody>
+          <a:bodyPr>
+            <a:normAutofit/>
+          </a:bodyPr>
+          <a:lstStyle/>
+          <a:p>
+            <a:pPr algn="ctr"/>
+            <a:r>
+              <a:rPr lang="fr-FR" dirty="0" err="1"/>
+              <a:t>Uncompressing</a:t>
+            </a:r>
+            <a:r>
+              <a:rPr lang="fr-FR" dirty="0"/>
+              <a:t> </a:t>
+            </a:r>
+            <a:r>
+              <a:rPr lang="fr-FR" dirty="0" err="1"/>
+              <a:t>EventLog</a:t>
+            </a:r>
+            <a:r>
+              <a:rPr lang="fr-FR" dirty="0"/>
+              <a:t> Files, </a:t>
+            </a:r>
+            <a:r>
+              <a:rPr lang="fr-FR" dirty="0" err="1"/>
+              <a:t>internal</a:t>
+            </a:r>
+            <a:r>
+              <a:rPr lang="fr-FR" dirty="0"/>
+              <a:t> Check</a:t>
+            </a:r>
+          </a:p>
+        </p:txBody>
+      </p:sp>
+      <p:pic>
+        <p:nvPicPr>
+          <p:cNvPr id="5" name="Image 4">
+            <a:extLst>
+              <a:ext uri="{FF2B5EF4-FFF2-40B4-BE49-F238E27FC236}">
+                <a16:creationId xmlns:a16="http://schemas.microsoft.com/office/drawing/2014/main" id="{F566C80B-9CFF-403E-AC09-65902D838481}"/>
+              </a:ext>
+            </a:extLst>
+          </p:cNvPr>
+          <p:cNvPicPr>
+            <a:picLocks noChangeAspect="1"/>
+          </p:cNvPicPr>
+          <p:nvPr/>
+        </p:nvPicPr>
+        <p:blipFill>
+          <a:blip r:embed="rId2"/>
+          <a:stretch>
+            <a:fillRect/>
+          </a:stretch>
+        </p:blipFill>
+        <p:spPr>
+          <a:xfrm>
+            <a:off x="0" y="1650694"/>
+            <a:ext cx="12192000" cy="5114478"/>
+          </a:xfrm>
+          <a:prstGeom prst="rect">
+            <a:avLst/>
+          </a:prstGeom>
+        </p:spPr>
+      </p:pic>
+    </p:spTree>
+    <p:extLst>
+      <p:ext uri="{BB962C8B-B14F-4D97-AF65-F5344CB8AC3E}">
+        <p14:creationId xmlns:p14="http://schemas.microsoft.com/office/powerpoint/2010/main" val="4150303287"/>
+      </p:ext>
+    </p:extLst>
+  </p:cSld>
+  <p:clrMapOvr>
+    <a:masterClrMapping/>
+  </p:clrMapOvr>
+</p:sld>
+</file>
+
+<file path=ppt/slides/slide34.xml><?xml version="1.0" encoding="utf-8"?>
+<p:sld xmlns:a="http://schemas.openxmlformats.org/drawingml/2006/main" xmlns:r="http://schemas.openxmlformats.org/officeDocument/2006/relationships" xmlns:p="http://schemas.openxmlformats.org/presentationml/2006/main">
+  <p:cSld>
+    <p:spTree>
+      <p:nvGrpSpPr>
+        <p:cNvPr id="1" name=""/>
+        <p:cNvGrpSpPr/>
+        <p:nvPr/>
+      </p:nvGrpSpPr>
+      <p:grpSpPr>
+        <a:xfrm>
+          <a:off x="0" y="0"/>
+          <a:ext cx="0" cy="0"/>
+          <a:chOff x="0" y="0"/>
+          <a:chExt cx="0" cy="0"/>
+        </a:xfrm>
+      </p:grpSpPr>
+      <p:sp>
+        <p:nvSpPr>
+          <p:cNvPr id="2" name="Titre 1">
+            <a:extLst>
+              <a:ext uri="{FF2B5EF4-FFF2-40B4-BE49-F238E27FC236}">
+                <a16:creationId xmlns:a16="http://schemas.microsoft.com/office/drawing/2014/main" id="{3658CC6D-B498-4483-AEB3-A4FD150C5645}"/>
+              </a:ext>
+            </a:extLst>
+          </p:cNvPr>
+          <p:cNvSpPr>
+            <a:spLocks noGrp="1"/>
+          </p:cNvSpPr>
+          <p:nvPr>
+            <p:ph type="title"/>
+          </p:nvPr>
+        </p:nvSpPr>
+        <p:spPr>
+          <a:xfrm>
+            <a:off x="838200" y="0"/>
+            <a:ext cx="10515600" cy="778933"/>
+          </a:xfrm>
+        </p:spPr>
+        <p:txBody>
+          <a:bodyPr>
+            <a:normAutofit/>
+          </a:bodyPr>
+          <a:lstStyle/>
+          <a:p>
+            <a:pPr algn="ctr"/>
+            <a:r>
+              <a:rPr lang="fr-FR" dirty="0" err="1"/>
+              <a:t>eventLog</a:t>
+            </a:r>
+            <a:r>
+              <a:rPr lang="fr-FR" dirty="0"/>
+              <a:t> Files Source Details…</a:t>
+            </a:r>
+          </a:p>
+        </p:txBody>
+      </p:sp>
+      <p:sp>
+        <p:nvSpPr>
+          <p:cNvPr id="4" name="ZoneTexte 3">
+            <a:extLst>
+              <a:ext uri="{FF2B5EF4-FFF2-40B4-BE49-F238E27FC236}">
+                <a16:creationId xmlns:a16="http://schemas.microsoft.com/office/drawing/2014/main" id="{18B7AC75-A832-428B-8815-6DFCDF3F12B1}"/>
+              </a:ext>
+            </a:extLst>
+          </p:cNvPr>
+          <p:cNvSpPr txBox="1"/>
+          <p:nvPr/>
+        </p:nvSpPr>
+        <p:spPr>
+          <a:xfrm>
+            <a:off x="482601" y="649772"/>
+            <a:ext cx="9567333" cy="369332"/>
+          </a:xfrm>
+          <a:prstGeom prst="rect">
+            <a:avLst/>
+          </a:prstGeom>
+          <a:noFill/>
+        </p:spPr>
+        <p:txBody>
+          <a:bodyPr wrap="square">
+            <a:spAutoFit/>
+          </a:bodyPr>
+          <a:lstStyle/>
+          <a:p>
+            <a:r>
+              <a:rPr lang="fr-FR" dirty="0" err="1"/>
+              <a:t>eventLog</a:t>
+            </a:r>
+            <a:r>
+              <a:rPr lang="fr-FR" dirty="0"/>
+              <a:t> = ND-JSON file </a:t>
+            </a:r>
+            <a:r>
+              <a:rPr lang="fr-FR" dirty="0" err="1"/>
+              <a:t>containing</a:t>
+            </a:r>
+            <a:r>
+              <a:rPr lang="fr-FR" dirty="0"/>
+              <a:t> </a:t>
+            </a:r>
+            <a:r>
+              <a:rPr lang="fr-FR" dirty="0" err="1"/>
+              <a:t>internal</a:t>
+            </a:r>
+            <a:r>
+              <a:rPr lang="fr-FR" dirty="0"/>
+              <a:t> </a:t>
+            </a:r>
+            <a:r>
+              <a:rPr lang="fr-FR" dirty="0" err="1"/>
+              <a:t>SparkListener</a:t>
+            </a:r>
+            <a:r>
+              <a:rPr lang="fr-FR" dirty="0"/>
+              <a:t> Bus </a:t>
+            </a:r>
+            <a:r>
+              <a:rPr lang="fr-FR" dirty="0" err="1"/>
+              <a:t>events</a:t>
+            </a:r>
+            <a:endParaRPr lang="fr-FR" dirty="0"/>
+          </a:p>
+        </p:txBody>
+      </p:sp>
+      <p:pic>
+        <p:nvPicPr>
+          <p:cNvPr id="6" name="Image 5">
+            <a:extLst>
+              <a:ext uri="{FF2B5EF4-FFF2-40B4-BE49-F238E27FC236}">
+                <a16:creationId xmlns:a16="http://schemas.microsoft.com/office/drawing/2014/main" id="{336288E3-5507-449E-AA16-17DB2EF4E9A5}"/>
+              </a:ext>
+            </a:extLst>
+          </p:cNvPr>
+          <p:cNvPicPr>
+            <a:picLocks noChangeAspect="1"/>
+          </p:cNvPicPr>
+          <p:nvPr/>
+        </p:nvPicPr>
+        <p:blipFill>
+          <a:blip r:embed="rId2"/>
+          <a:stretch>
+            <a:fillRect/>
+          </a:stretch>
+        </p:blipFill>
+        <p:spPr>
+          <a:xfrm>
+            <a:off x="6713139" y="2119923"/>
+            <a:ext cx="4771295" cy="4592542"/>
+          </a:xfrm>
+          <a:prstGeom prst="rect">
+            <a:avLst/>
+          </a:prstGeom>
+        </p:spPr>
+      </p:pic>
+      <p:sp>
+        <p:nvSpPr>
+          <p:cNvPr id="8" name="ZoneTexte 7">
+            <a:extLst>
+              <a:ext uri="{FF2B5EF4-FFF2-40B4-BE49-F238E27FC236}">
+                <a16:creationId xmlns:a16="http://schemas.microsoft.com/office/drawing/2014/main" id="{63F2955E-0D96-4141-B355-9653CC29643F}"/>
+              </a:ext>
+            </a:extLst>
+          </p:cNvPr>
+          <p:cNvSpPr txBox="1"/>
+          <p:nvPr/>
+        </p:nvSpPr>
+        <p:spPr>
+          <a:xfrm>
+            <a:off x="6713139" y="1207211"/>
+            <a:ext cx="4453466" cy="923330"/>
+          </a:xfrm>
+          <a:prstGeom prst="rect">
+            <a:avLst/>
+          </a:prstGeom>
+          <a:noFill/>
+        </p:spPr>
+        <p:txBody>
+          <a:bodyPr wrap="square">
+            <a:spAutoFit/>
+          </a:bodyPr>
+          <a:lstStyle/>
+          <a:p>
+            <a:r>
+              <a:rPr lang="fr-FR" dirty="0">
+                <a:hlinkClick r:id="rId3"/>
+              </a:rPr>
+              <a:t>https://github.com/apache/spark/blob/master/core/src/main/scala/org/apache/spark/util/JsonProtocol.scala</a:t>
+            </a:r>
+            <a:r>
+              <a:rPr lang="fr-FR" dirty="0"/>
+              <a:t> </a:t>
+            </a:r>
+          </a:p>
+        </p:txBody>
+      </p:sp>
+      <p:pic>
+        <p:nvPicPr>
+          <p:cNvPr id="13" name="Image 12">
+            <a:extLst>
+              <a:ext uri="{FF2B5EF4-FFF2-40B4-BE49-F238E27FC236}">
+                <a16:creationId xmlns:a16="http://schemas.microsoft.com/office/drawing/2014/main" id="{3B28556A-D8CD-4C7D-BC88-2CB0D14ED050}"/>
+              </a:ext>
+            </a:extLst>
+          </p:cNvPr>
+          <p:cNvPicPr>
+            <a:picLocks noChangeAspect="1"/>
+          </p:cNvPicPr>
+          <p:nvPr/>
+        </p:nvPicPr>
+        <p:blipFill>
+          <a:blip r:embed="rId4"/>
+          <a:stretch>
+            <a:fillRect/>
+          </a:stretch>
+        </p:blipFill>
+        <p:spPr>
+          <a:xfrm>
+            <a:off x="838200" y="2119923"/>
+            <a:ext cx="4505749" cy="4738077"/>
+          </a:xfrm>
+          <a:prstGeom prst="rect">
+            <a:avLst/>
+          </a:prstGeom>
+        </p:spPr>
+      </p:pic>
+      <p:sp>
+        <p:nvSpPr>
+          <p:cNvPr id="15" name="ZoneTexte 14">
+            <a:extLst>
+              <a:ext uri="{FF2B5EF4-FFF2-40B4-BE49-F238E27FC236}">
+                <a16:creationId xmlns:a16="http://schemas.microsoft.com/office/drawing/2014/main" id="{DDBF7EA5-3B72-4E5B-81FF-9F07B84061A9}"/>
+              </a:ext>
+            </a:extLst>
+          </p:cNvPr>
+          <p:cNvSpPr txBox="1"/>
+          <p:nvPr/>
+        </p:nvSpPr>
+        <p:spPr>
+          <a:xfrm>
+            <a:off x="230081" y="1196593"/>
+            <a:ext cx="4724400" cy="923330"/>
+          </a:xfrm>
+          <a:prstGeom prst="rect">
+            <a:avLst/>
+          </a:prstGeom>
+          <a:noFill/>
+        </p:spPr>
+        <p:txBody>
+          <a:bodyPr wrap="square">
+            <a:spAutoFit/>
+          </a:bodyPr>
+          <a:lstStyle/>
+          <a:p>
+            <a:r>
+              <a:rPr lang="fr-FR" dirty="0">
+                <a:hlinkClick r:id="rId5"/>
+              </a:rPr>
+              <a:t>https://github.com/apache/spark/blob/master/core/src/main/scala/org/apache/spark/scheduler/SparkListener.scala</a:t>
+            </a:r>
+            <a:r>
+              <a:rPr lang="fr-FR" dirty="0"/>
+              <a:t> </a:t>
+            </a:r>
+          </a:p>
+        </p:txBody>
+      </p:sp>
+    </p:spTree>
+    <p:extLst>
+      <p:ext uri="{BB962C8B-B14F-4D97-AF65-F5344CB8AC3E}">
+        <p14:creationId xmlns:p14="http://schemas.microsoft.com/office/powerpoint/2010/main" val="1474982806"/>
+      </p:ext>
+    </p:extLst>
+  </p:cSld>
+  <p:clrMapOvr>
+    <a:masterClrMapping/>
+  </p:clrMapOvr>
+</p:sld>
+</file>
+
+<file path=ppt/slides/slide35.xml><?xml version="1.0" encoding="utf-8"?>
+<p:sld xmlns:a="http://schemas.openxmlformats.org/drawingml/2006/main" xmlns:r="http://schemas.openxmlformats.org/officeDocument/2006/relationships" xmlns:p="http://schemas.openxmlformats.org/presentationml/2006/main">
+  <p:cSld>
+    <p:spTree>
+      <p:nvGrpSpPr>
+        <p:cNvPr id="1" name=""/>
+        <p:cNvGrpSpPr/>
+        <p:nvPr/>
+      </p:nvGrpSpPr>
+      <p:grpSpPr>
+        <a:xfrm>
+          <a:off x="0" y="0"/>
+          <a:ext cx="0" cy="0"/>
+          <a:chOff x="0" y="0"/>
+          <a:chExt cx="0" cy="0"/>
+        </a:xfrm>
+      </p:grpSpPr>
+      <p:sp>
+        <p:nvSpPr>
+          <p:cNvPr id="2" name="Titre 1">
+            <a:extLst>
+              <a:ext uri="{FF2B5EF4-FFF2-40B4-BE49-F238E27FC236}">
+                <a16:creationId xmlns:a16="http://schemas.microsoft.com/office/drawing/2014/main" id="{00816803-E95A-40C7-8209-8E237B31E9CE}"/>
+              </a:ext>
+            </a:extLst>
+          </p:cNvPr>
+          <p:cNvSpPr>
+            <a:spLocks noGrp="1"/>
+          </p:cNvSpPr>
+          <p:nvPr>
+            <p:ph type="title"/>
+          </p:nvPr>
+        </p:nvSpPr>
+        <p:spPr>
+          <a:xfrm>
+            <a:off x="838200" y="94785"/>
+            <a:ext cx="10515600" cy="916671"/>
+          </a:xfrm>
+        </p:spPr>
+        <p:txBody>
+          <a:bodyPr>
+            <a:normAutofit/>
+          </a:bodyPr>
+          <a:lstStyle/>
+          <a:p>
+            <a:pPr algn="ctr"/>
+            <a:r>
+              <a:rPr lang="fr-FR" dirty="0"/>
+              <a:t>Running Spark </a:t>
+            </a:r>
+            <a:r>
+              <a:rPr lang="fr-FR" dirty="0" err="1"/>
+              <a:t>History</a:t>
+            </a:r>
+            <a:r>
+              <a:rPr lang="fr-FR" dirty="0"/>
+              <a:t> Server</a:t>
+            </a:r>
+          </a:p>
+        </p:txBody>
+      </p:sp>
+      <p:sp>
+        <p:nvSpPr>
+          <p:cNvPr id="4" name="ZoneTexte 3">
+            <a:extLst>
+              <a:ext uri="{FF2B5EF4-FFF2-40B4-BE49-F238E27FC236}">
+                <a16:creationId xmlns:a16="http://schemas.microsoft.com/office/drawing/2014/main" id="{E8D14780-CF6C-4291-BE53-2CF5BBA36DBA}"/>
+              </a:ext>
+            </a:extLst>
+          </p:cNvPr>
+          <p:cNvSpPr txBox="1"/>
+          <p:nvPr/>
+        </p:nvSpPr>
+        <p:spPr>
+          <a:xfrm>
+            <a:off x="584200" y="1690688"/>
+            <a:ext cx="5312801" cy="646331"/>
+          </a:xfrm>
+          <a:prstGeom prst="rect">
+            <a:avLst/>
+          </a:prstGeom>
+          <a:noFill/>
+        </p:spPr>
+        <p:txBody>
+          <a:bodyPr wrap="none" rtlCol="0">
+            <a:spAutoFit/>
+          </a:bodyPr>
+          <a:lstStyle/>
+          <a:p>
+            <a:r>
+              <a:rPr lang="fr-FR" dirty="0"/>
+              <a:t>The </a:t>
+            </a:r>
+            <a:r>
+              <a:rPr lang="fr-FR" dirty="0" err="1"/>
+              <a:t>History</a:t>
+            </a:r>
+            <a:r>
+              <a:rPr lang="fr-FR" dirty="0"/>
+              <a:t> Server, </a:t>
+            </a:r>
+            <a:r>
+              <a:rPr lang="fr-FR" dirty="0" err="1"/>
+              <a:t>is</a:t>
+            </a:r>
+            <a:r>
+              <a:rPr lang="fr-FR" dirty="0"/>
+              <a:t> the </a:t>
+            </a:r>
+            <a:r>
+              <a:rPr lang="fr-FR" dirty="0" err="1"/>
+              <a:t>same</a:t>
+            </a:r>
+            <a:r>
+              <a:rPr lang="fr-FR" dirty="0"/>
+              <a:t> code </a:t>
+            </a:r>
+            <a:r>
+              <a:rPr lang="fr-FR" dirty="0" err="1"/>
+              <a:t>that</a:t>
+            </a:r>
+            <a:r>
+              <a:rPr lang="fr-FR" dirty="0"/>
+              <a:t> Spark UI, </a:t>
+            </a:r>
+          </a:p>
+          <a:p>
+            <a:r>
+              <a:rPr lang="fr-FR" dirty="0"/>
+              <a:t>but running as a Web Server to </a:t>
+            </a:r>
+            <a:r>
+              <a:rPr lang="fr-FR" dirty="0" err="1"/>
+              <a:t>view</a:t>
+            </a:r>
+            <a:r>
+              <a:rPr lang="fr-FR" dirty="0"/>
+              <a:t> </a:t>
+            </a:r>
+            <a:r>
+              <a:rPr lang="fr-FR" dirty="0" err="1"/>
+              <a:t>old</a:t>
+            </a:r>
+            <a:r>
+              <a:rPr lang="fr-FR" dirty="0"/>
+              <a:t> </a:t>
+            </a:r>
+            <a:r>
+              <a:rPr lang="fr-FR" dirty="0" err="1"/>
+              <a:t>eventLog</a:t>
+            </a:r>
+            <a:r>
+              <a:rPr lang="fr-FR" dirty="0"/>
+              <a:t> Files</a:t>
+            </a:r>
+          </a:p>
+        </p:txBody>
+      </p:sp>
+      <p:pic>
+        <p:nvPicPr>
+          <p:cNvPr id="6" name="Image 5">
+            <a:extLst>
+              <a:ext uri="{FF2B5EF4-FFF2-40B4-BE49-F238E27FC236}">
+                <a16:creationId xmlns:a16="http://schemas.microsoft.com/office/drawing/2014/main" id="{7E2C11AA-7FC9-4A29-BC2D-293D0004C990}"/>
+              </a:ext>
+            </a:extLst>
+          </p:cNvPr>
+          <p:cNvPicPr>
+            <a:picLocks noChangeAspect="1"/>
+          </p:cNvPicPr>
+          <p:nvPr/>
+        </p:nvPicPr>
+        <p:blipFill>
+          <a:blip r:embed="rId2"/>
+          <a:stretch>
+            <a:fillRect/>
+          </a:stretch>
+        </p:blipFill>
+        <p:spPr>
+          <a:xfrm>
+            <a:off x="6620934" y="1569813"/>
+            <a:ext cx="4553383" cy="4888602"/>
+          </a:xfrm>
+          <a:prstGeom prst="rect">
+            <a:avLst/>
+          </a:prstGeom>
+        </p:spPr>
+      </p:pic>
+      <p:sp>
+        <p:nvSpPr>
+          <p:cNvPr id="7" name="ZoneTexte 6">
+            <a:extLst>
+              <a:ext uri="{FF2B5EF4-FFF2-40B4-BE49-F238E27FC236}">
+                <a16:creationId xmlns:a16="http://schemas.microsoft.com/office/drawing/2014/main" id="{A3B55E04-FE4F-4227-8ED8-1A4CC9E68195}"/>
+              </a:ext>
+            </a:extLst>
+          </p:cNvPr>
+          <p:cNvSpPr txBox="1"/>
+          <p:nvPr/>
+        </p:nvSpPr>
+        <p:spPr>
+          <a:xfrm>
+            <a:off x="838200" y="3191933"/>
+            <a:ext cx="4481420" cy="923330"/>
+          </a:xfrm>
+          <a:prstGeom prst="rect">
+            <a:avLst/>
+          </a:prstGeom>
+          <a:noFill/>
+        </p:spPr>
+        <p:txBody>
+          <a:bodyPr wrap="none" rtlCol="0">
+            <a:spAutoFit/>
+          </a:bodyPr>
+          <a:lstStyle/>
+          <a:p>
+            <a:r>
+              <a:rPr lang="fr-FR" dirty="0"/>
+              <a:t>To run </a:t>
+            </a:r>
+            <a:r>
+              <a:rPr lang="fr-FR" dirty="0" err="1"/>
+              <a:t>it</a:t>
+            </a:r>
+            <a:r>
+              <a:rPr lang="fr-FR" dirty="0"/>
+              <a:t> …</a:t>
+            </a:r>
+          </a:p>
+          <a:p>
+            <a:endParaRPr lang="fr-FR" dirty="0"/>
+          </a:p>
+          <a:p>
+            <a:r>
+              <a:rPr lang="fr-FR" b="1" dirty="0"/>
+              <a:t>${SPARK_HOME}/sbin/start-history-server.sh</a:t>
+            </a:r>
+          </a:p>
+        </p:txBody>
+      </p:sp>
+      <p:sp>
+        <p:nvSpPr>
+          <p:cNvPr id="8" name="ZoneTexte 7">
+            <a:extLst>
+              <a:ext uri="{FF2B5EF4-FFF2-40B4-BE49-F238E27FC236}">
+                <a16:creationId xmlns:a16="http://schemas.microsoft.com/office/drawing/2014/main" id="{28CF2C74-3AA0-443D-AEC6-C182E23DBE00}"/>
+              </a:ext>
+            </a:extLst>
+          </p:cNvPr>
+          <p:cNvSpPr txBox="1"/>
+          <p:nvPr/>
+        </p:nvSpPr>
+        <p:spPr>
+          <a:xfrm>
+            <a:off x="838200" y="4876800"/>
+            <a:ext cx="5510868" cy="923330"/>
+          </a:xfrm>
+          <a:prstGeom prst="rect">
+            <a:avLst/>
+          </a:prstGeom>
+          <a:noFill/>
+        </p:spPr>
+        <p:txBody>
+          <a:bodyPr wrap="none" rtlCol="0">
+            <a:spAutoFit/>
+          </a:bodyPr>
+          <a:lstStyle/>
+          <a:p>
+            <a:r>
+              <a:rPr lang="fr-FR" dirty="0"/>
+              <a:t>Notice:</a:t>
+            </a:r>
+            <a:br>
+              <a:rPr lang="fr-FR" dirty="0"/>
+            </a:br>
+            <a:r>
+              <a:rPr lang="fr-FR" dirty="0"/>
+              <a:t>- in « </a:t>
+            </a:r>
+            <a:r>
+              <a:rPr lang="fr-FR" dirty="0" err="1"/>
+              <a:t>sbin</a:t>
+            </a:r>
+            <a:r>
+              <a:rPr lang="fr-FR" dirty="0"/>
+              <a:t> » directory, not in « bin » (</a:t>
+            </a:r>
+            <a:r>
+              <a:rPr lang="fr-FR" dirty="0" err="1"/>
+              <a:t>so</a:t>
+            </a:r>
+            <a:r>
+              <a:rPr lang="fr-FR" dirty="0"/>
+              <a:t> not in </a:t>
+            </a:r>
+            <a:r>
+              <a:rPr lang="fr-FR" dirty="0" err="1"/>
+              <a:t>your</a:t>
+            </a:r>
+            <a:r>
+              <a:rPr lang="fr-FR" dirty="0"/>
+              <a:t> PATH)</a:t>
+            </a:r>
+          </a:p>
+          <a:p>
+            <a:r>
+              <a:rPr lang="fr-FR" dirty="0"/>
+              <a:t>- </a:t>
+            </a:r>
+            <a:r>
+              <a:rPr lang="fr-FR" dirty="0" err="1"/>
+              <a:t>Only</a:t>
+            </a:r>
+            <a:r>
+              <a:rPr lang="fr-FR" dirty="0"/>
+              <a:t> « .sh » </a:t>
+            </a:r>
+            <a:r>
+              <a:rPr lang="fr-FR" dirty="0" err="1"/>
+              <a:t>bash</a:t>
+            </a:r>
+            <a:r>
+              <a:rPr lang="fr-FR" dirty="0"/>
+              <a:t> script,  no </a:t>
+            </a:r>
+            <a:r>
+              <a:rPr lang="fr-FR" dirty="0" err="1"/>
+              <a:t>windows</a:t>
+            </a:r>
+            <a:r>
+              <a:rPr lang="fr-FR" dirty="0"/>
+              <a:t> « .cmd »</a:t>
+            </a:r>
+          </a:p>
+        </p:txBody>
+      </p:sp>
+    </p:spTree>
+    <p:extLst>
+      <p:ext uri="{BB962C8B-B14F-4D97-AF65-F5344CB8AC3E}">
+        <p14:creationId xmlns:p14="http://schemas.microsoft.com/office/powerpoint/2010/main" val="641093606"/>
+      </p:ext>
+    </p:extLst>
+  </p:cSld>
+  <p:clrMapOvr>
+    <a:masterClrMapping/>
+  </p:clrMapOvr>
+</p:sld>
+</file>
+
+<file path=ppt/slides/slide36.xml><?xml version="1.0" encoding="utf-8"?>
+<p:sld xmlns:a="http://schemas.openxmlformats.org/drawingml/2006/main" xmlns:r="http://schemas.openxmlformats.org/officeDocument/2006/relationships" xmlns:p="http://schemas.openxmlformats.org/presentationml/2006/main">
+  <p:cSld>
+    <p:spTree>
+      <p:nvGrpSpPr>
+        <p:cNvPr id="1" name=""/>
+        <p:cNvGrpSpPr/>
+        <p:nvPr/>
+      </p:nvGrpSpPr>
+      <p:grpSpPr>
+        <a:xfrm>
+          <a:off x="0" y="0"/>
+          <a:ext cx="0" cy="0"/>
+          <a:chOff x="0" y="0"/>
+          <a:chExt cx="0" cy="0"/>
+        </a:xfrm>
+      </p:grpSpPr>
+      <p:sp>
+        <p:nvSpPr>
+          <p:cNvPr id="2" name="Titre 1">
+            <a:extLst>
+              <a:ext uri="{FF2B5EF4-FFF2-40B4-BE49-F238E27FC236}">
+                <a16:creationId xmlns:a16="http://schemas.microsoft.com/office/drawing/2014/main" id="{5FDC6BB5-6E7B-4456-94E4-C46ED66426BB}"/>
+              </a:ext>
+            </a:extLst>
+          </p:cNvPr>
+          <p:cNvSpPr>
+            <a:spLocks noGrp="1"/>
+          </p:cNvSpPr>
+          <p:nvPr>
+            <p:ph type="title"/>
+          </p:nvPr>
+        </p:nvSpPr>
+        <p:spPr>
+          <a:xfrm>
+            <a:off x="838200" y="1"/>
+            <a:ext cx="10515600" cy="914400"/>
+          </a:xfrm>
+        </p:spPr>
+        <p:txBody>
+          <a:bodyPr>
+            <a:normAutofit/>
+          </a:bodyPr>
+          <a:lstStyle/>
+          <a:p>
+            <a:pPr algn="ctr"/>
+            <a:r>
+              <a:rPr lang="fr-FR" dirty="0"/>
+              <a:t>Spark </a:t>
+            </a:r>
+            <a:r>
+              <a:rPr lang="fr-FR" dirty="0" err="1"/>
+              <a:t>History</a:t>
+            </a:r>
+            <a:r>
+              <a:rPr lang="fr-FR" dirty="0"/>
+              <a:t> Server …</a:t>
+            </a:r>
+          </a:p>
+        </p:txBody>
+      </p:sp>
+      <p:sp>
+        <p:nvSpPr>
+          <p:cNvPr id="5" name="ZoneTexte 4">
+            <a:extLst>
+              <a:ext uri="{FF2B5EF4-FFF2-40B4-BE49-F238E27FC236}">
+                <a16:creationId xmlns:a16="http://schemas.microsoft.com/office/drawing/2014/main" id="{42B1D4BF-9BC3-4762-B6C2-ECF70121E2B3}"/>
+              </a:ext>
+            </a:extLst>
+          </p:cNvPr>
+          <p:cNvSpPr txBox="1"/>
+          <p:nvPr/>
+        </p:nvSpPr>
+        <p:spPr>
+          <a:xfrm>
+            <a:off x="2074332" y="2724326"/>
+            <a:ext cx="8542867" cy="461665"/>
+          </a:xfrm>
+          <a:prstGeom prst="rect">
+            <a:avLst/>
+          </a:prstGeom>
+          <a:noFill/>
+        </p:spPr>
+        <p:txBody>
+          <a:bodyPr wrap="square">
+            <a:spAutoFit/>
+          </a:bodyPr>
+          <a:lstStyle/>
+          <a:p>
+            <a:r>
+              <a:rPr lang="fr-FR" sz="2400" b="1" dirty="0"/>
+              <a:t>spark-class.cmd </a:t>
+            </a:r>
+            <a:r>
+              <a:rPr lang="fr-FR" sz="2400" b="1" dirty="0" err="1"/>
+              <a:t>org.apache.spark.deploy.history.HistoryServer</a:t>
+            </a:r>
+            <a:endParaRPr lang="fr-FR" sz="2400" b="1" dirty="0"/>
+          </a:p>
+        </p:txBody>
+      </p:sp>
+      <p:pic>
+        <p:nvPicPr>
+          <p:cNvPr id="7" name="Image 6">
+            <a:extLst>
+              <a:ext uri="{FF2B5EF4-FFF2-40B4-BE49-F238E27FC236}">
+                <a16:creationId xmlns:a16="http://schemas.microsoft.com/office/drawing/2014/main" id="{756D76FD-3F33-464B-B1EF-DB6775B8AE1F}"/>
+              </a:ext>
+            </a:extLst>
+          </p:cNvPr>
+          <p:cNvPicPr>
+            <a:picLocks noChangeAspect="1"/>
+          </p:cNvPicPr>
+          <p:nvPr/>
+        </p:nvPicPr>
+        <p:blipFill>
+          <a:blip r:embed="rId2"/>
+          <a:stretch>
+            <a:fillRect/>
+          </a:stretch>
+        </p:blipFill>
+        <p:spPr>
+          <a:xfrm>
+            <a:off x="0" y="5069704"/>
+            <a:ext cx="12192000" cy="1000895"/>
+          </a:xfrm>
+          <a:prstGeom prst="rect">
+            <a:avLst/>
+          </a:prstGeom>
+        </p:spPr>
+      </p:pic>
+      <p:sp>
+        <p:nvSpPr>
+          <p:cNvPr id="8" name="ZoneTexte 7">
+            <a:extLst>
+              <a:ext uri="{FF2B5EF4-FFF2-40B4-BE49-F238E27FC236}">
+                <a16:creationId xmlns:a16="http://schemas.microsoft.com/office/drawing/2014/main" id="{D2CF9F20-3E0D-43F2-BC29-8D5C49EB7571}"/>
+              </a:ext>
+            </a:extLst>
+          </p:cNvPr>
+          <p:cNvSpPr txBox="1"/>
+          <p:nvPr/>
+        </p:nvSpPr>
+        <p:spPr>
+          <a:xfrm>
+            <a:off x="474133" y="1800996"/>
+            <a:ext cx="6096000" cy="923330"/>
+          </a:xfrm>
+          <a:prstGeom prst="rect">
+            <a:avLst/>
+          </a:prstGeom>
+          <a:noFill/>
+        </p:spPr>
+        <p:txBody>
+          <a:bodyPr wrap="square">
+            <a:spAutoFit/>
+          </a:bodyPr>
+          <a:lstStyle/>
+          <a:p>
+            <a:r>
+              <a:rPr lang="fr-FR" dirty="0"/>
+              <a:t>sbin/spark-history-server.sh </a:t>
+            </a:r>
+          </a:p>
+          <a:p>
+            <a:r>
+              <a:rPr lang="fr-FR" dirty="0">
+                <a:sym typeface="Wingdings" panose="05000000000000000000" pitchFamily="2" charset="2"/>
+              </a:rPr>
+              <a:t>   </a:t>
+            </a:r>
+            <a:r>
+              <a:rPr lang="fr-FR" dirty="0" err="1">
+                <a:sym typeface="Wingdings" panose="05000000000000000000" pitchFamily="2" charset="2"/>
+              </a:rPr>
+              <a:t>does</a:t>
+            </a:r>
+            <a:r>
+              <a:rPr lang="fr-FR" dirty="0">
+                <a:sym typeface="Wingdings" panose="05000000000000000000" pitchFamily="2" charset="2"/>
+              </a:rPr>
+              <a:t> not </a:t>
+            </a:r>
+            <a:r>
+              <a:rPr lang="fr-FR" dirty="0" err="1">
+                <a:sym typeface="Wingdings" panose="05000000000000000000" pitchFamily="2" charset="2"/>
+              </a:rPr>
+              <a:t>work</a:t>
+            </a:r>
+            <a:r>
+              <a:rPr lang="fr-FR" dirty="0">
+                <a:sym typeface="Wingdings" panose="05000000000000000000" pitchFamily="2" charset="2"/>
+              </a:rPr>
+              <a:t> on </a:t>
+            </a:r>
+            <a:r>
+              <a:rPr lang="fr-FR" dirty="0" err="1">
+                <a:sym typeface="Wingdings" panose="05000000000000000000" pitchFamily="2" charset="2"/>
+              </a:rPr>
+              <a:t>windows</a:t>
+            </a:r>
+            <a:r>
+              <a:rPr lang="fr-FR" dirty="0">
+                <a:sym typeface="Wingdings" panose="05000000000000000000" pitchFamily="2" charset="2"/>
+              </a:rPr>
+              <a:t>, </a:t>
+            </a:r>
+            <a:r>
+              <a:rPr lang="fr-FR" dirty="0" err="1">
+                <a:sym typeface="Wingdings" panose="05000000000000000000" pitchFamily="2" charset="2"/>
+              </a:rPr>
+              <a:t>even</a:t>
+            </a:r>
+            <a:r>
+              <a:rPr lang="fr-FR" dirty="0">
+                <a:sym typeface="Wingdings" panose="05000000000000000000" pitchFamily="2" charset="2"/>
+              </a:rPr>
+              <a:t> </a:t>
+            </a:r>
+            <a:r>
+              <a:rPr lang="fr-FR" dirty="0" err="1">
+                <a:sym typeface="Wingdings" panose="05000000000000000000" pitchFamily="2" charset="2"/>
+              </a:rPr>
+              <a:t>with</a:t>
+            </a:r>
+            <a:r>
+              <a:rPr lang="fr-FR" dirty="0">
+                <a:sym typeface="Wingdings" panose="05000000000000000000" pitchFamily="2" charset="2"/>
+              </a:rPr>
+              <a:t> </a:t>
+            </a:r>
+            <a:r>
+              <a:rPr lang="fr-FR" dirty="0" err="1">
+                <a:sym typeface="Wingdings" panose="05000000000000000000" pitchFamily="2" charset="2"/>
+              </a:rPr>
+              <a:t>cmder</a:t>
+            </a:r>
+            <a:r>
+              <a:rPr lang="fr-FR" dirty="0">
+                <a:sym typeface="Wingdings" panose="05000000000000000000" pitchFamily="2" charset="2"/>
+              </a:rPr>
+              <a:t> + </a:t>
+            </a:r>
+            <a:r>
+              <a:rPr lang="fr-FR" dirty="0" err="1">
+                <a:sym typeface="Wingdings" panose="05000000000000000000" pitchFamily="2" charset="2"/>
+              </a:rPr>
+              <a:t>bash</a:t>
+            </a:r>
+            <a:endParaRPr lang="fr-FR" dirty="0"/>
+          </a:p>
+          <a:p>
+            <a:r>
+              <a:rPr lang="fr-FR" dirty="0"/>
+              <a:t>  </a:t>
+            </a:r>
+            <a:r>
+              <a:rPr lang="fr-FR" dirty="0">
+                <a:sym typeface="Wingdings" panose="05000000000000000000" pitchFamily="2" charset="2"/>
+              </a:rPr>
+              <a:t> </a:t>
+            </a:r>
+            <a:r>
+              <a:rPr lang="fr-FR" dirty="0" err="1">
+                <a:sym typeface="Wingdings" panose="05000000000000000000" pitchFamily="2" charset="2"/>
+              </a:rPr>
+              <a:t>is</a:t>
+            </a:r>
+            <a:r>
+              <a:rPr lang="fr-FR" dirty="0">
+                <a:sym typeface="Wingdings" panose="05000000000000000000" pitchFamily="2" charset="2"/>
+              </a:rPr>
+              <a:t> </a:t>
+            </a:r>
+            <a:r>
+              <a:rPr lang="fr-FR" dirty="0" err="1">
+                <a:sym typeface="Wingdings" panose="05000000000000000000" pitchFamily="2" charset="2"/>
+              </a:rPr>
+              <a:t>almost</a:t>
+            </a:r>
+            <a:r>
+              <a:rPr lang="fr-FR" dirty="0">
+                <a:sym typeface="Wingdings" panose="05000000000000000000" pitchFamily="2" charset="2"/>
+              </a:rPr>
+              <a:t> </a:t>
+            </a:r>
+            <a:r>
+              <a:rPr lang="fr-FR" dirty="0" err="1">
+                <a:sym typeface="Wingdings" panose="05000000000000000000" pitchFamily="2" charset="2"/>
+              </a:rPr>
+              <a:t>equivalent</a:t>
+            </a:r>
+            <a:r>
+              <a:rPr lang="fr-FR" dirty="0">
+                <a:sym typeface="Wingdings" panose="05000000000000000000" pitchFamily="2" charset="2"/>
+              </a:rPr>
+              <a:t> to …</a:t>
+            </a:r>
+            <a:endParaRPr lang="fr-FR" dirty="0"/>
+          </a:p>
+        </p:txBody>
+      </p:sp>
+      <p:sp>
+        <p:nvSpPr>
+          <p:cNvPr id="10" name="ZoneTexte 9">
+            <a:extLst>
+              <a:ext uri="{FF2B5EF4-FFF2-40B4-BE49-F238E27FC236}">
+                <a16:creationId xmlns:a16="http://schemas.microsoft.com/office/drawing/2014/main" id="{7B30EBE3-A70C-43CB-B220-9A7760B9F3CF}"/>
+              </a:ext>
+            </a:extLst>
+          </p:cNvPr>
+          <p:cNvSpPr txBox="1"/>
+          <p:nvPr/>
+        </p:nvSpPr>
+        <p:spPr>
+          <a:xfrm>
+            <a:off x="474133" y="3934086"/>
+            <a:ext cx="9550400" cy="1200329"/>
+          </a:xfrm>
+          <a:prstGeom prst="rect">
+            <a:avLst/>
+          </a:prstGeom>
+          <a:noFill/>
+        </p:spPr>
+        <p:txBody>
+          <a:bodyPr wrap="square">
+            <a:spAutoFit/>
+          </a:bodyPr>
+          <a:lstStyle/>
+          <a:p>
+            <a:r>
+              <a:rPr lang="fr-FR" dirty="0"/>
+              <a:t> </a:t>
+            </a:r>
+            <a:r>
+              <a:rPr lang="fr-FR" dirty="0">
+                <a:sym typeface="Wingdings" panose="05000000000000000000" pitchFamily="2" charset="2"/>
+              </a:rPr>
+              <a:t> start but </a:t>
+            </a:r>
+            <a:r>
+              <a:rPr lang="fr-FR" dirty="0" err="1">
+                <a:sym typeface="Wingdings" panose="05000000000000000000" pitchFamily="2" charset="2"/>
+              </a:rPr>
+              <a:t>expect</a:t>
+            </a:r>
+            <a:r>
+              <a:rPr lang="fr-FR" dirty="0">
+                <a:sym typeface="Wingdings" panose="05000000000000000000" pitchFamily="2" charset="2"/>
+              </a:rPr>
+              <a:t> </a:t>
+            </a:r>
+            <a:r>
+              <a:rPr lang="fr-FR" dirty="0" err="1">
+                <a:sym typeface="Wingdings" panose="05000000000000000000" pitchFamily="2" charset="2"/>
+              </a:rPr>
+              <a:t>different</a:t>
+            </a:r>
+            <a:r>
+              <a:rPr lang="fr-FR" dirty="0">
+                <a:sym typeface="Wingdings" panose="05000000000000000000" pitchFamily="2" charset="2"/>
+              </a:rPr>
+              <a:t> conf</a:t>
+            </a:r>
+          </a:p>
+          <a:p>
+            <a:r>
+              <a:rPr lang="fr-FR" dirty="0" err="1"/>
+              <a:t>spark.eventLog.dir</a:t>
+            </a:r>
+            <a:r>
+              <a:rPr lang="fr-FR" dirty="0"/>
+              <a:t>               file:///C:/apps/spark/spark-eventLog</a:t>
+            </a:r>
+            <a:br>
+              <a:rPr lang="fr-FR" dirty="0"/>
+            </a:br>
+            <a:r>
+              <a:rPr lang="fr-FR" b="1" dirty="0" err="1"/>
+              <a:t>spark.history.fs.logDirectory</a:t>
+            </a:r>
+            <a:r>
+              <a:rPr lang="fr-FR" dirty="0"/>
+              <a:t>	file:///C:/apps/spark/spark-eventLog</a:t>
+            </a:r>
+            <a:br>
+              <a:rPr lang="fr-FR" dirty="0"/>
+            </a:br>
+            <a:endParaRPr lang="fr-FR" dirty="0"/>
+          </a:p>
+        </p:txBody>
+      </p:sp>
+    </p:spTree>
+    <p:extLst>
+      <p:ext uri="{BB962C8B-B14F-4D97-AF65-F5344CB8AC3E}">
+        <p14:creationId xmlns:p14="http://schemas.microsoft.com/office/powerpoint/2010/main" val="2508960038"/>
+      </p:ext>
+    </p:extLst>
+  </p:cSld>
+  <p:clrMapOvr>
+    <a:masterClrMapping/>
+  </p:clrMapOvr>
+</p:sld>
+</file>
+
+<file path=ppt/slides/slide37.xml><?xml version="1.0" encoding="utf-8"?>
+<p:sld xmlns:a="http://schemas.openxmlformats.org/drawingml/2006/main" xmlns:r="http://schemas.openxmlformats.org/officeDocument/2006/relationships" xmlns:p="http://schemas.openxmlformats.org/presentationml/2006/main">
+  <p:cSld>
+    <p:spTree>
+      <p:nvGrpSpPr>
+        <p:cNvPr id="1" name=""/>
+        <p:cNvGrpSpPr/>
+        <p:nvPr/>
+      </p:nvGrpSpPr>
+      <p:grpSpPr>
+        <a:xfrm>
+          <a:off x="0" y="0"/>
+          <a:ext cx="0" cy="0"/>
+          <a:chOff x="0" y="0"/>
+          <a:chExt cx="0" cy="0"/>
+        </a:xfrm>
+      </p:grpSpPr>
+      <p:sp>
+        <p:nvSpPr>
+          <p:cNvPr id="2" name="Titre 1">
+            <a:extLst>
+              <a:ext uri="{FF2B5EF4-FFF2-40B4-BE49-F238E27FC236}">
+                <a16:creationId xmlns:a16="http://schemas.microsoft.com/office/drawing/2014/main" id="{992C8F70-902D-45DB-8B33-73D1E81681ED}"/>
+              </a:ext>
+            </a:extLst>
+          </p:cNvPr>
+          <p:cNvSpPr>
+            <a:spLocks noGrp="1"/>
+          </p:cNvSpPr>
+          <p:nvPr>
+            <p:ph type="title"/>
+          </p:nvPr>
+        </p:nvSpPr>
+        <p:spPr>
+          <a:xfrm>
+            <a:off x="838200" y="152400"/>
+            <a:ext cx="10515600" cy="719667"/>
+          </a:xfrm>
+        </p:spPr>
+        <p:txBody>
+          <a:bodyPr/>
+          <a:lstStyle/>
+          <a:p>
+            <a:pPr algn="ctr"/>
+            <a:r>
+              <a:rPr lang="fr-FR" dirty="0"/>
+              <a:t>http://localhost:18080</a:t>
+            </a:r>
+          </a:p>
+        </p:txBody>
+      </p:sp>
+      <p:pic>
+        <p:nvPicPr>
+          <p:cNvPr id="7" name="Image 6">
+            <a:extLst>
+              <a:ext uri="{FF2B5EF4-FFF2-40B4-BE49-F238E27FC236}">
+                <a16:creationId xmlns:a16="http://schemas.microsoft.com/office/drawing/2014/main" id="{EF92928A-3514-4FC5-91E9-68029B48C457}"/>
+              </a:ext>
+            </a:extLst>
+          </p:cNvPr>
+          <p:cNvPicPr>
+            <a:picLocks noChangeAspect="1"/>
+          </p:cNvPicPr>
+          <p:nvPr/>
+        </p:nvPicPr>
+        <p:blipFill>
+          <a:blip r:embed="rId2"/>
+          <a:stretch>
+            <a:fillRect/>
+          </a:stretch>
+        </p:blipFill>
+        <p:spPr>
+          <a:xfrm>
+            <a:off x="707526" y="3039533"/>
+            <a:ext cx="10503096" cy="3818467"/>
+          </a:xfrm>
+          <a:prstGeom prst="rect">
+            <a:avLst/>
+          </a:prstGeom>
+        </p:spPr>
+      </p:pic>
+      <p:pic>
+        <p:nvPicPr>
+          <p:cNvPr id="9" name="Image 8">
+            <a:extLst>
+              <a:ext uri="{FF2B5EF4-FFF2-40B4-BE49-F238E27FC236}">
+                <a16:creationId xmlns:a16="http://schemas.microsoft.com/office/drawing/2014/main" id="{0868BB87-FDCE-42BE-84EB-8A74FE533A64}"/>
+              </a:ext>
+            </a:extLst>
+          </p:cNvPr>
+          <p:cNvPicPr>
+            <a:picLocks noChangeAspect="1"/>
+          </p:cNvPicPr>
+          <p:nvPr/>
+        </p:nvPicPr>
+        <p:blipFill>
+          <a:blip r:embed="rId3"/>
+          <a:stretch>
+            <a:fillRect/>
+          </a:stretch>
+        </p:blipFill>
+        <p:spPr>
+          <a:xfrm>
+            <a:off x="0" y="1215227"/>
+            <a:ext cx="12192000" cy="1040878"/>
+          </a:xfrm>
+          <a:prstGeom prst="rect">
+            <a:avLst/>
+          </a:prstGeom>
+        </p:spPr>
+      </p:pic>
+    </p:spTree>
+    <p:extLst>
+      <p:ext uri="{BB962C8B-B14F-4D97-AF65-F5344CB8AC3E}">
+        <p14:creationId xmlns:p14="http://schemas.microsoft.com/office/powerpoint/2010/main" val="1928721863"/>
+      </p:ext>
+    </p:extLst>
+  </p:cSld>
+  <p:clrMapOvr>
+    <a:masterClrMapping/>
+  </p:clrMapOvr>
+</p:sld>
+</file>
+
+<file path=ppt/slides/slide38.xml><?xml version="1.0" encoding="utf-8"?>
+<p:sld xmlns:a="http://schemas.openxmlformats.org/drawingml/2006/main" xmlns:r="http://schemas.openxmlformats.org/officeDocument/2006/relationships" xmlns:p="http://schemas.openxmlformats.org/presentationml/2006/main">
+  <p:cSld>
+    <p:spTree>
+      <p:nvGrpSpPr>
+        <p:cNvPr id="1" name=""/>
+        <p:cNvGrpSpPr/>
+        <p:nvPr/>
+      </p:nvGrpSpPr>
+      <p:grpSpPr>
+        <a:xfrm>
+          <a:off x="0" y="0"/>
+          <a:ext cx="0" cy="0"/>
+          <a:chOff x="0" y="0"/>
+          <a:chExt cx="0" cy="0"/>
+        </a:xfrm>
+      </p:grpSpPr>
+      <p:sp>
+        <p:nvSpPr>
+          <p:cNvPr id="2" name="Titre 1">
+            <a:extLst>
+              <a:ext uri="{FF2B5EF4-FFF2-40B4-BE49-F238E27FC236}">
+                <a16:creationId xmlns:a16="http://schemas.microsoft.com/office/drawing/2014/main" id="{8F0EF2B6-55C3-4349-AE4B-CAF0842ABEDC}"/>
+              </a:ext>
+            </a:extLst>
+          </p:cNvPr>
+          <p:cNvSpPr>
+            <a:spLocks noGrp="1"/>
+          </p:cNvSpPr>
+          <p:nvPr>
+            <p:ph type="title"/>
+          </p:nvPr>
+        </p:nvSpPr>
+        <p:spPr>
+          <a:xfrm>
+            <a:off x="838200" y="0"/>
+            <a:ext cx="10515600" cy="694267"/>
+          </a:xfrm>
+        </p:spPr>
+        <p:txBody>
+          <a:bodyPr>
+            <a:normAutofit fontScale="90000"/>
+          </a:bodyPr>
+          <a:lstStyle/>
+          <a:p>
+            <a:pPr algn="ctr"/>
+            <a:r>
+              <a:rPr lang="fr-FR" dirty="0" err="1"/>
+              <a:t>Incomplete</a:t>
+            </a:r>
+            <a:r>
+              <a:rPr lang="fr-FR" dirty="0"/>
+              <a:t> / Complete  Applications</a:t>
+            </a:r>
+          </a:p>
+        </p:txBody>
+      </p:sp>
+      <p:pic>
+        <p:nvPicPr>
+          <p:cNvPr id="5" name="Image 4">
+            <a:extLst>
+              <a:ext uri="{FF2B5EF4-FFF2-40B4-BE49-F238E27FC236}">
+                <a16:creationId xmlns:a16="http://schemas.microsoft.com/office/drawing/2014/main" id="{C7009C4F-4B6B-4F8D-A8EA-4954ED7081F3}"/>
+              </a:ext>
+            </a:extLst>
+          </p:cNvPr>
+          <p:cNvPicPr>
+            <a:picLocks noChangeAspect="1"/>
+          </p:cNvPicPr>
+          <p:nvPr/>
+        </p:nvPicPr>
+        <p:blipFill>
+          <a:blip r:embed="rId2"/>
+          <a:stretch>
+            <a:fillRect/>
+          </a:stretch>
+        </p:blipFill>
+        <p:spPr>
+          <a:xfrm>
+            <a:off x="0" y="1454655"/>
+            <a:ext cx="12192000" cy="3948689"/>
+          </a:xfrm>
+          <a:prstGeom prst="rect">
+            <a:avLst/>
+          </a:prstGeom>
+        </p:spPr>
+      </p:pic>
+    </p:spTree>
+    <p:extLst>
+      <p:ext uri="{BB962C8B-B14F-4D97-AF65-F5344CB8AC3E}">
+        <p14:creationId xmlns:p14="http://schemas.microsoft.com/office/powerpoint/2010/main" val="3672677323"/>
+      </p:ext>
+    </p:extLst>
+  </p:cSld>
+  <p:clrMapOvr>
+    <a:masterClrMapping/>
+  </p:clrMapOvr>
+</p:sld>
+</file>
+
+<file path=ppt/slides/slide39.xml><?xml version="1.0" encoding="utf-8"?>
+<p:sld xmlns:a="http://schemas.openxmlformats.org/drawingml/2006/main" xmlns:r="http://schemas.openxmlformats.org/officeDocument/2006/relationships" xmlns:p="http://schemas.openxmlformats.org/presentationml/2006/main">
+  <p:cSld>
+    <p:spTree>
+      <p:nvGrpSpPr>
+        <p:cNvPr id="1" name=""/>
+        <p:cNvGrpSpPr/>
+        <p:nvPr/>
+      </p:nvGrpSpPr>
+      <p:grpSpPr>
+        <a:xfrm>
+          <a:off x="0" y="0"/>
+          <a:ext cx="0" cy="0"/>
+          <a:chOff x="0" y="0"/>
+          <a:chExt cx="0" cy="0"/>
+        </a:xfrm>
+      </p:grpSpPr>
+      <p:sp>
+        <p:nvSpPr>
+          <p:cNvPr id="2" name="Titre 1">
+            <a:extLst>
+              <a:ext uri="{FF2B5EF4-FFF2-40B4-BE49-F238E27FC236}">
+                <a16:creationId xmlns:a16="http://schemas.microsoft.com/office/drawing/2014/main" id="{B93AC50C-3E75-4A0D-9045-936617291BB6}"/>
+              </a:ext>
+            </a:extLst>
+          </p:cNvPr>
+          <p:cNvSpPr>
+            <a:spLocks noGrp="1"/>
+          </p:cNvSpPr>
+          <p:nvPr>
+            <p:ph type="title"/>
+          </p:nvPr>
+        </p:nvSpPr>
+        <p:spPr>
+          <a:xfrm>
+            <a:off x="838200" y="0"/>
+            <a:ext cx="10515600" cy="973667"/>
+          </a:xfrm>
+        </p:spPr>
+        <p:txBody>
+          <a:bodyPr/>
+          <a:lstStyle/>
+          <a:p>
+            <a:pPr algn="ctr"/>
+            <a:r>
+              <a:rPr lang="fr-FR" dirty="0"/>
+              <a:t>http://localhost:18080/history/${appId}</a:t>
+            </a:r>
+          </a:p>
+        </p:txBody>
+      </p:sp>
+      <p:pic>
+        <p:nvPicPr>
+          <p:cNvPr id="5" name="Image 4">
+            <a:extLst>
+              <a:ext uri="{FF2B5EF4-FFF2-40B4-BE49-F238E27FC236}">
+                <a16:creationId xmlns:a16="http://schemas.microsoft.com/office/drawing/2014/main" id="{D945E999-86F2-4DBC-AB0B-FF991A6653EC}"/>
+              </a:ext>
+            </a:extLst>
+          </p:cNvPr>
+          <p:cNvPicPr>
+            <a:picLocks noChangeAspect="1"/>
+          </p:cNvPicPr>
+          <p:nvPr/>
+        </p:nvPicPr>
+        <p:blipFill>
+          <a:blip r:embed="rId2"/>
+          <a:stretch>
+            <a:fillRect/>
+          </a:stretch>
+        </p:blipFill>
+        <p:spPr>
+          <a:xfrm>
+            <a:off x="584199" y="1488829"/>
+            <a:ext cx="10854267" cy="5198346"/>
+          </a:xfrm>
+          <a:prstGeom prst="rect">
+            <a:avLst/>
+          </a:prstGeom>
+        </p:spPr>
+      </p:pic>
+    </p:spTree>
+    <p:extLst>
+      <p:ext uri="{BB962C8B-B14F-4D97-AF65-F5344CB8AC3E}">
+        <p14:creationId xmlns:p14="http://schemas.microsoft.com/office/powerpoint/2010/main" val="3821536214"/>
       </p:ext>
     </p:extLst>
   </p:cSld>
@@ -16116,6 +16315,3707 @@
     <p:extLst>
       <p:ext uri="{BB962C8B-B14F-4D97-AF65-F5344CB8AC3E}">
         <p14:creationId xmlns:p14="http://schemas.microsoft.com/office/powerpoint/2010/main" val="2723810423"/>
+      </p:ext>
+    </p:extLst>
+  </p:cSld>
+  <p:clrMapOvr>
+    <a:masterClrMapping/>
+  </p:clrMapOvr>
+</p:sld>
+</file>
+
+<file path=ppt/slides/slide40.xml><?xml version="1.0" encoding="utf-8"?>
+<p:sld xmlns:a="http://schemas.openxmlformats.org/drawingml/2006/main" xmlns:r="http://schemas.openxmlformats.org/officeDocument/2006/relationships" xmlns:p="http://schemas.openxmlformats.org/presentationml/2006/main">
+  <p:cSld>
+    <p:spTree>
+      <p:nvGrpSpPr>
+        <p:cNvPr id="1" name=""/>
+        <p:cNvGrpSpPr/>
+        <p:nvPr/>
+      </p:nvGrpSpPr>
+      <p:grpSpPr>
+        <a:xfrm>
+          <a:off x="0" y="0"/>
+          <a:ext cx="0" cy="0"/>
+          <a:chOff x="0" y="0"/>
+          <a:chExt cx="0" cy="0"/>
+        </a:xfrm>
+      </p:grpSpPr>
+      <p:sp>
+        <p:nvSpPr>
+          <p:cNvPr id="2" name="Titre 1">
+            <a:extLst>
+              <a:ext uri="{FF2B5EF4-FFF2-40B4-BE49-F238E27FC236}">
+                <a16:creationId xmlns:a16="http://schemas.microsoft.com/office/drawing/2014/main" id="{CF9BE998-F8FB-4D8E-9FFB-ED496EDA269C}"/>
+              </a:ext>
+            </a:extLst>
+          </p:cNvPr>
+          <p:cNvSpPr>
+            <a:spLocks noGrp="1"/>
+          </p:cNvSpPr>
+          <p:nvPr>
+            <p:ph type="title"/>
+          </p:nvPr>
+        </p:nvSpPr>
+        <p:spPr>
+          <a:xfrm>
+            <a:off x="838200" y="0"/>
+            <a:ext cx="10515600" cy="1134534"/>
+          </a:xfrm>
+        </p:spPr>
+        <p:txBody>
+          <a:bodyPr>
+            <a:normAutofit fontScale="90000"/>
+          </a:bodyPr>
+          <a:lstStyle/>
+          <a:p>
+            <a:pPr algn="ctr"/>
+            <a:r>
+              <a:rPr lang="fr-FR" dirty="0" err="1"/>
+              <a:t>Things</a:t>
+            </a:r>
+            <a:r>
+              <a:rPr lang="fr-FR" dirty="0"/>
+              <a:t> You Can NOT Do in Spark </a:t>
+            </a:r>
+            <a:r>
+              <a:rPr lang="fr-FR" dirty="0" err="1"/>
+              <a:t>History</a:t>
+            </a:r>
+            <a:r>
+              <a:rPr lang="fr-FR" dirty="0"/>
+              <a:t> Server … </a:t>
+            </a:r>
+            <a:r>
+              <a:rPr lang="fr-FR" dirty="0" err="1"/>
+              <a:t>ThreadDumps</a:t>
+            </a:r>
+            <a:r>
+              <a:rPr lang="fr-FR" dirty="0"/>
+              <a:t>, Kill </a:t>
+            </a:r>
+            <a:r>
+              <a:rPr lang="fr-FR" dirty="0" err="1"/>
+              <a:t>Task</a:t>
+            </a:r>
+            <a:endParaRPr lang="fr-FR" dirty="0"/>
+          </a:p>
+        </p:txBody>
+      </p:sp>
+      <p:pic>
+        <p:nvPicPr>
+          <p:cNvPr id="5" name="Image 4">
+            <a:extLst>
+              <a:ext uri="{FF2B5EF4-FFF2-40B4-BE49-F238E27FC236}">
+                <a16:creationId xmlns:a16="http://schemas.microsoft.com/office/drawing/2014/main" id="{7EA6AAFA-130D-4982-BF18-A60FDEA1B405}"/>
+              </a:ext>
+            </a:extLst>
+          </p:cNvPr>
+          <p:cNvPicPr>
+            <a:picLocks noChangeAspect="1"/>
+          </p:cNvPicPr>
+          <p:nvPr/>
+        </p:nvPicPr>
+        <p:blipFill>
+          <a:blip r:embed="rId2"/>
+          <a:stretch>
+            <a:fillRect/>
+          </a:stretch>
+        </p:blipFill>
+        <p:spPr>
+          <a:xfrm>
+            <a:off x="4140200" y="1206609"/>
+            <a:ext cx="7814732" cy="2357893"/>
+          </a:xfrm>
+          <a:prstGeom prst="rect">
+            <a:avLst/>
+          </a:prstGeom>
+        </p:spPr>
+      </p:pic>
+      <p:sp>
+        <p:nvSpPr>
+          <p:cNvPr id="6" name="ZoneTexte 5">
+            <a:extLst>
+              <a:ext uri="{FF2B5EF4-FFF2-40B4-BE49-F238E27FC236}">
+                <a16:creationId xmlns:a16="http://schemas.microsoft.com/office/drawing/2014/main" id="{3DF04F62-1632-450C-8D10-EB3DE6268483}"/>
+              </a:ext>
+            </a:extLst>
+          </p:cNvPr>
+          <p:cNvSpPr txBox="1"/>
+          <p:nvPr/>
+        </p:nvSpPr>
+        <p:spPr>
+          <a:xfrm>
+            <a:off x="1308698" y="2296957"/>
+            <a:ext cx="1942519" cy="369332"/>
+          </a:xfrm>
+          <a:prstGeom prst="rect">
+            <a:avLst/>
+          </a:prstGeom>
+          <a:noFill/>
+        </p:spPr>
+        <p:txBody>
+          <a:bodyPr wrap="none" rtlCol="0">
+            <a:spAutoFit/>
+          </a:bodyPr>
+          <a:lstStyle/>
+          <a:p>
+            <a:r>
+              <a:rPr lang="fr-FR" dirty="0"/>
+              <a:t>Spark UI  (live app)</a:t>
+            </a:r>
+          </a:p>
+        </p:txBody>
+      </p:sp>
+      <p:sp>
+        <p:nvSpPr>
+          <p:cNvPr id="7" name="ZoneTexte 6">
+            <a:extLst>
+              <a:ext uri="{FF2B5EF4-FFF2-40B4-BE49-F238E27FC236}">
+                <a16:creationId xmlns:a16="http://schemas.microsoft.com/office/drawing/2014/main" id="{96C9B8E0-F329-40AA-8314-E10E414F4A12}"/>
+              </a:ext>
+            </a:extLst>
+          </p:cNvPr>
+          <p:cNvSpPr txBox="1"/>
+          <p:nvPr/>
+        </p:nvSpPr>
+        <p:spPr>
+          <a:xfrm>
+            <a:off x="1308698" y="4877158"/>
+            <a:ext cx="2080441" cy="646331"/>
+          </a:xfrm>
+          <a:prstGeom prst="rect">
+            <a:avLst/>
+          </a:prstGeom>
+          <a:noFill/>
+        </p:spPr>
+        <p:txBody>
+          <a:bodyPr wrap="none" rtlCol="0">
+            <a:spAutoFit/>
+          </a:bodyPr>
+          <a:lstStyle/>
+          <a:p>
+            <a:r>
+              <a:rPr lang="fr-FR" dirty="0"/>
+              <a:t>Spark </a:t>
+            </a:r>
+            <a:r>
+              <a:rPr lang="fr-FR" dirty="0" err="1"/>
+              <a:t>HistoryServer</a:t>
+            </a:r>
+            <a:r>
+              <a:rPr lang="fr-FR" dirty="0"/>
+              <a:t> </a:t>
+            </a:r>
+          </a:p>
+          <a:p>
+            <a:r>
+              <a:rPr lang="fr-FR" dirty="0"/>
+              <a:t>(Offline)</a:t>
+            </a:r>
+          </a:p>
+        </p:txBody>
+      </p:sp>
+      <p:pic>
+        <p:nvPicPr>
+          <p:cNvPr id="9" name="Image 8">
+            <a:extLst>
+              <a:ext uri="{FF2B5EF4-FFF2-40B4-BE49-F238E27FC236}">
+                <a16:creationId xmlns:a16="http://schemas.microsoft.com/office/drawing/2014/main" id="{175A9A24-5ACA-41A4-ACA2-816228D22728}"/>
+              </a:ext>
+            </a:extLst>
+          </p:cNvPr>
+          <p:cNvPicPr>
+            <a:picLocks noChangeAspect="1"/>
+          </p:cNvPicPr>
+          <p:nvPr/>
+        </p:nvPicPr>
+        <p:blipFill>
+          <a:blip r:embed="rId3"/>
+          <a:stretch>
+            <a:fillRect/>
+          </a:stretch>
+        </p:blipFill>
+        <p:spPr>
+          <a:xfrm>
+            <a:off x="4140200" y="3828712"/>
+            <a:ext cx="6536267" cy="2817434"/>
+          </a:xfrm>
+          <a:prstGeom prst="rect">
+            <a:avLst/>
+          </a:prstGeom>
+        </p:spPr>
+      </p:pic>
+      <p:sp>
+        <p:nvSpPr>
+          <p:cNvPr id="10" name="Non égal 9">
+            <a:extLst>
+              <a:ext uri="{FF2B5EF4-FFF2-40B4-BE49-F238E27FC236}">
+                <a16:creationId xmlns:a16="http://schemas.microsoft.com/office/drawing/2014/main" id="{8873A540-5922-4B0B-9397-EB131212905C}"/>
+              </a:ext>
+            </a:extLst>
+          </p:cNvPr>
+          <p:cNvSpPr/>
+          <p:nvPr/>
+        </p:nvSpPr>
+        <p:spPr>
+          <a:xfrm>
+            <a:off x="7806267" y="3467100"/>
+            <a:ext cx="651934" cy="431800"/>
+          </a:xfrm>
+          <a:prstGeom prst="mathNotEqual">
+            <a:avLst/>
+          </a:prstGeom>
+        </p:spPr>
+        <p:style>
+          <a:lnRef idx="2">
+            <a:schemeClr val="accent1">
+              <a:shade val="50000"/>
+            </a:schemeClr>
+          </a:lnRef>
+          <a:fillRef idx="1">
+            <a:schemeClr val="accent1"/>
+          </a:fillRef>
+          <a:effectRef idx="0">
+            <a:schemeClr val="accent1"/>
+          </a:effectRef>
+          <a:fontRef idx="minor">
+            <a:schemeClr val="lt1"/>
+          </a:fontRef>
+        </p:style>
+        <p:txBody>
+          <a:bodyPr rtlCol="0" anchor="ctr"/>
+          <a:lstStyle/>
+          <a:p>
+            <a:pPr algn="ctr"/>
+            <a:endParaRPr lang="fr-FR">
+              <a:solidFill>
+                <a:schemeClr val="tx1"/>
+              </a:solidFill>
+            </a:endParaRPr>
+          </a:p>
+        </p:txBody>
+      </p:sp>
+      <p:sp>
+        <p:nvSpPr>
+          <p:cNvPr id="11" name="Rectangle 10">
+            <a:extLst>
+              <a:ext uri="{FF2B5EF4-FFF2-40B4-BE49-F238E27FC236}">
+                <a16:creationId xmlns:a16="http://schemas.microsoft.com/office/drawing/2014/main" id="{59C3C2A0-4AFA-4E91-9CE8-595BD199A8DC}"/>
+              </a:ext>
+            </a:extLst>
+          </p:cNvPr>
+          <p:cNvSpPr/>
+          <p:nvPr/>
+        </p:nvSpPr>
+        <p:spPr>
+          <a:xfrm>
+            <a:off x="9955762" y="2883159"/>
+            <a:ext cx="1017037" cy="545841"/>
+          </a:xfrm>
+          <a:prstGeom prst="rect">
+            <a:avLst/>
+          </a:prstGeom>
+          <a:noFill/>
+          <a:ln w="34925">
+            <a:solidFill>
+              <a:srgbClr val="FF0000"/>
+            </a:solidFill>
+          </a:ln>
+        </p:spPr>
+        <p:style>
+          <a:lnRef idx="2">
+            <a:schemeClr val="accent1">
+              <a:shade val="50000"/>
+            </a:schemeClr>
+          </a:lnRef>
+          <a:fillRef idx="1">
+            <a:schemeClr val="accent1"/>
+          </a:fillRef>
+          <a:effectRef idx="0">
+            <a:schemeClr val="accent1"/>
+          </a:effectRef>
+          <a:fontRef idx="minor">
+            <a:schemeClr val="lt1"/>
+          </a:fontRef>
+        </p:style>
+        <p:txBody>
+          <a:bodyPr rtlCol="0" anchor="ctr"/>
+          <a:lstStyle/>
+          <a:p>
+            <a:pPr algn="ctr"/>
+            <a:endParaRPr lang="fr-FR"/>
+          </a:p>
+        </p:txBody>
+      </p:sp>
+    </p:spTree>
+    <p:extLst>
+      <p:ext uri="{BB962C8B-B14F-4D97-AF65-F5344CB8AC3E}">
+        <p14:creationId xmlns:p14="http://schemas.microsoft.com/office/powerpoint/2010/main" val="14945922"/>
+      </p:ext>
+    </p:extLst>
+  </p:cSld>
+  <p:clrMapOvr>
+    <a:masterClrMapping/>
+  </p:clrMapOvr>
+</p:sld>
+</file>
+
+<file path=ppt/slides/slide41.xml><?xml version="1.0" encoding="utf-8"?>
+<p:sld xmlns:a="http://schemas.openxmlformats.org/drawingml/2006/main" xmlns:r="http://schemas.openxmlformats.org/officeDocument/2006/relationships" xmlns:p="http://schemas.openxmlformats.org/presentationml/2006/main">
+  <p:cSld>
+    <p:spTree>
+      <p:nvGrpSpPr>
+        <p:cNvPr id="1" name=""/>
+        <p:cNvGrpSpPr/>
+        <p:nvPr/>
+      </p:nvGrpSpPr>
+      <p:grpSpPr>
+        <a:xfrm>
+          <a:off x="0" y="0"/>
+          <a:ext cx="0" cy="0"/>
+          <a:chOff x="0" y="0"/>
+          <a:chExt cx="0" cy="0"/>
+        </a:xfrm>
+      </p:grpSpPr>
+      <p:sp>
+        <p:nvSpPr>
+          <p:cNvPr id="2" name="Titre 1">
+            <a:extLst>
+              <a:ext uri="{FF2B5EF4-FFF2-40B4-BE49-F238E27FC236}">
+                <a16:creationId xmlns:a16="http://schemas.microsoft.com/office/drawing/2014/main" id="{EAF41F34-ED86-46D1-8AB4-52D1B4106960}"/>
+              </a:ext>
+            </a:extLst>
+          </p:cNvPr>
+          <p:cNvSpPr>
+            <a:spLocks noGrp="1"/>
+          </p:cNvSpPr>
+          <p:nvPr>
+            <p:ph type="title"/>
+          </p:nvPr>
+        </p:nvSpPr>
+        <p:spPr>
+          <a:xfrm>
+            <a:off x="838200" y="136607"/>
+            <a:ext cx="10515600" cy="899091"/>
+          </a:xfrm>
+        </p:spPr>
+        <p:txBody>
+          <a:bodyPr>
+            <a:normAutofit/>
+          </a:bodyPr>
+          <a:lstStyle/>
+          <a:p>
+            <a:pPr algn="ctr"/>
+            <a:r>
+              <a:rPr lang="fr-FR" dirty="0" err="1"/>
+              <a:t>Tip&amp;Tricks</a:t>
+            </a:r>
+            <a:r>
+              <a:rPr lang="fr-FR" dirty="0"/>
+              <a:t>  for </a:t>
+            </a:r>
+            <a:r>
+              <a:rPr lang="fr-FR" dirty="0" err="1"/>
+              <a:t>EventLog</a:t>
+            </a:r>
+            <a:r>
+              <a:rPr lang="fr-FR" dirty="0"/>
+              <a:t> : Download </a:t>
+            </a:r>
+            <a:r>
+              <a:rPr lang="fr-FR" dirty="0" err="1"/>
+              <a:t>them</a:t>
+            </a:r>
+            <a:endParaRPr lang="fr-FR" dirty="0"/>
+          </a:p>
+        </p:txBody>
+      </p:sp>
+      <p:pic>
+        <p:nvPicPr>
+          <p:cNvPr id="5" name="Image 4">
+            <a:extLst>
+              <a:ext uri="{FF2B5EF4-FFF2-40B4-BE49-F238E27FC236}">
+                <a16:creationId xmlns:a16="http://schemas.microsoft.com/office/drawing/2014/main" id="{6A81C8BF-7AD5-49E0-A688-B15550F8D7FD}"/>
+              </a:ext>
+            </a:extLst>
+          </p:cNvPr>
+          <p:cNvPicPr>
+            <a:picLocks noChangeAspect="1"/>
+          </p:cNvPicPr>
+          <p:nvPr/>
+        </p:nvPicPr>
+        <p:blipFill>
+          <a:blip r:embed="rId2"/>
+          <a:stretch>
+            <a:fillRect/>
+          </a:stretch>
+        </p:blipFill>
+        <p:spPr>
+          <a:xfrm>
+            <a:off x="6537416" y="1549021"/>
+            <a:ext cx="4715533" cy="4867954"/>
+          </a:xfrm>
+          <a:prstGeom prst="rect">
+            <a:avLst/>
+          </a:prstGeom>
+        </p:spPr>
+      </p:pic>
+      <p:sp>
+        <p:nvSpPr>
+          <p:cNvPr id="6" name="Rectangle 5">
+            <a:extLst>
+              <a:ext uri="{FF2B5EF4-FFF2-40B4-BE49-F238E27FC236}">
+                <a16:creationId xmlns:a16="http://schemas.microsoft.com/office/drawing/2014/main" id="{B8D67431-4BA8-4A61-8165-478C41E0D1FA}"/>
+              </a:ext>
+            </a:extLst>
+          </p:cNvPr>
+          <p:cNvSpPr/>
+          <p:nvPr/>
+        </p:nvSpPr>
+        <p:spPr>
+          <a:xfrm>
+            <a:off x="9311949" y="4668798"/>
+            <a:ext cx="1017037" cy="545841"/>
+          </a:xfrm>
+          <a:prstGeom prst="rect">
+            <a:avLst/>
+          </a:prstGeom>
+          <a:noFill/>
+          <a:ln w="34925">
+            <a:solidFill>
+              <a:srgbClr val="FF0000"/>
+            </a:solidFill>
+          </a:ln>
+        </p:spPr>
+        <p:style>
+          <a:lnRef idx="2">
+            <a:schemeClr val="accent1">
+              <a:shade val="50000"/>
+            </a:schemeClr>
+          </a:lnRef>
+          <a:fillRef idx="1">
+            <a:schemeClr val="accent1"/>
+          </a:fillRef>
+          <a:effectRef idx="0">
+            <a:schemeClr val="accent1"/>
+          </a:effectRef>
+          <a:fontRef idx="minor">
+            <a:schemeClr val="lt1"/>
+          </a:fontRef>
+        </p:style>
+        <p:txBody>
+          <a:bodyPr rtlCol="0" anchor="ctr"/>
+          <a:lstStyle/>
+          <a:p>
+            <a:pPr algn="ctr"/>
+            <a:endParaRPr lang="fr-FR"/>
+          </a:p>
+        </p:txBody>
+      </p:sp>
+      <p:sp>
+        <p:nvSpPr>
+          <p:cNvPr id="7" name="Rectangle 6">
+            <a:extLst>
+              <a:ext uri="{FF2B5EF4-FFF2-40B4-BE49-F238E27FC236}">
+                <a16:creationId xmlns:a16="http://schemas.microsoft.com/office/drawing/2014/main" id="{F48D5493-489B-4910-A299-5018E23A3B0E}"/>
+              </a:ext>
+            </a:extLst>
+          </p:cNvPr>
+          <p:cNvSpPr/>
+          <p:nvPr/>
+        </p:nvSpPr>
+        <p:spPr>
+          <a:xfrm>
+            <a:off x="10170367" y="1944261"/>
+            <a:ext cx="457198" cy="429208"/>
+          </a:xfrm>
+          <a:prstGeom prst="rect">
+            <a:avLst/>
+          </a:prstGeom>
+          <a:noFill/>
+          <a:ln w="34925">
+            <a:solidFill>
+              <a:srgbClr val="FF0000"/>
+            </a:solidFill>
+          </a:ln>
+        </p:spPr>
+        <p:style>
+          <a:lnRef idx="2">
+            <a:schemeClr val="accent1">
+              <a:shade val="50000"/>
+            </a:schemeClr>
+          </a:lnRef>
+          <a:fillRef idx="1">
+            <a:schemeClr val="accent1"/>
+          </a:fillRef>
+          <a:effectRef idx="0">
+            <a:schemeClr val="accent1"/>
+          </a:effectRef>
+          <a:fontRef idx="minor">
+            <a:schemeClr val="lt1"/>
+          </a:fontRef>
+        </p:style>
+        <p:txBody>
+          <a:bodyPr rtlCol="0" anchor="ctr"/>
+          <a:lstStyle/>
+          <a:p>
+            <a:pPr algn="ctr"/>
+            <a:endParaRPr lang="fr-FR"/>
+          </a:p>
+        </p:txBody>
+      </p:sp>
+      <p:sp>
+        <p:nvSpPr>
+          <p:cNvPr id="9" name="ZoneTexte 8">
+            <a:extLst>
+              <a:ext uri="{FF2B5EF4-FFF2-40B4-BE49-F238E27FC236}">
+                <a16:creationId xmlns:a16="http://schemas.microsoft.com/office/drawing/2014/main" id="{68D8BB61-23CE-4154-AB41-50A1EDDF0740}"/>
+              </a:ext>
+            </a:extLst>
+          </p:cNvPr>
+          <p:cNvSpPr txBox="1"/>
+          <p:nvPr/>
+        </p:nvSpPr>
+        <p:spPr>
+          <a:xfrm>
+            <a:off x="297025" y="2356395"/>
+            <a:ext cx="6097554" cy="2585323"/>
+          </a:xfrm>
+          <a:prstGeom prst="rect">
+            <a:avLst/>
+          </a:prstGeom>
+          <a:noFill/>
+        </p:spPr>
+        <p:txBody>
+          <a:bodyPr wrap="square">
+            <a:spAutoFit/>
+          </a:bodyPr>
+          <a:lstStyle/>
+          <a:p>
+            <a:r>
+              <a:rPr lang="fr-FR" dirty="0"/>
+              <a:t>On PROD clusters, </a:t>
+            </a:r>
+            <a:r>
+              <a:rPr lang="fr-FR" dirty="0" err="1"/>
+              <a:t>eventLogs</a:t>
+            </a:r>
+            <a:r>
+              <a:rPr lang="fr-FR" dirty="0"/>
+              <a:t> Files are </a:t>
+            </a:r>
+            <a:r>
+              <a:rPr lang="fr-FR" dirty="0" err="1"/>
+              <a:t>removed</a:t>
+            </a:r>
+            <a:r>
+              <a:rPr lang="fr-FR" dirty="0"/>
+              <a:t> </a:t>
+            </a:r>
+            <a:r>
+              <a:rPr lang="fr-FR" dirty="0" err="1"/>
+              <a:t>after</a:t>
+            </a:r>
+            <a:r>
+              <a:rPr lang="fr-FR" dirty="0"/>
+              <a:t> ~3days</a:t>
+            </a:r>
+          </a:p>
+          <a:p>
+            <a:r>
+              <a:rPr lang="fr-FR" dirty="0"/>
+              <a:t>(and </a:t>
+            </a:r>
+            <a:r>
+              <a:rPr lang="fr-FR" dirty="0" err="1"/>
+              <a:t>may</a:t>
+            </a:r>
+            <a:r>
+              <a:rPr lang="fr-FR" dirty="0"/>
+              <a:t> </a:t>
+            </a:r>
+            <a:r>
+              <a:rPr lang="fr-FR" dirty="0" err="1"/>
+              <a:t>be</a:t>
+            </a:r>
+            <a:r>
+              <a:rPr lang="fr-FR" dirty="0"/>
+              <a:t> </a:t>
+            </a:r>
+            <a:r>
+              <a:rPr lang="fr-FR" dirty="0" err="1"/>
+              <a:t>rewritten</a:t>
+            </a:r>
+            <a:r>
+              <a:rPr lang="fr-FR" dirty="0"/>
+              <a:t>, by </a:t>
+            </a:r>
+            <a:r>
+              <a:rPr lang="fr-FR" dirty="0" err="1"/>
+              <a:t>purging</a:t>
+            </a:r>
+            <a:r>
+              <a:rPr lang="fr-FR" dirty="0"/>
+              <a:t> </a:t>
+            </a:r>
+            <a:r>
+              <a:rPr lang="fr-FR" dirty="0" err="1"/>
+              <a:t>low-level</a:t>
+            </a:r>
+            <a:r>
+              <a:rPr lang="fr-FR" dirty="0"/>
+              <a:t> « </a:t>
+            </a:r>
+            <a:r>
+              <a:rPr lang="fr-FR" dirty="0" err="1"/>
+              <a:t>Task</a:t>
+            </a:r>
+            <a:r>
+              <a:rPr lang="fr-FR" dirty="0"/>
+              <a:t> » </a:t>
+            </a:r>
+            <a:r>
+              <a:rPr lang="fr-FR" dirty="0" err="1"/>
+              <a:t>events</a:t>
+            </a:r>
+            <a:r>
+              <a:rPr lang="fr-FR" dirty="0"/>
+              <a:t>)</a:t>
+            </a:r>
+          </a:p>
+          <a:p>
+            <a:endParaRPr lang="fr-FR" dirty="0"/>
+          </a:p>
+          <a:p>
+            <a:r>
+              <a:rPr lang="fr-FR" dirty="0"/>
+              <a:t>Download </a:t>
+            </a:r>
+            <a:r>
+              <a:rPr lang="fr-FR" dirty="0" err="1"/>
+              <a:t>them</a:t>
+            </a:r>
+            <a:r>
+              <a:rPr lang="fr-FR" dirty="0"/>
+              <a:t> !! </a:t>
+            </a:r>
+          </a:p>
+          <a:p>
+            <a:pPr marL="285750" indent="-285750">
+              <a:buFont typeface="Symbol" panose="05050102010706020507" pitchFamily="18" charset="2"/>
+              <a:buChar char="Þ"/>
+            </a:pPr>
+            <a:endParaRPr lang="fr-FR" dirty="0"/>
+          </a:p>
+          <a:p>
+            <a:pPr marL="285750" indent="-285750">
+              <a:buFont typeface="Symbol" panose="05050102010706020507" pitchFamily="18" charset="2"/>
+              <a:buChar char="Þ"/>
+            </a:pPr>
+            <a:r>
+              <a:rPr lang="fr-FR" dirty="0"/>
+              <a:t>for </a:t>
+            </a:r>
+            <a:r>
+              <a:rPr lang="fr-FR" dirty="0" err="1"/>
+              <a:t>later</a:t>
+            </a:r>
+            <a:r>
+              <a:rPr lang="fr-FR" dirty="0"/>
+              <a:t> analyses </a:t>
+            </a:r>
+          </a:p>
+          <a:p>
+            <a:endParaRPr lang="fr-FR" dirty="0"/>
+          </a:p>
+          <a:p>
+            <a:pPr marL="285750" indent="-285750">
+              <a:buFont typeface="Symbol" panose="05050102010706020507" pitchFamily="18" charset="2"/>
+              <a:buChar char="Þ"/>
+            </a:pPr>
+            <a:r>
+              <a:rPr lang="fr-FR" dirty="0"/>
+              <a:t>for </a:t>
+            </a:r>
+            <a:r>
+              <a:rPr lang="fr-FR" dirty="0" err="1"/>
+              <a:t>Requesting</a:t>
+            </a:r>
+            <a:r>
+              <a:rPr lang="fr-FR" dirty="0"/>
+              <a:t> Assistance  (no </a:t>
+            </a:r>
+            <a:r>
+              <a:rPr lang="fr-FR" dirty="0" err="1"/>
+              <a:t>credentials</a:t>
+            </a:r>
+            <a:r>
+              <a:rPr lang="fr-FR" dirty="0"/>
+              <a:t> / </a:t>
+            </a:r>
+            <a:r>
+              <a:rPr lang="fr-FR" dirty="0" err="1"/>
+              <a:t>access</a:t>
+            </a:r>
+            <a:r>
+              <a:rPr lang="fr-FR" dirty="0"/>
+              <a:t> </a:t>
+            </a:r>
+            <a:r>
+              <a:rPr lang="fr-FR" dirty="0" err="1"/>
+              <a:t>required</a:t>
+            </a:r>
+            <a:r>
+              <a:rPr lang="fr-FR" dirty="0"/>
+              <a:t>)</a:t>
+            </a:r>
+          </a:p>
+          <a:p>
+            <a:pPr marL="285750" indent="-285750">
+              <a:buFont typeface="Symbol" panose="05050102010706020507" pitchFamily="18" charset="2"/>
+              <a:buChar char="Þ"/>
+            </a:pPr>
+            <a:endParaRPr lang="fr-FR" dirty="0"/>
+          </a:p>
+        </p:txBody>
+      </p:sp>
+    </p:spTree>
+    <p:extLst>
+      <p:ext uri="{BB962C8B-B14F-4D97-AF65-F5344CB8AC3E}">
+        <p14:creationId xmlns:p14="http://schemas.microsoft.com/office/powerpoint/2010/main" val="167527485"/>
+      </p:ext>
+    </p:extLst>
+  </p:cSld>
+  <p:clrMapOvr>
+    <a:masterClrMapping/>
+  </p:clrMapOvr>
+</p:sld>
+</file>
+
+<file path=ppt/slides/slide42.xml><?xml version="1.0" encoding="utf-8"?>
+<p:sld xmlns:a="http://schemas.openxmlformats.org/drawingml/2006/main" xmlns:r="http://schemas.openxmlformats.org/officeDocument/2006/relationships" xmlns:p="http://schemas.openxmlformats.org/presentationml/2006/main">
+  <p:cSld>
+    <p:spTree>
+      <p:nvGrpSpPr>
+        <p:cNvPr id="1" name=""/>
+        <p:cNvGrpSpPr/>
+        <p:nvPr/>
+      </p:nvGrpSpPr>
+      <p:grpSpPr>
+        <a:xfrm>
+          <a:off x="0" y="0"/>
+          <a:ext cx="0" cy="0"/>
+          <a:chOff x="0" y="0"/>
+          <a:chExt cx="0" cy="0"/>
+        </a:xfrm>
+      </p:grpSpPr>
+      <p:sp>
+        <p:nvSpPr>
+          <p:cNvPr id="2" name="Titre 1">
+            <a:extLst>
+              <a:ext uri="{FF2B5EF4-FFF2-40B4-BE49-F238E27FC236}">
+                <a16:creationId xmlns:a16="http://schemas.microsoft.com/office/drawing/2014/main" id="{7447F095-033D-4887-8755-BAD7E0CE7FCA}"/>
+              </a:ext>
+            </a:extLst>
+          </p:cNvPr>
+          <p:cNvSpPr>
+            <a:spLocks noGrp="1"/>
+          </p:cNvSpPr>
+          <p:nvPr>
+            <p:ph type="title"/>
+          </p:nvPr>
+        </p:nvSpPr>
+        <p:spPr>
+          <a:xfrm>
+            <a:off x="838200" y="1"/>
+            <a:ext cx="10515600" cy="1129004"/>
+          </a:xfrm>
+        </p:spPr>
+        <p:txBody>
+          <a:bodyPr/>
+          <a:lstStyle/>
+          <a:p>
+            <a:pPr algn="ctr"/>
+            <a:r>
+              <a:rPr lang="fr-FR" dirty="0"/>
+              <a:t>Spark </a:t>
+            </a:r>
+            <a:r>
+              <a:rPr lang="fr-FR" dirty="0" err="1"/>
+              <a:t>History</a:t>
+            </a:r>
+            <a:r>
+              <a:rPr lang="fr-FR" dirty="0"/>
+              <a:t> Server &amp; Spark UI  Limitations</a:t>
+            </a:r>
+          </a:p>
+        </p:txBody>
+      </p:sp>
+      <p:sp>
+        <p:nvSpPr>
+          <p:cNvPr id="4" name="ZoneTexte 3">
+            <a:extLst>
+              <a:ext uri="{FF2B5EF4-FFF2-40B4-BE49-F238E27FC236}">
+                <a16:creationId xmlns:a16="http://schemas.microsoft.com/office/drawing/2014/main" id="{41637D68-A406-45B2-A901-6525CC0792BC}"/>
+              </a:ext>
+            </a:extLst>
+          </p:cNvPr>
+          <p:cNvSpPr txBox="1"/>
+          <p:nvPr/>
+        </p:nvSpPr>
+        <p:spPr>
+          <a:xfrm>
+            <a:off x="1175657" y="1705383"/>
+            <a:ext cx="10689786" cy="4154984"/>
+          </a:xfrm>
+          <a:prstGeom prst="rect">
+            <a:avLst/>
+          </a:prstGeom>
+          <a:noFill/>
+        </p:spPr>
+        <p:txBody>
+          <a:bodyPr wrap="none" rtlCol="0">
+            <a:spAutoFit/>
+          </a:bodyPr>
+          <a:lstStyle/>
+          <a:p>
+            <a:r>
+              <a:rPr lang="fr-FR" sz="2400" dirty="0" err="1"/>
+              <a:t>SparkHistory</a:t>
+            </a:r>
+            <a:r>
+              <a:rPr lang="fr-FR" sz="2400" dirty="0"/>
+              <a:t> can do </a:t>
+            </a:r>
+            <a:r>
+              <a:rPr lang="fr-FR" sz="2400" dirty="0" err="1"/>
+              <a:t>OutOfMemoryError</a:t>
+            </a:r>
+            <a:r>
+              <a:rPr lang="fr-FR" sz="2400" dirty="0"/>
+              <a:t> </a:t>
+            </a:r>
+            <a:r>
+              <a:rPr lang="fr-FR" sz="2400" dirty="0" err="1"/>
+              <a:t>while</a:t>
+            </a:r>
+            <a:r>
+              <a:rPr lang="fr-FR" sz="2400" dirty="0"/>
+              <a:t> </a:t>
+            </a:r>
+            <a:r>
+              <a:rPr lang="fr-FR" sz="2400" dirty="0" err="1"/>
+              <a:t>reloading</a:t>
+            </a:r>
+            <a:r>
+              <a:rPr lang="fr-FR" sz="2400" dirty="0"/>
+              <a:t> </a:t>
+            </a:r>
+            <a:r>
+              <a:rPr lang="fr-FR" sz="2400" dirty="0" err="1"/>
+              <a:t>huge</a:t>
+            </a:r>
+            <a:r>
+              <a:rPr lang="fr-FR" sz="2400" dirty="0"/>
+              <a:t> </a:t>
+            </a:r>
+            <a:r>
+              <a:rPr lang="fr-FR" sz="2400" dirty="0" err="1"/>
+              <a:t>spark</a:t>
+            </a:r>
+            <a:r>
+              <a:rPr lang="fr-FR" sz="2400" dirty="0"/>
+              <a:t> </a:t>
+            </a:r>
+            <a:r>
+              <a:rPr lang="fr-FR" sz="2400" dirty="0" err="1"/>
+              <a:t>eventLog</a:t>
+            </a:r>
+            <a:r>
+              <a:rPr lang="fr-FR" sz="2400" dirty="0"/>
+              <a:t> files !!</a:t>
+            </a:r>
+          </a:p>
+          <a:p>
+            <a:endParaRPr lang="fr-FR" sz="2400" dirty="0"/>
+          </a:p>
+          <a:p>
+            <a:endParaRPr lang="fr-FR" sz="2400" dirty="0"/>
+          </a:p>
+          <a:p>
+            <a:r>
+              <a:rPr lang="fr-FR" sz="2400" dirty="0" err="1"/>
+              <a:t>Both</a:t>
+            </a:r>
+            <a:r>
+              <a:rPr lang="fr-FR" sz="2400" dirty="0"/>
+              <a:t> </a:t>
+            </a:r>
+            <a:r>
+              <a:rPr lang="fr-FR" sz="2400" dirty="0" err="1"/>
+              <a:t>SparkUI</a:t>
+            </a:r>
+            <a:r>
+              <a:rPr lang="fr-FR" sz="2400" dirty="0"/>
+              <a:t> &amp; Spark </a:t>
+            </a:r>
+            <a:r>
+              <a:rPr lang="fr-FR" sz="2400" dirty="0" err="1"/>
+              <a:t>History</a:t>
+            </a:r>
+            <a:r>
+              <a:rPr lang="fr-FR" sz="2400" dirty="0"/>
+              <a:t> </a:t>
+            </a:r>
+            <a:r>
+              <a:rPr lang="fr-FR" sz="2400" dirty="0" err="1"/>
+              <a:t>produce</a:t>
+            </a:r>
+            <a:r>
+              <a:rPr lang="fr-FR" sz="2400" dirty="0"/>
+              <a:t> </a:t>
+            </a:r>
+            <a:r>
+              <a:rPr lang="fr-FR" sz="2400" dirty="0" err="1"/>
+              <a:t>amazingly</a:t>
+            </a:r>
+            <a:r>
+              <a:rPr lang="fr-FR" sz="2400" dirty="0"/>
+              <a:t> large &amp; </a:t>
+            </a:r>
+            <a:r>
+              <a:rPr lang="fr-FR" sz="2400" dirty="0" err="1"/>
+              <a:t>complex</a:t>
+            </a:r>
+            <a:r>
+              <a:rPr lang="fr-FR" sz="2400" dirty="0"/>
+              <a:t> web pages</a:t>
+            </a:r>
+          </a:p>
+          <a:p>
+            <a:r>
+              <a:rPr lang="fr-FR" sz="2400" dirty="0" err="1"/>
+              <a:t>With</a:t>
+            </a:r>
+            <a:r>
+              <a:rPr lang="fr-FR" sz="2400" dirty="0"/>
+              <a:t> </a:t>
+            </a:r>
+            <a:r>
+              <a:rPr lang="fr-FR" sz="2400" dirty="0" err="1"/>
+              <a:t>tones</a:t>
+            </a:r>
+            <a:r>
+              <a:rPr lang="fr-FR" sz="2400" dirty="0"/>
+              <a:t> of </a:t>
+            </a:r>
+            <a:r>
+              <a:rPr lang="fr-FR" sz="2400" dirty="0" err="1"/>
+              <a:t>arrows</a:t>
+            </a:r>
+            <a:r>
+              <a:rPr lang="fr-FR" sz="2400" dirty="0"/>
+              <a:t> and </a:t>
+            </a:r>
+            <a:r>
+              <a:rPr lang="fr-FR" sz="2400" dirty="0" err="1"/>
+              <a:t>blue</a:t>
+            </a:r>
+            <a:r>
+              <a:rPr lang="fr-FR" sz="2400" dirty="0"/>
+              <a:t> boxes…</a:t>
+            </a:r>
+          </a:p>
+          <a:p>
+            <a:endParaRPr lang="fr-FR" sz="2400" dirty="0"/>
+          </a:p>
+          <a:p>
+            <a:endParaRPr lang="fr-FR" sz="2400" dirty="0"/>
+          </a:p>
+          <a:p>
+            <a:r>
+              <a:rPr lang="fr-FR" sz="2400" dirty="0" err="1"/>
+              <a:t>Keep</a:t>
+            </a:r>
+            <a:r>
+              <a:rPr lang="fr-FR" sz="2400" dirty="0"/>
+              <a:t> </a:t>
+            </a:r>
+            <a:r>
+              <a:rPr lang="fr-FR" sz="2400" dirty="0" err="1"/>
+              <a:t>only</a:t>
+            </a:r>
+            <a:r>
+              <a:rPr lang="fr-FR" sz="2400" dirty="0"/>
+              <a:t> the last 10 000  </a:t>
+            </a:r>
+            <a:r>
+              <a:rPr lang="fr-FR" sz="2400" dirty="0" err="1"/>
+              <a:t>spark</a:t>
+            </a:r>
+            <a:r>
+              <a:rPr lang="fr-FR" sz="2400" dirty="0"/>
+              <a:t> </a:t>
+            </a:r>
+            <a:r>
+              <a:rPr lang="fr-FR" sz="2400" dirty="0" err="1"/>
+              <a:t>events</a:t>
+            </a:r>
+            <a:r>
+              <a:rPr lang="fr-FR" sz="2400" dirty="0"/>
+              <a:t>,  and ignore all </a:t>
+            </a:r>
+            <a:r>
+              <a:rPr lang="fr-FR" sz="2400" dirty="0" err="1"/>
+              <a:t>others</a:t>
+            </a:r>
+            <a:r>
+              <a:rPr lang="fr-FR" sz="2400" dirty="0"/>
+              <a:t> !!</a:t>
+            </a:r>
+          </a:p>
+          <a:p>
+            <a:endParaRPr lang="fr-FR" sz="2400" dirty="0"/>
+          </a:p>
+          <a:p>
+            <a:r>
+              <a:rPr lang="fr-FR" sz="2400" dirty="0"/>
+              <a:t>Impossible to Analyse « offline » a </a:t>
+            </a:r>
+            <a:r>
+              <a:rPr lang="fr-FR" sz="2400" dirty="0" err="1"/>
+              <a:t>very</a:t>
+            </a:r>
+            <a:r>
+              <a:rPr lang="fr-FR" sz="2400" dirty="0"/>
+              <a:t> long-running application</a:t>
+            </a:r>
+          </a:p>
+          <a:p>
+            <a:r>
+              <a:rPr lang="fr-FR" sz="2400" dirty="0"/>
+              <a:t>(</a:t>
+            </a:r>
+            <a:r>
+              <a:rPr lang="fr-FR" sz="2400" dirty="0" err="1"/>
+              <a:t>need</a:t>
+            </a:r>
+            <a:r>
+              <a:rPr lang="fr-FR" sz="2400" dirty="0"/>
+              <a:t> to </a:t>
+            </a:r>
+            <a:r>
+              <a:rPr lang="fr-FR" sz="2400" dirty="0" err="1"/>
+              <a:t>manually</a:t>
+            </a:r>
+            <a:r>
+              <a:rPr lang="fr-FR" sz="2400" dirty="0"/>
+              <a:t> </a:t>
+            </a:r>
+            <a:r>
+              <a:rPr lang="fr-FR" sz="2400" dirty="0" err="1"/>
+              <a:t>uncompress</a:t>
+            </a:r>
+            <a:r>
+              <a:rPr lang="fr-FR" sz="2400" dirty="0"/>
+              <a:t> + prune </a:t>
+            </a:r>
+            <a:r>
+              <a:rPr lang="fr-FR" sz="2400" dirty="0" err="1"/>
+              <a:t>spark</a:t>
+            </a:r>
+            <a:r>
+              <a:rPr lang="fr-FR" sz="2400" dirty="0"/>
+              <a:t> </a:t>
+            </a:r>
+            <a:r>
+              <a:rPr lang="fr-FR" sz="2400" dirty="0" err="1"/>
+              <a:t>events</a:t>
+            </a:r>
+            <a:r>
+              <a:rPr lang="fr-FR" sz="2400" dirty="0"/>
+              <a:t> …)</a:t>
+            </a:r>
+          </a:p>
+        </p:txBody>
+      </p:sp>
+    </p:spTree>
+    <p:extLst>
+      <p:ext uri="{BB962C8B-B14F-4D97-AF65-F5344CB8AC3E}">
+        <p14:creationId xmlns:p14="http://schemas.microsoft.com/office/powerpoint/2010/main" val="431987557"/>
+      </p:ext>
+    </p:extLst>
+  </p:cSld>
+  <p:clrMapOvr>
+    <a:masterClrMapping/>
+  </p:clrMapOvr>
+</p:sld>
+</file>
+
+<file path=ppt/slides/slide43.xml><?xml version="1.0" encoding="utf-8"?>
+<p:sld xmlns:a="http://schemas.openxmlformats.org/drawingml/2006/main" xmlns:r="http://schemas.openxmlformats.org/officeDocument/2006/relationships" xmlns:p="http://schemas.openxmlformats.org/presentationml/2006/main" show="0">
+  <p:cSld>
+    <p:spTree>
+      <p:nvGrpSpPr>
+        <p:cNvPr id="1" name=""/>
+        <p:cNvGrpSpPr/>
+        <p:nvPr/>
+      </p:nvGrpSpPr>
+      <p:grpSpPr>
+        <a:xfrm>
+          <a:off x="0" y="0"/>
+          <a:ext cx="0" cy="0"/>
+          <a:chOff x="0" y="0"/>
+          <a:chExt cx="0" cy="0"/>
+        </a:xfrm>
+      </p:grpSpPr>
+      <p:sp>
+        <p:nvSpPr>
+          <p:cNvPr id="2" name="Title 1">
+            <a:extLst>
+              <a:ext uri="{FF2B5EF4-FFF2-40B4-BE49-F238E27FC236}">
+                <a16:creationId xmlns:a16="http://schemas.microsoft.com/office/drawing/2014/main" id="{472F37BA-A4B2-46FC-948E-D0EF5DF2EC6F}"/>
+              </a:ext>
+            </a:extLst>
+          </p:cNvPr>
+          <p:cNvSpPr>
+            <a:spLocks noGrp="1"/>
+          </p:cNvSpPr>
+          <p:nvPr>
+            <p:ph type="title"/>
+          </p:nvPr>
+        </p:nvSpPr>
+        <p:spPr>
+          <a:xfrm>
+            <a:off x="878840" y="1685925"/>
+            <a:ext cx="10515600" cy="2667635"/>
+          </a:xfrm>
+        </p:spPr>
+        <p:txBody>
+          <a:bodyPr>
+            <a:normAutofit fontScale="90000"/>
+          </a:bodyPr>
+          <a:lstStyle/>
+          <a:p>
+            <a:pPr algn="ctr"/>
+            <a:r>
+              <a:rPr lang="fr-FR" dirty="0"/>
+              <a:t>Architecture Components</a:t>
+            </a:r>
+            <a:br>
+              <a:rPr lang="fr-FR" dirty="0"/>
+            </a:br>
+            <a:br>
+              <a:rPr lang="fr-FR" dirty="0"/>
+            </a:br>
+            <a:r>
+              <a:rPr lang="fr-FR" dirty="0"/>
+              <a:t>Client-Cluster … Driver &amp; </a:t>
+            </a:r>
+            <a:r>
+              <a:rPr lang="fr-FR" dirty="0" err="1"/>
+              <a:t>Executors</a:t>
+            </a:r>
+            <a:br>
+              <a:rPr lang="fr-FR" dirty="0"/>
+            </a:br>
+            <a:br>
+              <a:rPr lang="fr-FR" dirty="0"/>
+            </a:br>
+            <a:r>
+              <a:rPr lang="fr-FR" dirty="0"/>
+              <a:t>program/</a:t>
+            </a:r>
+            <a:r>
+              <a:rPr lang="fr-FR" dirty="0" err="1"/>
+              <a:t>library</a:t>
+            </a:r>
+            <a:r>
+              <a:rPr lang="fr-FR" dirty="0"/>
+              <a:t>/servers</a:t>
+            </a:r>
+          </a:p>
+        </p:txBody>
+      </p:sp>
+    </p:spTree>
+    <p:extLst>
+      <p:ext uri="{BB962C8B-B14F-4D97-AF65-F5344CB8AC3E}">
+        <p14:creationId xmlns:p14="http://schemas.microsoft.com/office/powerpoint/2010/main" val="134856381"/>
+      </p:ext>
+    </p:extLst>
+  </p:cSld>
+  <p:clrMapOvr>
+    <a:masterClrMapping/>
+  </p:clrMapOvr>
+</p:sld>
+</file>
+
+<file path=ppt/slides/slide44.xml><?xml version="1.0" encoding="utf-8"?>
+<p:sld xmlns:a="http://schemas.openxmlformats.org/drawingml/2006/main" xmlns:r="http://schemas.openxmlformats.org/officeDocument/2006/relationships" xmlns:p="http://schemas.openxmlformats.org/presentationml/2006/main" show="0">
+  <p:cSld>
+    <p:spTree>
+      <p:nvGrpSpPr>
+        <p:cNvPr id="1" name=""/>
+        <p:cNvGrpSpPr/>
+        <p:nvPr/>
+      </p:nvGrpSpPr>
+      <p:grpSpPr>
+        <a:xfrm>
+          <a:off x="0" y="0"/>
+          <a:ext cx="0" cy="0"/>
+          <a:chOff x="0" y="0"/>
+          <a:chExt cx="0" cy="0"/>
+        </a:xfrm>
+      </p:grpSpPr>
+      <p:sp>
+        <p:nvSpPr>
+          <p:cNvPr id="2" name="Title 1">
+            <a:extLst>
+              <a:ext uri="{FF2B5EF4-FFF2-40B4-BE49-F238E27FC236}">
+                <a16:creationId xmlns:a16="http://schemas.microsoft.com/office/drawing/2014/main" id="{4FFE38E8-F817-4E8A-87C5-4B2CD68D4F33}"/>
+              </a:ext>
+            </a:extLst>
+          </p:cNvPr>
+          <p:cNvSpPr>
+            <a:spLocks noGrp="1"/>
+          </p:cNvSpPr>
+          <p:nvPr>
+            <p:ph type="title"/>
+          </p:nvPr>
+        </p:nvSpPr>
+        <p:spPr>
+          <a:xfrm>
+            <a:off x="0" y="-118040"/>
+            <a:ext cx="12192000" cy="1325563"/>
+          </a:xfrm>
+        </p:spPr>
+        <p:txBody>
+          <a:bodyPr/>
+          <a:lstStyle/>
+          <a:p>
+            <a:r>
+              <a:rPr lang="fr-FR" dirty="0"/>
+              <a:t>Cluster Client -&gt; Driver (-&gt; </a:t>
+            </a:r>
+            <a:r>
+              <a:rPr lang="fr-FR" dirty="0" err="1"/>
+              <a:t>SparkContext</a:t>
+            </a:r>
+            <a:r>
+              <a:rPr lang="fr-FR" dirty="0"/>
+              <a:t>) -&gt; </a:t>
+            </a:r>
+            <a:r>
+              <a:rPr lang="fr-FR" dirty="0" err="1"/>
+              <a:t>Executor</a:t>
+            </a:r>
+            <a:endParaRPr lang="fr-FR" dirty="0"/>
+          </a:p>
+        </p:txBody>
+      </p:sp>
+      <p:sp>
+        <p:nvSpPr>
+          <p:cNvPr id="4" name="Rectangle 3">
+            <a:extLst>
+              <a:ext uri="{FF2B5EF4-FFF2-40B4-BE49-F238E27FC236}">
+                <a16:creationId xmlns:a16="http://schemas.microsoft.com/office/drawing/2014/main" id="{CFEFCD3C-AAFE-4270-880F-097271C06F4C}"/>
+              </a:ext>
+            </a:extLst>
+          </p:cNvPr>
+          <p:cNvSpPr/>
+          <p:nvPr/>
+        </p:nvSpPr>
+        <p:spPr>
+          <a:xfrm>
+            <a:off x="105205" y="5176125"/>
+            <a:ext cx="2112010" cy="406400"/>
+          </a:xfrm>
+          <a:prstGeom prst="rect">
+            <a:avLst/>
+          </a:prstGeom>
+          <a:noFill/>
+          <a:ln w="25400">
+            <a:solidFill>
+              <a:schemeClr val="accent1">
+                <a:shade val="50000"/>
+              </a:schemeClr>
+            </a:solidFill>
+          </a:ln>
+        </p:spPr>
+        <p:style>
+          <a:lnRef idx="2">
+            <a:schemeClr val="accent1">
+              <a:shade val="50000"/>
+            </a:schemeClr>
+          </a:lnRef>
+          <a:fillRef idx="1">
+            <a:schemeClr val="accent1"/>
+          </a:fillRef>
+          <a:effectRef idx="0">
+            <a:schemeClr val="accent1"/>
+          </a:effectRef>
+          <a:fontRef idx="minor">
+            <a:schemeClr val="lt1"/>
+          </a:fontRef>
+        </p:style>
+        <p:txBody>
+          <a:bodyPr rtlCol="0" anchor="ctr"/>
+          <a:lstStyle/>
+          <a:p>
+            <a:pPr algn="ctr"/>
+            <a:endParaRPr lang="fr-FR"/>
+          </a:p>
+        </p:txBody>
+      </p:sp>
+      <p:sp>
+        <p:nvSpPr>
+          <p:cNvPr id="5" name="TextBox 4">
+            <a:extLst>
+              <a:ext uri="{FF2B5EF4-FFF2-40B4-BE49-F238E27FC236}">
+                <a16:creationId xmlns:a16="http://schemas.microsoft.com/office/drawing/2014/main" id="{5F5BF260-79AA-45F1-9048-E1A834BD7948}"/>
+              </a:ext>
+            </a:extLst>
+          </p:cNvPr>
+          <p:cNvSpPr txBox="1"/>
+          <p:nvPr/>
+        </p:nvSpPr>
+        <p:spPr>
+          <a:xfrm>
+            <a:off x="3837464" y="4418360"/>
+            <a:ext cx="2542300" cy="646331"/>
+          </a:xfrm>
+          <a:prstGeom prst="rect">
+            <a:avLst/>
+          </a:prstGeom>
+          <a:noFill/>
+        </p:spPr>
+        <p:txBody>
+          <a:bodyPr wrap="square" rtlCol="0">
+            <a:spAutoFit/>
+          </a:bodyPr>
+          <a:lstStyle/>
+          <a:p>
+            <a:r>
+              <a:rPr lang="fr-FR" dirty="0"/>
+              <a:t>OS </a:t>
+            </a:r>
+            <a:r>
+              <a:rPr lang="fr-FR" dirty="0" err="1"/>
+              <a:t>WorkerNode</a:t>
+            </a:r>
+            <a:endParaRPr lang="fr-FR" dirty="0"/>
+          </a:p>
+          <a:p>
+            <a:r>
+              <a:rPr lang="fr-FR" dirty="0"/>
+              <a:t>( + </a:t>
+            </a:r>
+            <a:r>
+              <a:rPr lang="fr-FR" dirty="0" err="1"/>
+              <a:t>YarnNodeManager</a:t>
+            </a:r>
+            <a:r>
+              <a:rPr lang="fr-FR" dirty="0"/>
+              <a:t>)</a:t>
+            </a:r>
+          </a:p>
+        </p:txBody>
+      </p:sp>
+      <p:sp>
+        <p:nvSpPr>
+          <p:cNvPr id="9" name="TextBox 8">
+            <a:extLst>
+              <a:ext uri="{FF2B5EF4-FFF2-40B4-BE49-F238E27FC236}">
+                <a16:creationId xmlns:a16="http://schemas.microsoft.com/office/drawing/2014/main" id="{965F2946-7BD7-4140-9BD3-D80231C1C828}"/>
+              </a:ext>
+            </a:extLst>
+          </p:cNvPr>
+          <p:cNvSpPr txBox="1"/>
+          <p:nvPr/>
+        </p:nvSpPr>
+        <p:spPr>
+          <a:xfrm>
+            <a:off x="667815" y="5176125"/>
+            <a:ext cx="442750" cy="369332"/>
+          </a:xfrm>
+          <a:prstGeom prst="rect">
+            <a:avLst/>
+          </a:prstGeom>
+          <a:noFill/>
+        </p:spPr>
+        <p:txBody>
+          <a:bodyPr wrap="none" rtlCol="0">
+            <a:spAutoFit/>
+          </a:bodyPr>
+          <a:lstStyle/>
+          <a:p>
+            <a:r>
+              <a:rPr lang="fr-FR" dirty="0"/>
+              <a:t>OS</a:t>
+            </a:r>
+          </a:p>
+        </p:txBody>
+      </p:sp>
+      <p:sp>
+        <p:nvSpPr>
+          <p:cNvPr id="11" name="Rectangle 10">
+            <a:extLst>
+              <a:ext uri="{FF2B5EF4-FFF2-40B4-BE49-F238E27FC236}">
+                <a16:creationId xmlns:a16="http://schemas.microsoft.com/office/drawing/2014/main" id="{B7D3F584-137C-4FF7-8374-3B67BE117CA5}"/>
+              </a:ext>
+            </a:extLst>
+          </p:cNvPr>
+          <p:cNvSpPr/>
+          <p:nvPr/>
+        </p:nvSpPr>
+        <p:spPr>
+          <a:xfrm>
+            <a:off x="313485" y="4032223"/>
+            <a:ext cx="1781810" cy="1000918"/>
+          </a:xfrm>
+          <a:prstGeom prst="rect">
+            <a:avLst/>
+          </a:prstGeom>
+        </p:spPr>
+        <p:style>
+          <a:lnRef idx="2">
+            <a:schemeClr val="accent1">
+              <a:shade val="50000"/>
+            </a:schemeClr>
+          </a:lnRef>
+          <a:fillRef idx="1">
+            <a:schemeClr val="accent1"/>
+          </a:fillRef>
+          <a:effectRef idx="0">
+            <a:schemeClr val="accent1"/>
+          </a:effectRef>
+          <a:fontRef idx="minor">
+            <a:schemeClr val="lt1"/>
+          </a:fontRef>
+        </p:style>
+        <p:txBody>
+          <a:bodyPr rtlCol="0" anchor="ctr"/>
+          <a:lstStyle/>
+          <a:p>
+            <a:pPr algn="ctr"/>
+            <a:endParaRPr lang="fr-FR"/>
+          </a:p>
+        </p:txBody>
+      </p:sp>
+      <p:sp>
+        <p:nvSpPr>
+          <p:cNvPr id="10" name="TextBox 9">
+            <a:extLst>
+              <a:ext uri="{FF2B5EF4-FFF2-40B4-BE49-F238E27FC236}">
+                <a16:creationId xmlns:a16="http://schemas.microsoft.com/office/drawing/2014/main" id="{FE2C648D-F9E4-46AE-8FDE-F17FF7E3246F}"/>
+              </a:ext>
+            </a:extLst>
+          </p:cNvPr>
+          <p:cNvSpPr txBox="1"/>
+          <p:nvPr/>
+        </p:nvSpPr>
+        <p:spPr>
+          <a:xfrm>
+            <a:off x="313485" y="4069291"/>
+            <a:ext cx="1854162" cy="923330"/>
+          </a:xfrm>
+          <a:prstGeom prst="rect">
+            <a:avLst/>
+          </a:prstGeom>
+          <a:noFill/>
+        </p:spPr>
+        <p:txBody>
+          <a:bodyPr wrap="none" rtlCol="0">
+            <a:spAutoFit/>
+          </a:bodyPr>
+          <a:lstStyle/>
+          <a:p>
+            <a:r>
+              <a:rPr lang="fr-FR" dirty="0"/>
+              <a:t>Java </a:t>
+            </a:r>
+            <a:r>
+              <a:rPr lang="fr-FR" dirty="0" err="1"/>
+              <a:t>spark-submit</a:t>
+            </a:r>
+            <a:endParaRPr lang="fr-FR" dirty="0"/>
+          </a:p>
+          <a:p>
+            <a:r>
+              <a:rPr lang="fr-FR" dirty="0"/>
+              <a:t>  -master </a:t>
+            </a:r>
+            <a:r>
+              <a:rPr lang="fr-FR" dirty="0" err="1"/>
+              <a:t>yarn</a:t>
+            </a:r>
+            <a:br>
+              <a:rPr lang="fr-FR" dirty="0"/>
+            </a:br>
+            <a:r>
+              <a:rPr lang="fr-FR" dirty="0"/>
+              <a:t>   -mode cluster</a:t>
+            </a:r>
+          </a:p>
+        </p:txBody>
+      </p:sp>
+      <p:sp>
+        <p:nvSpPr>
+          <p:cNvPr id="12" name="Arrow: Curved Down 11">
+            <a:extLst>
+              <a:ext uri="{FF2B5EF4-FFF2-40B4-BE49-F238E27FC236}">
+                <a16:creationId xmlns:a16="http://schemas.microsoft.com/office/drawing/2014/main" id="{C3C4D66E-E21B-43A4-A714-D5B4327E9F32}"/>
+              </a:ext>
+            </a:extLst>
+          </p:cNvPr>
+          <p:cNvSpPr/>
+          <p:nvPr/>
+        </p:nvSpPr>
+        <p:spPr>
+          <a:xfrm>
+            <a:off x="2368187" y="4474388"/>
+            <a:ext cx="1254760" cy="391002"/>
+          </a:xfrm>
+          <a:prstGeom prst="curvedDownArrow">
+            <a:avLst/>
+          </a:prstGeom>
+        </p:spPr>
+        <p:style>
+          <a:lnRef idx="2">
+            <a:schemeClr val="accent1">
+              <a:shade val="50000"/>
+            </a:schemeClr>
+          </a:lnRef>
+          <a:fillRef idx="1">
+            <a:schemeClr val="accent1"/>
+          </a:fillRef>
+          <a:effectRef idx="0">
+            <a:schemeClr val="accent1"/>
+          </a:effectRef>
+          <a:fontRef idx="minor">
+            <a:schemeClr val="lt1"/>
+          </a:fontRef>
+        </p:style>
+        <p:txBody>
+          <a:bodyPr rtlCol="0" anchor="ctr"/>
+          <a:lstStyle/>
+          <a:p>
+            <a:pPr algn="ctr"/>
+            <a:endParaRPr lang="fr-FR">
+              <a:solidFill>
+                <a:schemeClr val="tx1"/>
+              </a:solidFill>
+            </a:endParaRPr>
+          </a:p>
+        </p:txBody>
+      </p:sp>
+      <p:sp>
+        <p:nvSpPr>
+          <p:cNvPr id="13" name="TextBox 12">
+            <a:extLst>
+              <a:ext uri="{FF2B5EF4-FFF2-40B4-BE49-F238E27FC236}">
+                <a16:creationId xmlns:a16="http://schemas.microsoft.com/office/drawing/2014/main" id="{E1F9DA26-A1C2-49C9-A5F2-5608E531DCD5}"/>
+              </a:ext>
+            </a:extLst>
+          </p:cNvPr>
+          <p:cNvSpPr txBox="1"/>
+          <p:nvPr/>
+        </p:nvSpPr>
+        <p:spPr>
+          <a:xfrm>
+            <a:off x="111930" y="3067256"/>
+            <a:ext cx="3237105" cy="923330"/>
+          </a:xfrm>
+          <a:prstGeom prst="rect">
+            <a:avLst/>
+          </a:prstGeom>
+          <a:noFill/>
+        </p:spPr>
+        <p:txBody>
+          <a:bodyPr wrap="none" rtlCol="0">
+            <a:spAutoFit/>
+          </a:bodyPr>
+          <a:lstStyle/>
+          <a:p>
+            <a:r>
+              <a:rPr lang="fr-FR" b="1" dirty="0"/>
+              <a:t>Case 3</a:t>
+            </a:r>
+            <a:r>
+              <a:rPr lang="fr-FR" dirty="0"/>
+              <a:t>/ </a:t>
+            </a:r>
+          </a:p>
+          <a:p>
+            <a:r>
+              <a:rPr lang="fr-FR" dirty="0" err="1"/>
+              <a:t>Yarn</a:t>
+            </a:r>
+            <a:r>
+              <a:rPr lang="fr-FR" dirty="0"/>
+              <a:t> launch </a:t>
+            </a:r>
+            <a:r>
+              <a:rPr lang="fr-FR" dirty="0" err="1"/>
+              <a:t>spark</a:t>
+            </a:r>
+            <a:r>
+              <a:rPr lang="fr-FR" dirty="0"/>
+              <a:t> –mode </a:t>
+            </a:r>
+            <a:r>
+              <a:rPr lang="fr-FR" b="1" dirty="0"/>
+              <a:t>cluster</a:t>
+            </a:r>
+          </a:p>
+          <a:p>
+            <a:r>
+              <a:rPr lang="fr-FR" dirty="0"/>
+              <a:t>+ </a:t>
+            </a:r>
+            <a:r>
+              <a:rPr lang="fr-FR" dirty="0" err="1"/>
+              <a:t>relaunch</a:t>
+            </a:r>
+            <a:r>
+              <a:rPr lang="fr-FR" dirty="0"/>
+              <a:t> if </a:t>
+            </a:r>
+            <a:r>
+              <a:rPr lang="fr-FR" dirty="0" err="1"/>
+              <a:t>failed</a:t>
+            </a:r>
+            <a:endParaRPr lang="fr-FR" dirty="0"/>
+          </a:p>
+        </p:txBody>
+      </p:sp>
+      <p:sp>
+        <p:nvSpPr>
+          <p:cNvPr id="15" name="Rectangle 14">
+            <a:extLst>
+              <a:ext uri="{FF2B5EF4-FFF2-40B4-BE49-F238E27FC236}">
+                <a16:creationId xmlns:a16="http://schemas.microsoft.com/office/drawing/2014/main" id="{BEE731C0-40EE-4361-BF2A-E831E6A7818D}"/>
+              </a:ext>
+            </a:extLst>
+          </p:cNvPr>
+          <p:cNvSpPr/>
+          <p:nvPr/>
+        </p:nvSpPr>
+        <p:spPr>
+          <a:xfrm>
+            <a:off x="4105459" y="1994021"/>
+            <a:ext cx="2645862" cy="2312579"/>
+          </a:xfrm>
+          <a:prstGeom prst="rect">
+            <a:avLst/>
+          </a:prstGeom>
+        </p:spPr>
+        <p:style>
+          <a:lnRef idx="2">
+            <a:schemeClr val="accent1">
+              <a:shade val="50000"/>
+            </a:schemeClr>
+          </a:lnRef>
+          <a:fillRef idx="1">
+            <a:schemeClr val="accent1"/>
+          </a:fillRef>
+          <a:effectRef idx="0">
+            <a:schemeClr val="accent1"/>
+          </a:effectRef>
+          <a:fontRef idx="minor">
+            <a:schemeClr val="lt1"/>
+          </a:fontRef>
+        </p:style>
+        <p:txBody>
+          <a:bodyPr rtlCol="0" anchor="ctr"/>
+          <a:lstStyle/>
+          <a:p>
+            <a:pPr algn="ctr"/>
+            <a:endParaRPr lang="fr-FR"/>
+          </a:p>
+        </p:txBody>
+      </p:sp>
+      <p:sp>
+        <p:nvSpPr>
+          <p:cNvPr id="16" name="TextBox 15">
+            <a:extLst>
+              <a:ext uri="{FF2B5EF4-FFF2-40B4-BE49-F238E27FC236}">
+                <a16:creationId xmlns:a16="http://schemas.microsoft.com/office/drawing/2014/main" id="{37C3DBF3-D775-42C6-AFB1-A3F59BA08400}"/>
+              </a:ext>
+            </a:extLst>
+          </p:cNvPr>
+          <p:cNvSpPr txBox="1"/>
+          <p:nvPr/>
+        </p:nvSpPr>
+        <p:spPr>
+          <a:xfrm>
+            <a:off x="4093210" y="1931187"/>
+            <a:ext cx="1854162" cy="923330"/>
+          </a:xfrm>
+          <a:prstGeom prst="rect">
+            <a:avLst/>
+          </a:prstGeom>
+          <a:noFill/>
+        </p:spPr>
+        <p:txBody>
+          <a:bodyPr wrap="none" rtlCol="0">
+            <a:spAutoFit/>
+          </a:bodyPr>
+          <a:lstStyle/>
+          <a:p>
+            <a:r>
+              <a:rPr lang="fr-FR" dirty="0"/>
+              <a:t>Java </a:t>
+            </a:r>
+            <a:r>
+              <a:rPr lang="fr-FR" dirty="0" err="1"/>
+              <a:t>spark-submit</a:t>
+            </a:r>
+            <a:endParaRPr lang="fr-FR" dirty="0"/>
+          </a:p>
+          <a:p>
+            <a:r>
+              <a:rPr lang="fr-FR" dirty="0"/>
+              <a:t>  -master </a:t>
+            </a:r>
+            <a:r>
+              <a:rPr lang="fr-FR" dirty="0" err="1"/>
+              <a:t>yarn</a:t>
+            </a:r>
+            <a:br>
+              <a:rPr lang="fr-FR" dirty="0"/>
+            </a:br>
+            <a:r>
+              <a:rPr lang="fr-FR" dirty="0"/>
+              <a:t>   -mode client</a:t>
+            </a:r>
+          </a:p>
+        </p:txBody>
+      </p:sp>
+      <p:sp>
+        <p:nvSpPr>
+          <p:cNvPr id="17" name="Rectangle 16">
+            <a:extLst>
+              <a:ext uri="{FF2B5EF4-FFF2-40B4-BE49-F238E27FC236}">
+                <a16:creationId xmlns:a16="http://schemas.microsoft.com/office/drawing/2014/main" id="{4EC04A1E-F075-4714-96F3-D99E53E91A5B}"/>
+              </a:ext>
+            </a:extLst>
+          </p:cNvPr>
+          <p:cNvSpPr/>
+          <p:nvPr/>
+        </p:nvSpPr>
+        <p:spPr>
+          <a:xfrm>
+            <a:off x="3784599" y="4418360"/>
+            <a:ext cx="2870202" cy="664864"/>
+          </a:xfrm>
+          <a:prstGeom prst="rect">
+            <a:avLst/>
+          </a:prstGeom>
+          <a:noFill/>
+          <a:ln w="25400">
+            <a:solidFill>
+              <a:schemeClr val="accent1">
+                <a:shade val="50000"/>
+              </a:schemeClr>
+            </a:solidFill>
+          </a:ln>
+        </p:spPr>
+        <p:style>
+          <a:lnRef idx="2">
+            <a:schemeClr val="accent1">
+              <a:shade val="50000"/>
+            </a:schemeClr>
+          </a:lnRef>
+          <a:fillRef idx="1">
+            <a:schemeClr val="accent1"/>
+          </a:fillRef>
+          <a:effectRef idx="0">
+            <a:schemeClr val="accent1"/>
+          </a:effectRef>
+          <a:fontRef idx="minor">
+            <a:schemeClr val="lt1"/>
+          </a:fontRef>
+        </p:style>
+        <p:txBody>
+          <a:bodyPr rtlCol="0" anchor="ctr"/>
+          <a:lstStyle/>
+          <a:p>
+            <a:pPr algn="ctr"/>
+            <a:endParaRPr lang="fr-FR"/>
+          </a:p>
+        </p:txBody>
+      </p:sp>
+      <p:sp>
+        <p:nvSpPr>
+          <p:cNvPr id="19" name="TextBox 18">
+            <a:extLst>
+              <a:ext uri="{FF2B5EF4-FFF2-40B4-BE49-F238E27FC236}">
+                <a16:creationId xmlns:a16="http://schemas.microsoft.com/office/drawing/2014/main" id="{9F0E91F7-E956-493A-8239-23D504C1ED44}"/>
+              </a:ext>
+            </a:extLst>
+          </p:cNvPr>
+          <p:cNvSpPr txBox="1"/>
+          <p:nvPr/>
+        </p:nvSpPr>
+        <p:spPr>
+          <a:xfrm>
+            <a:off x="8254536" y="6037263"/>
+            <a:ext cx="2542300" cy="646331"/>
+          </a:xfrm>
+          <a:prstGeom prst="rect">
+            <a:avLst/>
+          </a:prstGeom>
+          <a:noFill/>
+        </p:spPr>
+        <p:txBody>
+          <a:bodyPr wrap="square" rtlCol="0">
+            <a:spAutoFit/>
+          </a:bodyPr>
+          <a:lstStyle/>
+          <a:p>
+            <a:r>
+              <a:rPr lang="fr-FR" dirty="0"/>
+              <a:t>OS </a:t>
+            </a:r>
+            <a:r>
+              <a:rPr lang="fr-FR" dirty="0" err="1"/>
+              <a:t>WorkerNode</a:t>
+            </a:r>
+            <a:endParaRPr lang="fr-FR" dirty="0"/>
+          </a:p>
+          <a:p>
+            <a:r>
+              <a:rPr lang="fr-FR" dirty="0"/>
+              <a:t>( + </a:t>
+            </a:r>
+            <a:r>
+              <a:rPr lang="fr-FR" dirty="0" err="1"/>
+              <a:t>YarnNodeManager</a:t>
+            </a:r>
+            <a:r>
+              <a:rPr lang="fr-FR" dirty="0"/>
+              <a:t>)</a:t>
+            </a:r>
+          </a:p>
+        </p:txBody>
+      </p:sp>
+      <p:sp>
+        <p:nvSpPr>
+          <p:cNvPr id="20" name="Rectangle 19">
+            <a:extLst>
+              <a:ext uri="{FF2B5EF4-FFF2-40B4-BE49-F238E27FC236}">
+                <a16:creationId xmlns:a16="http://schemas.microsoft.com/office/drawing/2014/main" id="{9D4CEC5C-878F-468F-9DF6-366EE1AC7C0A}"/>
+              </a:ext>
+            </a:extLst>
+          </p:cNvPr>
+          <p:cNvSpPr/>
+          <p:nvPr/>
+        </p:nvSpPr>
+        <p:spPr>
+          <a:xfrm>
+            <a:off x="8169445" y="6018730"/>
+            <a:ext cx="2870202" cy="664864"/>
+          </a:xfrm>
+          <a:prstGeom prst="rect">
+            <a:avLst/>
+          </a:prstGeom>
+          <a:noFill/>
+          <a:ln w="25400">
+            <a:solidFill>
+              <a:schemeClr val="accent1">
+                <a:shade val="50000"/>
+              </a:schemeClr>
+            </a:solidFill>
+          </a:ln>
+        </p:spPr>
+        <p:style>
+          <a:lnRef idx="2">
+            <a:schemeClr val="accent1">
+              <a:shade val="50000"/>
+            </a:schemeClr>
+          </a:lnRef>
+          <a:fillRef idx="1">
+            <a:schemeClr val="accent1"/>
+          </a:fillRef>
+          <a:effectRef idx="0">
+            <a:schemeClr val="accent1"/>
+          </a:effectRef>
+          <a:fontRef idx="minor">
+            <a:schemeClr val="lt1"/>
+          </a:fontRef>
+        </p:style>
+        <p:txBody>
+          <a:bodyPr rtlCol="0" anchor="ctr"/>
+          <a:lstStyle/>
+          <a:p>
+            <a:pPr algn="ctr"/>
+            <a:endParaRPr lang="fr-FR"/>
+          </a:p>
+        </p:txBody>
+      </p:sp>
+      <p:sp>
+        <p:nvSpPr>
+          <p:cNvPr id="23" name="TextBox 22">
+            <a:extLst>
+              <a:ext uri="{FF2B5EF4-FFF2-40B4-BE49-F238E27FC236}">
+                <a16:creationId xmlns:a16="http://schemas.microsoft.com/office/drawing/2014/main" id="{E26BF7DA-46FE-4DF8-9962-3C8065136574}"/>
+              </a:ext>
+            </a:extLst>
+          </p:cNvPr>
+          <p:cNvSpPr txBox="1"/>
+          <p:nvPr/>
+        </p:nvSpPr>
+        <p:spPr>
+          <a:xfrm>
+            <a:off x="8287540" y="3265219"/>
+            <a:ext cx="2542300" cy="646331"/>
+          </a:xfrm>
+          <a:prstGeom prst="rect">
+            <a:avLst/>
+          </a:prstGeom>
+          <a:noFill/>
+        </p:spPr>
+        <p:txBody>
+          <a:bodyPr wrap="square" rtlCol="0">
+            <a:spAutoFit/>
+          </a:bodyPr>
+          <a:lstStyle/>
+          <a:p>
+            <a:r>
+              <a:rPr lang="fr-FR" dirty="0"/>
+              <a:t>OS </a:t>
+            </a:r>
+            <a:r>
+              <a:rPr lang="fr-FR" dirty="0" err="1"/>
+              <a:t>WorkerNode</a:t>
+            </a:r>
+            <a:endParaRPr lang="fr-FR" dirty="0"/>
+          </a:p>
+          <a:p>
+            <a:r>
+              <a:rPr lang="fr-FR" dirty="0"/>
+              <a:t>( + </a:t>
+            </a:r>
+            <a:r>
+              <a:rPr lang="fr-FR" dirty="0" err="1"/>
+              <a:t>YarnNodeManager</a:t>
+            </a:r>
+            <a:r>
+              <a:rPr lang="fr-FR" dirty="0"/>
+              <a:t>)</a:t>
+            </a:r>
+          </a:p>
+        </p:txBody>
+      </p:sp>
+      <p:sp>
+        <p:nvSpPr>
+          <p:cNvPr id="24" name="Rectangle 23">
+            <a:extLst>
+              <a:ext uri="{FF2B5EF4-FFF2-40B4-BE49-F238E27FC236}">
+                <a16:creationId xmlns:a16="http://schemas.microsoft.com/office/drawing/2014/main" id="{EB96970E-38EA-4BAB-8890-A26E3BCE5F70}"/>
+              </a:ext>
+            </a:extLst>
+          </p:cNvPr>
+          <p:cNvSpPr/>
+          <p:nvPr/>
+        </p:nvSpPr>
+        <p:spPr>
+          <a:xfrm>
+            <a:off x="8202449" y="3246686"/>
+            <a:ext cx="2870202" cy="664864"/>
+          </a:xfrm>
+          <a:prstGeom prst="rect">
+            <a:avLst/>
+          </a:prstGeom>
+          <a:noFill/>
+          <a:ln w="25400">
+            <a:solidFill>
+              <a:schemeClr val="accent1">
+                <a:shade val="50000"/>
+              </a:schemeClr>
+            </a:solidFill>
+          </a:ln>
+        </p:spPr>
+        <p:style>
+          <a:lnRef idx="2">
+            <a:schemeClr val="accent1">
+              <a:shade val="50000"/>
+            </a:schemeClr>
+          </a:lnRef>
+          <a:fillRef idx="1">
+            <a:schemeClr val="accent1"/>
+          </a:fillRef>
+          <a:effectRef idx="0">
+            <a:schemeClr val="accent1"/>
+          </a:effectRef>
+          <a:fontRef idx="minor">
+            <a:schemeClr val="lt1"/>
+          </a:fontRef>
+        </p:style>
+        <p:txBody>
+          <a:bodyPr rtlCol="0" anchor="ctr"/>
+          <a:lstStyle/>
+          <a:p>
+            <a:pPr algn="ctr"/>
+            <a:endParaRPr lang="fr-FR"/>
+          </a:p>
+        </p:txBody>
+      </p:sp>
+      <p:sp>
+        <p:nvSpPr>
+          <p:cNvPr id="25" name="Rectangle 24">
+            <a:extLst>
+              <a:ext uri="{FF2B5EF4-FFF2-40B4-BE49-F238E27FC236}">
+                <a16:creationId xmlns:a16="http://schemas.microsoft.com/office/drawing/2014/main" id="{BECF9066-FB34-4814-8725-5EDAF63511F1}"/>
+              </a:ext>
+            </a:extLst>
+          </p:cNvPr>
+          <p:cNvSpPr/>
+          <p:nvPr/>
+        </p:nvSpPr>
+        <p:spPr>
+          <a:xfrm>
+            <a:off x="8436780" y="1795821"/>
+            <a:ext cx="2511622" cy="1403313"/>
+          </a:xfrm>
+          <a:prstGeom prst="rect">
+            <a:avLst/>
+          </a:prstGeom>
+        </p:spPr>
+        <p:style>
+          <a:lnRef idx="2">
+            <a:schemeClr val="accent1">
+              <a:shade val="50000"/>
+            </a:schemeClr>
+          </a:lnRef>
+          <a:fillRef idx="1">
+            <a:schemeClr val="accent1"/>
+          </a:fillRef>
+          <a:effectRef idx="0">
+            <a:schemeClr val="accent1"/>
+          </a:effectRef>
+          <a:fontRef idx="minor">
+            <a:schemeClr val="lt1"/>
+          </a:fontRef>
+        </p:style>
+        <p:txBody>
+          <a:bodyPr rtlCol="0" anchor="ctr"/>
+          <a:lstStyle/>
+          <a:p>
+            <a:pPr algn="ctr"/>
+            <a:endParaRPr lang="fr-FR"/>
+          </a:p>
+        </p:txBody>
+      </p:sp>
+      <p:sp>
+        <p:nvSpPr>
+          <p:cNvPr id="27" name="Rectangle 26">
+            <a:extLst>
+              <a:ext uri="{FF2B5EF4-FFF2-40B4-BE49-F238E27FC236}">
+                <a16:creationId xmlns:a16="http://schemas.microsoft.com/office/drawing/2014/main" id="{B6A02087-4E98-45D8-8B00-77A3759B8CCE}"/>
+              </a:ext>
+            </a:extLst>
+          </p:cNvPr>
+          <p:cNvSpPr/>
+          <p:nvPr/>
+        </p:nvSpPr>
+        <p:spPr>
+          <a:xfrm>
+            <a:off x="4271552" y="2822928"/>
+            <a:ext cx="1852927" cy="1337592"/>
+          </a:xfrm>
+          <a:prstGeom prst="rect">
+            <a:avLst/>
+          </a:prstGeom>
+          <a:noFill/>
+          <a:ln w="25400">
+            <a:solidFill>
+              <a:schemeClr val="accent1">
+                <a:shade val="50000"/>
+              </a:schemeClr>
+            </a:solidFill>
+          </a:ln>
+        </p:spPr>
+        <p:style>
+          <a:lnRef idx="2">
+            <a:schemeClr val="accent1">
+              <a:shade val="50000"/>
+            </a:schemeClr>
+          </a:lnRef>
+          <a:fillRef idx="1">
+            <a:schemeClr val="accent1"/>
+          </a:fillRef>
+          <a:effectRef idx="0">
+            <a:schemeClr val="accent1"/>
+          </a:effectRef>
+          <a:fontRef idx="minor">
+            <a:schemeClr val="lt1"/>
+          </a:fontRef>
+        </p:style>
+        <p:txBody>
+          <a:bodyPr rtlCol="0" anchor="ctr"/>
+          <a:lstStyle/>
+          <a:p>
+            <a:pPr algn="ctr"/>
+            <a:endParaRPr lang="fr-FR"/>
+          </a:p>
+        </p:txBody>
+      </p:sp>
+      <p:sp>
+        <p:nvSpPr>
+          <p:cNvPr id="14" name="TextBox 13">
+            <a:extLst>
+              <a:ext uri="{FF2B5EF4-FFF2-40B4-BE49-F238E27FC236}">
+                <a16:creationId xmlns:a16="http://schemas.microsoft.com/office/drawing/2014/main" id="{1BC7EAAA-8160-488C-BC60-E3B718C59543}"/>
+              </a:ext>
+            </a:extLst>
+          </p:cNvPr>
+          <p:cNvSpPr txBox="1"/>
+          <p:nvPr/>
+        </p:nvSpPr>
+        <p:spPr>
+          <a:xfrm>
+            <a:off x="4337570" y="2813650"/>
+            <a:ext cx="1435649" cy="369332"/>
+          </a:xfrm>
+          <a:prstGeom prst="rect">
+            <a:avLst/>
+          </a:prstGeom>
+          <a:noFill/>
+        </p:spPr>
+        <p:txBody>
+          <a:bodyPr wrap="none" rtlCol="0">
+            <a:spAutoFit/>
+          </a:bodyPr>
+          <a:lstStyle/>
+          <a:p>
+            <a:r>
+              <a:rPr lang="fr-FR" dirty="0" err="1"/>
+              <a:t>SparkContext</a:t>
+            </a:r>
+            <a:endParaRPr lang="fr-FR" dirty="0"/>
+          </a:p>
+        </p:txBody>
+      </p:sp>
+      <p:sp>
+        <p:nvSpPr>
+          <p:cNvPr id="31" name="Rectangle 30">
+            <a:extLst>
+              <a:ext uri="{FF2B5EF4-FFF2-40B4-BE49-F238E27FC236}">
+                <a16:creationId xmlns:a16="http://schemas.microsoft.com/office/drawing/2014/main" id="{2C57B120-F5A6-43ED-AE7E-D35504036E0D}"/>
+              </a:ext>
+            </a:extLst>
+          </p:cNvPr>
+          <p:cNvSpPr/>
+          <p:nvPr/>
+        </p:nvSpPr>
+        <p:spPr>
+          <a:xfrm>
+            <a:off x="4320378" y="3389158"/>
+            <a:ext cx="1349267" cy="490665"/>
+          </a:xfrm>
+          <a:prstGeom prst="rect">
+            <a:avLst/>
+          </a:prstGeom>
+          <a:solidFill>
+            <a:schemeClr val="accent1">
+              <a:lumMod val="40000"/>
+              <a:lumOff val="60000"/>
+            </a:schemeClr>
+          </a:solidFill>
+          <a:ln w="25400">
+            <a:solidFill>
+              <a:schemeClr val="accent1">
+                <a:shade val="50000"/>
+              </a:schemeClr>
+            </a:solidFill>
+          </a:ln>
+        </p:spPr>
+        <p:style>
+          <a:lnRef idx="2">
+            <a:schemeClr val="accent1">
+              <a:shade val="50000"/>
+            </a:schemeClr>
+          </a:lnRef>
+          <a:fillRef idx="1">
+            <a:schemeClr val="accent1"/>
+          </a:fillRef>
+          <a:effectRef idx="0">
+            <a:schemeClr val="accent1"/>
+          </a:effectRef>
+          <a:fontRef idx="minor">
+            <a:schemeClr val="lt1"/>
+          </a:fontRef>
+        </p:style>
+        <p:txBody>
+          <a:bodyPr rtlCol="0" anchor="ctr"/>
+          <a:lstStyle/>
+          <a:p>
+            <a:pPr algn="ctr"/>
+            <a:endParaRPr lang="fr-FR"/>
+          </a:p>
+        </p:txBody>
+      </p:sp>
+      <p:sp>
+        <p:nvSpPr>
+          <p:cNvPr id="32" name="Rectangle 31">
+            <a:extLst>
+              <a:ext uri="{FF2B5EF4-FFF2-40B4-BE49-F238E27FC236}">
+                <a16:creationId xmlns:a16="http://schemas.microsoft.com/office/drawing/2014/main" id="{AD66F58A-6443-48C6-800A-80BB42CAE590}"/>
+              </a:ext>
+            </a:extLst>
+          </p:cNvPr>
+          <p:cNvSpPr/>
+          <p:nvPr/>
+        </p:nvSpPr>
+        <p:spPr>
+          <a:xfrm>
+            <a:off x="4472778" y="3541558"/>
+            <a:ext cx="1349267" cy="490665"/>
+          </a:xfrm>
+          <a:prstGeom prst="rect">
+            <a:avLst/>
+          </a:prstGeom>
+          <a:solidFill>
+            <a:schemeClr val="accent1">
+              <a:lumMod val="40000"/>
+              <a:lumOff val="60000"/>
+            </a:schemeClr>
+          </a:solidFill>
+          <a:ln w="25400">
+            <a:solidFill>
+              <a:schemeClr val="accent1">
+                <a:shade val="50000"/>
+              </a:schemeClr>
+            </a:solidFill>
+          </a:ln>
+        </p:spPr>
+        <p:style>
+          <a:lnRef idx="2">
+            <a:schemeClr val="accent1">
+              <a:shade val="50000"/>
+            </a:schemeClr>
+          </a:lnRef>
+          <a:fillRef idx="1">
+            <a:schemeClr val="accent1"/>
+          </a:fillRef>
+          <a:effectRef idx="0">
+            <a:schemeClr val="accent1"/>
+          </a:effectRef>
+          <a:fontRef idx="minor">
+            <a:schemeClr val="lt1"/>
+          </a:fontRef>
+        </p:style>
+        <p:txBody>
+          <a:bodyPr rtlCol="0" anchor="ctr"/>
+          <a:lstStyle/>
+          <a:p>
+            <a:pPr algn="ctr"/>
+            <a:endParaRPr lang="fr-FR"/>
+          </a:p>
+        </p:txBody>
+      </p:sp>
+      <p:sp>
+        <p:nvSpPr>
+          <p:cNvPr id="33" name="TextBox 32">
+            <a:extLst>
+              <a:ext uri="{FF2B5EF4-FFF2-40B4-BE49-F238E27FC236}">
+                <a16:creationId xmlns:a16="http://schemas.microsoft.com/office/drawing/2014/main" id="{A9B66817-E19E-4A8A-8239-A585D9148346}"/>
+              </a:ext>
+            </a:extLst>
+          </p:cNvPr>
+          <p:cNvSpPr txBox="1"/>
+          <p:nvPr/>
+        </p:nvSpPr>
+        <p:spPr>
+          <a:xfrm>
+            <a:off x="4445115" y="3509024"/>
+            <a:ext cx="1404552" cy="369332"/>
+          </a:xfrm>
+          <a:prstGeom prst="rect">
+            <a:avLst/>
+          </a:prstGeom>
+          <a:noFill/>
+        </p:spPr>
+        <p:txBody>
+          <a:bodyPr wrap="none" rtlCol="0">
+            <a:spAutoFit/>
+          </a:bodyPr>
+          <a:lstStyle/>
+          <a:p>
+            <a:r>
+              <a:rPr lang="fr-FR" dirty="0" err="1"/>
+              <a:t>SparkSession</a:t>
+            </a:r>
+            <a:endParaRPr lang="fr-FR" dirty="0"/>
+          </a:p>
+        </p:txBody>
+      </p:sp>
+      <p:sp>
+        <p:nvSpPr>
+          <p:cNvPr id="28" name="TextBox 27">
+            <a:extLst>
+              <a:ext uri="{FF2B5EF4-FFF2-40B4-BE49-F238E27FC236}">
+                <a16:creationId xmlns:a16="http://schemas.microsoft.com/office/drawing/2014/main" id="{6A6D8EC3-8C0E-4585-9BDD-748DE3162F26}"/>
+              </a:ext>
+            </a:extLst>
+          </p:cNvPr>
+          <p:cNvSpPr txBox="1"/>
+          <p:nvPr/>
+        </p:nvSpPr>
+        <p:spPr>
+          <a:xfrm rot="16200000">
+            <a:off x="5538315" y="3163262"/>
+            <a:ext cx="1682897" cy="369332"/>
+          </a:xfrm>
+          <a:prstGeom prst="rect">
+            <a:avLst/>
+          </a:prstGeom>
+          <a:noFill/>
+        </p:spPr>
+        <p:txBody>
+          <a:bodyPr wrap="none" rtlCol="0">
+            <a:spAutoFit/>
+          </a:bodyPr>
+          <a:lstStyle/>
+          <a:p>
+            <a:r>
+              <a:rPr lang="fr-FR" dirty="0" err="1"/>
+              <a:t>ClusterManager</a:t>
+            </a:r>
+            <a:endParaRPr lang="fr-FR" dirty="0"/>
+          </a:p>
+        </p:txBody>
+      </p:sp>
+      <p:sp>
+        <p:nvSpPr>
+          <p:cNvPr id="35" name="Rectangle 34">
+            <a:extLst>
+              <a:ext uri="{FF2B5EF4-FFF2-40B4-BE49-F238E27FC236}">
+                <a16:creationId xmlns:a16="http://schemas.microsoft.com/office/drawing/2014/main" id="{B425C1A7-0143-4629-A8D1-579EFAF3009A}"/>
+              </a:ext>
+            </a:extLst>
+          </p:cNvPr>
+          <p:cNvSpPr/>
+          <p:nvPr/>
+        </p:nvSpPr>
+        <p:spPr>
+          <a:xfrm>
+            <a:off x="6173305" y="2452682"/>
+            <a:ext cx="440855" cy="1731546"/>
+          </a:xfrm>
+          <a:prstGeom prst="rect">
+            <a:avLst/>
+          </a:prstGeom>
+          <a:noFill/>
+          <a:ln w="25400">
+            <a:solidFill>
+              <a:schemeClr val="accent1">
+                <a:shade val="50000"/>
+              </a:schemeClr>
+            </a:solidFill>
+          </a:ln>
+        </p:spPr>
+        <p:style>
+          <a:lnRef idx="2">
+            <a:schemeClr val="accent1">
+              <a:shade val="50000"/>
+            </a:schemeClr>
+          </a:lnRef>
+          <a:fillRef idx="1">
+            <a:schemeClr val="accent1"/>
+          </a:fillRef>
+          <a:effectRef idx="0">
+            <a:schemeClr val="accent1"/>
+          </a:effectRef>
+          <a:fontRef idx="minor">
+            <a:schemeClr val="lt1"/>
+          </a:fontRef>
+        </p:style>
+        <p:txBody>
+          <a:bodyPr rtlCol="0" anchor="ctr"/>
+          <a:lstStyle/>
+          <a:p>
+            <a:pPr algn="ctr"/>
+            <a:endParaRPr lang="fr-FR"/>
+          </a:p>
+        </p:txBody>
+      </p:sp>
+      <p:sp>
+        <p:nvSpPr>
+          <p:cNvPr id="36" name="Arrow: Curved Down 35">
+            <a:extLst>
+              <a:ext uri="{FF2B5EF4-FFF2-40B4-BE49-F238E27FC236}">
+                <a16:creationId xmlns:a16="http://schemas.microsoft.com/office/drawing/2014/main" id="{D0E9FAE1-A0C2-44B7-9EBC-D59765820D6D}"/>
+              </a:ext>
+            </a:extLst>
+          </p:cNvPr>
+          <p:cNvSpPr/>
+          <p:nvPr/>
+        </p:nvSpPr>
+        <p:spPr>
+          <a:xfrm>
+            <a:off x="6814342" y="1774151"/>
+            <a:ext cx="1254760" cy="391002"/>
+          </a:xfrm>
+          <a:prstGeom prst="curvedDownArrow">
+            <a:avLst/>
+          </a:prstGeom>
+        </p:spPr>
+        <p:style>
+          <a:lnRef idx="2">
+            <a:schemeClr val="accent1">
+              <a:shade val="50000"/>
+            </a:schemeClr>
+          </a:lnRef>
+          <a:fillRef idx="1">
+            <a:schemeClr val="accent1"/>
+          </a:fillRef>
+          <a:effectRef idx="0">
+            <a:schemeClr val="accent1"/>
+          </a:effectRef>
+          <a:fontRef idx="minor">
+            <a:schemeClr val="lt1"/>
+          </a:fontRef>
+        </p:style>
+        <p:txBody>
+          <a:bodyPr rtlCol="0" anchor="ctr"/>
+          <a:lstStyle/>
+          <a:p>
+            <a:pPr algn="ctr"/>
+            <a:endParaRPr lang="fr-FR">
+              <a:solidFill>
+                <a:schemeClr val="tx1"/>
+              </a:solidFill>
+            </a:endParaRPr>
+          </a:p>
+        </p:txBody>
+      </p:sp>
+      <p:sp>
+        <p:nvSpPr>
+          <p:cNvPr id="37" name="Arrow: Curved Down 36">
+            <a:extLst>
+              <a:ext uri="{FF2B5EF4-FFF2-40B4-BE49-F238E27FC236}">
+                <a16:creationId xmlns:a16="http://schemas.microsoft.com/office/drawing/2014/main" id="{02618661-6882-40B4-8418-F21665E73A34}"/>
+              </a:ext>
+            </a:extLst>
+          </p:cNvPr>
+          <p:cNvSpPr/>
+          <p:nvPr/>
+        </p:nvSpPr>
+        <p:spPr>
+          <a:xfrm>
+            <a:off x="6800147" y="3873790"/>
+            <a:ext cx="1254760" cy="391002"/>
+          </a:xfrm>
+          <a:prstGeom prst="curvedDownArrow">
+            <a:avLst/>
+          </a:prstGeom>
+        </p:spPr>
+        <p:style>
+          <a:lnRef idx="2">
+            <a:schemeClr val="accent1">
+              <a:shade val="50000"/>
+            </a:schemeClr>
+          </a:lnRef>
+          <a:fillRef idx="1">
+            <a:schemeClr val="accent1"/>
+          </a:fillRef>
+          <a:effectRef idx="0">
+            <a:schemeClr val="accent1"/>
+          </a:effectRef>
+          <a:fontRef idx="minor">
+            <a:schemeClr val="lt1"/>
+          </a:fontRef>
+        </p:style>
+        <p:txBody>
+          <a:bodyPr rtlCol="0" anchor="ctr"/>
+          <a:lstStyle/>
+          <a:p>
+            <a:pPr algn="ctr"/>
+            <a:endParaRPr lang="fr-FR">
+              <a:solidFill>
+                <a:schemeClr val="tx1"/>
+              </a:solidFill>
+            </a:endParaRPr>
+          </a:p>
+        </p:txBody>
+      </p:sp>
+      <p:sp>
+        <p:nvSpPr>
+          <p:cNvPr id="38" name="TextBox 37">
+            <a:extLst>
+              <a:ext uri="{FF2B5EF4-FFF2-40B4-BE49-F238E27FC236}">
+                <a16:creationId xmlns:a16="http://schemas.microsoft.com/office/drawing/2014/main" id="{46702B82-07AE-44AD-B057-A63A8ABBE91A}"/>
+              </a:ext>
+            </a:extLst>
+          </p:cNvPr>
+          <p:cNvSpPr txBox="1"/>
+          <p:nvPr/>
+        </p:nvSpPr>
+        <p:spPr>
+          <a:xfrm>
+            <a:off x="8406837" y="1795821"/>
+            <a:ext cx="2590517" cy="369332"/>
+          </a:xfrm>
+          <a:prstGeom prst="rect">
+            <a:avLst/>
+          </a:prstGeom>
+          <a:noFill/>
+        </p:spPr>
+        <p:txBody>
+          <a:bodyPr wrap="none" rtlCol="0">
+            <a:spAutoFit/>
+          </a:bodyPr>
+          <a:lstStyle/>
+          <a:p>
+            <a:r>
+              <a:rPr lang="fr-FR" dirty="0"/>
+              <a:t>Java </a:t>
+            </a:r>
+            <a:r>
+              <a:rPr lang="fr-FR" dirty="0" err="1"/>
+              <a:t>CoarseGrainExecutor</a:t>
+            </a:r>
+            <a:endParaRPr lang="fr-FR" dirty="0"/>
+          </a:p>
+        </p:txBody>
+      </p:sp>
+      <p:sp>
+        <p:nvSpPr>
+          <p:cNvPr id="39" name="Rectangle 38">
+            <a:extLst>
+              <a:ext uri="{FF2B5EF4-FFF2-40B4-BE49-F238E27FC236}">
+                <a16:creationId xmlns:a16="http://schemas.microsoft.com/office/drawing/2014/main" id="{38EF6290-BAA6-41CD-9EFF-2092440FFBD3}"/>
+              </a:ext>
+            </a:extLst>
+          </p:cNvPr>
+          <p:cNvSpPr/>
+          <p:nvPr/>
+        </p:nvSpPr>
+        <p:spPr>
+          <a:xfrm>
+            <a:off x="8438516" y="4418360"/>
+            <a:ext cx="2511622" cy="1506329"/>
+          </a:xfrm>
+          <a:prstGeom prst="rect">
+            <a:avLst/>
+          </a:prstGeom>
+        </p:spPr>
+        <p:style>
+          <a:lnRef idx="2">
+            <a:schemeClr val="accent1">
+              <a:shade val="50000"/>
+            </a:schemeClr>
+          </a:lnRef>
+          <a:fillRef idx="1">
+            <a:schemeClr val="accent1"/>
+          </a:fillRef>
+          <a:effectRef idx="0">
+            <a:schemeClr val="accent1"/>
+          </a:effectRef>
+          <a:fontRef idx="minor">
+            <a:schemeClr val="lt1"/>
+          </a:fontRef>
+        </p:style>
+        <p:txBody>
+          <a:bodyPr rtlCol="0" anchor="ctr"/>
+          <a:lstStyle/>
+          <a:p>
+            <a:pPr algn="ctr"/>
+            <a:endParaRPr lang="fr-FR"/>
+          </a:p>
+        </p:txBody>
+      </p:sp>
+      <p:sp>
+        <p:nvSpPr>
+          <p:cNvPr id="40" name="TextBox 39">
+            <a:extLst>
+              <a:ext uri="{FF2B5EF4-FFF2-40B4-BE49-F238E27FC236}">
+                <a16:creationId xmlns:a16="http://schemas.microsoft.com/office/drawing/2014/main" id="{900A5D35-67BD-47FF-AFFD-69400E472F96}"/>
+              </a:ext>
+            </a:extLst>
+          </p:cNvPr>
+          <p:cNvSpPr txBox="1"/>
+          <p:nvPr/>
+        </p:nvSpPr>
+        <p:spPr>
+          <a:xfrm>
+            <a:off x="8406837" y="4418361"/>
+            <a:ext cx="2590517" cy="369332"/>
+          </a:xfrm>
+          <a:prstGeom prst="rect">
+            <a:avLst/>
+          </a:prstGeom>
+          <a:noFill/>
+        </p:spPr>
+        <p:txBody>
+          <a:bodyPr wrap="none" rtlCol="0">
+            <a:spAutoFit/>
+          </a:bodyPr>
+          <a:lstStyle/>
+          <a:p>
+            <a:r>
+              <a:rPr lang="fr-FR" dirty="0"/>
+              <a:t>Java </a:t>
+            </a:r>
+            <a:r>
+              <a:rPr lang="fr-FR" dirty="0" err="1"/>
+              <a:t>CoarseGrainExecutor</a:t>
+            </a:r>
+            <a:endParaRPr lang="fr-FR" dirty="0"/>
+          </a:p>
+        </p:txBody>
+      </p:sp>
+      <p:sp>
+        <p:nvSpPr>
+          <p:cNvPr id="41" name="TextBox 40">
+            <a:extLst>
+              <a:ext uri="{FF2B5EF4-FFF2-40B4-BE49-F238E27FC236}">
+                <a16:creationId xmlns:a16="http://schemas.microsoft.com/office/drawing/2014/main" id="{1D7EF325-DC3D-4D42-ACF4-3151A129E85E}"/>
+              </a:ext>
+            </a:extLst>
+          </p:cNvPr>
+          <p:cNvSpPr txBox="1"/>
+          <p:nvPr/>
+        </p:nvSpPr>
+        <p:spPr>
+          <a:xfrm>
+            <a:off x="105205" y="1308406"/>
+            <a:ext cx="5088400" cy="923330"/>
+          </a:xfrm>
+          <a:prstGeom prst="rect">
+            <a:avLst/>
+          </a:prstGeom>
+          <a:noFill/>
+        </p:spPr>
+        <p:txBody>
+          <a:bodyPr wrap="square" rtlCol="0">
+            <a:spAutoFit/>
+          </a:bodyPr>
+          <a:lstStyle/>
+          <a:p>
+            <a:r>
+              <a:rPr lang="fr-FR" b="1" dirty="0"/>
+              <a:t>Case 1</a:t>
+            </a:r>
+            <a:r>
+              <a:rPr lang="fr-FR" dirty="0"/>
+              <a:t>/ </a:t>
+            </a:r>
+            <a:r>
+              <a:rPr lang="fr-FR" dirty="0" err="1"/>
+              <a:t>Lauch</a:t>
+            </a:r>
+            <a:r>
+              <a:rPr lang="fr-FR" dirty="0"/>
+              <a:t> </a:t>
+            </a:r>
+            <a:r>
+              <a:rPr lang="fr-FR" dirty="0" err="1"/>
+              <a:t>directly</a:t>
+            </a:r>
+            <a:r>
+              <a:rPr lang="fr-FR" dirty="0"/>
+              <a:t> java.. main(String[] args) {</a:t>
+            </a:r>
+          </a:p>
+          <a:p>
+            <a:r>
+              <a:rPr lang="fr-FR" dirty="0"/>
+              <a:t>   </a:t>
+            </a:r>
+            <a:r>
+              <a:rPr lang="fr-FR" b="1" dirty="0" err="1"/>
+              <a:t>SparkContext</a:t>
+            </a:r>
+            <a:r>
+              <a:rPr lang="fr-FR" dirty="0" err="1"/>
+              <a:t>.getOrCreate</a:t>
+            </a:r>
+            <a:r>
+              <a:rPr lang="fr-FR" dirty="0"/>
+              <a:t>()..</a:t>
+            </a:r>
+          </a:p>
+          <a:p>
+            <a:r>
+              <a:rPr lang="fr-FR" dirty="0"/>
+              <a:t>}</a:t>
+            </a:r>
+          </a:p>
+        </p:txBody>
+      </p:sp>
+      <p:sp>
+        <p:nvSpPr>
+          <p:cNvPr id="42" name="TextBox 41">
+            <a:extLst>
+              <a:ext uri="{FF2B5EF4-FFF2-40B4-BE49-F238E27FC236}">
+                <a16:creationId xmlns:a16="http://schemas.microsoft.com/office/drawing/2014/main" id="{E55C1252-4CAC-4A4A-9571-76937B1E3DF9}"/>
+              </a:ext>
+            </a:extLst>
+          </p:cNvPr>
+          <p:cNvSpPr txBox="1"/>
+          <p:nvPr/>
+        </p:nvSpPr>
+        <p:spPr>
+          <a:xfrm>
+            <a:off x="86998" y="2225967"/>
+            <a:ext cx="5088400" cy="369332"/>
+          </a:xfrm>
+          <a:prstGeom prst="rect">
+            <a:avLst/>
+          </a:prstGeom>
+          <a:noFill/>
+        </p:spPr>
+        <p:txBody>
+          <a:bodyPr wrap="square" rtlCol="0">
+            <a:spAutoFit/>
+          </a:bodyPr>
+          <a:lstStyle/>
+          <a:p>
+            <a:r>
+              <a:rPr lang="fr-FR" b="1" dirty="0"/>
+              <a:t>Case 2</a:t>
+            </a:r>
+            <a:r>
+              <a:rPr lang="fr-FR" dirty="0"/>
+              <a:t>/ </a:t>
+            </a:r>
+            <a:r>
+              <a:rPr lang="fr-FR" dirty="0" err="1"/>
+              <a:t>spark-submit</a:t>
+            </a:r>
+            <a:r>
+              <a:rPr lang="fr-FR" dirty="0"/>
+              <a:t> –mode </a:t>
+            </a:r>
+            <a:r>
+              <a:rPr lang="fr-FR" b="1" dirty="0"/>
+              <a:t>client</a:t>
+            </a:r>
+          </a:p>
+        </p:txBody>
+      </p:sp>
+      <p:sp>
+        <p:nvSpPr>
+          <p:cNvPr id="43" name="Arrow: Curved Down 42">
+            <a:extLst>
+              <a:ext uri="{FF2B5EF4-FFF2-40B4-BE49-F238E27FC236}">
+                <a16:creationId xmlns:a16="http://schemas.microsoft.com/office/drawing/2014/main" id="{97911A94-ED92-4FC9-9E93-3344F766A868}"/>
+              </a:ext>
+            </a:extLst>
+          </p:cNvPr>
+          <p:cNvSpPr/>
+          <p:nvPr/>
+        </p:nvSpPr>
+        <p:spPr>
+          <a:xfrm>
+            <a:off x="2775429" y="1810959"/>
+            <a:ext cx="1254760" cy="391002"/>
+          </a:xfrm>
+          <a:prstGeom prst="curvedDownArrow">
+            <a:avLst/>
+          </a:prstGeom>
+        </p:spPr>
+        <p:style>
+          <a:lnRef idx="2">
+            <a:schemeClr val="accent1">
+              <a:shade val="50000"/>
+            </a:schemeClr>
+          </a:lnRef>
+          <a:fillRef idx="1">
+            <a:schemeClr val="accent1"/>
+          </a:fillRef>
+          <a:effectRef idx="0">
+            <a:schemeClr val="accent1"/>
+          </a:effectRef>
+          <a:fontRef idx="minor">
+            <a:schemeClr val="lt1"/>
+          </a:fontRef>
+        </p:style>
+        <p:txBody>
+          <a:bodyPr rtlCol="0" anchor="ctr"/>
+          <a:lstStyle/>
+          <a:p>
+            <a:pPr algn="ctr"/>
+            <a:endParaRPr lang="fr-FR">
+              <a:solidFill>
+                <a:schemeClr val="tx1"/>
+              </a:solidFill>
+            </a:endParaRPr>
+          </a:p>
+        </p:txBody>
+      </p:sp>
+      <p:sp>
+        <p:nvSpPr>
+          <p:cNvPr id="44" name="Arrow: Curved Down 43">
+            <a:extLst>
+              <a:ext uri="{FF2B5EF4-FFF2-40B4-BE49-F238E27FC236}">
+                <a16:creationId xmlns:a16="http://schemas.microsoft.com/office/drawing/2014/main" id="{C532762B-8624-43D0-8C8D-25533C268C30}"/>
+              </a:ext>
+            </a:extLst>
+          </p:cNvPr>
+          <p:cNvSpPr/>
+          <p:nvPr/>
+        </p:nvSpPr>
+        <p:spPr>
+          <a:xfrm>
+            <a:off x="2800969" y="2553704"/>
+            <a:ext cx="1254760" cy="391002"/>
+          </a:xfrm>
+          <a:prstGeom prst="curvedDownArrow">
+            <a:avLst/>
+          </a:prstGeom>
+        </p:spPr>
+        <p:style>
+          <a:lnRef idx="2">
+            <a:schemeClr val="accent1">
+              <a:shade val="50000"/>
+            </a:schemeClr>
+          </a:lnRef>
+          <a:fillRef idx="1">
+            <a:schemeClr val="accent1"/>
+          </a:fillRef>
+          <a:effectRef idx="0">
+            <a:schemeClr val="accent1"/>
+          </a:effectRef>
+          <a:fontRef idx="minor">
+            <a:schemeClr val="lt1"/>
+          </a:fontRef>
+        </p:style>
+        <p:txBody>
+          <a:bodyPr rtlCol="0" anchor="ctr"/>
+          <a:lstStyle/>
+          <a:p>
+            <a:pPr algn="ctr"/>
+            <a:endParaRPr lang="fr-FR">
+              <a:solidFill>
+                <a:schemeClr val="tx1"/>
+              </a:solidFill>
+            </a:endParaRPr>
+          </a:p>
+        </p:txBody>
+      </p:sp>
+      <p:sp>
+        <p:nvSpPr>
+          <p:cNvPr id="45" name="TextBox 44">
+            <a:extLst>
+              <a:ext uri="{FF2B5EF4-FFF2-40B4-BE49-F238E27FC236}">
+                <a16:creationId xmlns:a16="http://schemas.microsoft.com/office/drawing/2014/main" id="{B308151B-221C-47B1-A835-480A43C03EF2}"/>
+              </a:ext>
+            </a:extLst>
+          </p:cNvPr>
+          <p:cNvSpPr txBox="1"/>
+          <p:nvPr/>
+        </p:nvSpPr>
+        <p:spPr>
+          <a:xfrm>
+            <a:off x="4767248" y="1639650"/>
+            <a:ext cx="1363963" cy="369332"/>
+          </a:xfrm>
+          <a:prstGeom prst="rect">
+            <a:avLst/>
+          </a:prstGeom>
+          <a:noFill/>
+        </p:spPr>
+        <p:txBody>
+          <a:bodyPr wrap="none" rtlCol="0">
+            <a:spAutoFit/>
+          </a:bodyPr>
+          <a:lstStyle/>
+          <a:p>
+            <a:r>
+              <a:rPr lang="fr-FR" b="1" dirty="0"/>
+              <a:t>Spark Driver</a:t>
+            </a:r>
+          </a:p>
+        </p:txBody>
+      </p:sp>
+      <p:sp>
+        <p:nvSpPr>
+          <p:cNvPr id="46" name="Rectangle 45">
+            <a:extLst>
+              <a:ext uri="{FF2B5EF4-FFF2-40B4-BE49-F238E27FC236}">
+                <a16:creationId xmlns:a16="http://schemas.microsoft.com/office/drawing/2014/main" id="{3C627AB8-084E-46D9-BD6D-EA1C20411E64}"/>
+              </a:ext>
+            </a:extLst>
+          </p:cNvPr>
+          <p:cNvSpPr/>
+          <p:nvPr/>
+        </p:nvSpPr>
+        <p:spPr>
+          <a:xfrm>
+            <a:off x="8642123" y="4938645"/>
+            <a:ext cx="781123" cy="490665"/>
+          </a:xfrm>
+          <a:prstGeom prst="rect">
+            <a:avLst/>
+          </a:prstGeom>
+          <a:solidFill>
+            <a:schemeClr val="accent1">
+              <a:lumMod val="40000"/>
+              <a:lumOff val="60000"/>
+            </a:schemeClr>
+          </a:solidFill>
+          <a:ln w="25400">
+            <a:solidFill>
+              <a:schemeClr val="accent1">
+                <a:shade val="50000"/>
+              </a:schemeClr>
+            </a:solidFill>
+          </a:ln>
+        </p:spPr>
+        <p:style>
+          <a:lnRef idx="2">
+            <a:schemeClr val="accent1">
+              <a:shade val="50000"/>
+            </a:schemeClr>
+          </a:lnRef>
+          <a:fillRef idx="1">
+            <a:schemeClr val="accent1"/>
+          </a:fillRef>
+          <a:effectRef idx="0">
+            <a:schemeClr val="accent1"/>
+          </a:effectRef>
+          <a:fontRef idx="minor">
+            <a:schemeClr val="lt1"/>
+          </a:fontRef>
+        </p:style>
+        <p:txBody>
+          <a:bodyPr rtlCol="0" anchor="ctr"/>
+          <a:lstStyle/>
+          <a:p>
+            <a:pPr algn="ctr"/>
+            <a:endParaRPr lang="fr-FR"/>
+          </a:p>
+        </p:txBody>
+      </p:sp>
+      <p:sp>
+        <p:nvSpPr>
+          <p:cNvPr id="47" name="Rectangle 46">
+            <a:extLst>
+              <a:ext uri="{FF2B5EF4-FFF2-40B4-BE49-F238E27FC236}">
+                <a16:creationId xmlns:a16="http://schemas.microsoft.com/office/drawing/2014/main" id="{2EB17D59-BB96-4BE5-9594-DC7AE5F6428D}"/>
+              </a:ext>
+            </a:extLst>
+          </p:cNvPr>
+          <p:cNvSpPr/>
+          <p:nvPr/>
+        </p:nvSpPr>
+        <p:spPr>
+          <a:xfrm>
+            <a:off x="8714475" y="5050079"/>
+            <a:ext cx="781123" cy="490665"/>
+          </a:xfrm>
+          <a:prstGeom prst="rect">
+            <a:avLst/>
+          </a:prstGeom>
+          <a:solidFill>
+            <a:schemeClr val="accent1">
+              <a:lumMod val="40000"/>
+              <a:lumOff val="60000"/>
+            </a:schemeClr>
+          </a:solidFill>
+          <a:ln w="25400">
+            <a:solidFill>
+              <a:schemeClr val="accent1">
+                <a:shade val="50000"/>
+              </a:schemeClr>
+            </a:solidFill>
+          </a:ln>
+        </p:spPr>
+        <p:style>
+          <a:lnRef idx="2">
+            <a:schemeClr val="accent1">
+              <a:shade val="50000"/>
+            </a:schemeClr>
+          </a:lnRef>
+          <a:fillRef idx="1">
+            <a:schemeClr val="accent1"/>
+          </a:fillRef>
+          <a:effectRef idx="0">
+            <a:schemeClr val="accent1"/>
+          </a:effectRef>
+          <a:fontRef idx="minor">
+            <a:schemeClr val="lt1"/>
+          </a:fontRef>
+        </p:style>
+        <p:txBody>
+          <a:bodyPr rtlCol="0" anchor="ctr"/>
+          <a:lstStyle/>
+          <a:p>
+            <a:pPr algn="ctr"/>
+            <a:endParaRPr lang="fr-FR"/>
+          </a:p>
+        </p:txBody>
+      </p:sp>
+      <p:sp>
+        <p:nvSpPr>
+          <p:cNvPr id="50" name="Rectangle 49">
+            <a:extLst>
+              <a:ext uri="{FF2B5EF4-FFF2-40B4-BE49-F238E27FC236}">
+                <a16:creationId xmlns:a16="http://schemas.microsoft.com/office/drawing/2014/main" id="{EDBC0C3F-E91B-4A15-88C0-7CA6FE5CDE30}"/>
+              </a:ext>
+            </a:extLst>
+          </p:cNvPr>
+          <p:cNvSpPr/>
+          <p:nvPr/>
+        </p:nvSpPr>
+        <p:spPr>
+          <a:xfrm>
+            <a:off x="8801751" y="5182154"/>
+            <a:ext cx="781123" cy="490665"/>
+          </a:xfrm>
+          <a:prstGeom prst="rect">
+            <a:avLst/>
+          </a:prstGeom>
+          <a:solidFill>
+            <a:schemeClr val="accent1">
+              <a:lumMod val="40000"/>
+              <a:lumOff val="60000"/>
+            </a:schemeClr>
+          </a:solidFill>
+          <a:ln w="25400">
+            <a:solidFill>
+              <a:schemeClr val="accent1">
+                <a:shade val="50000"/>
+              </a:schemeClr>
+            </a:solidFill>
+          </a:ln>
+        </p:spPr>
+        <p:style>
+          <a:lnRef idx="2">
+            <a:schemeClr val="accent1">
+              <a:shade val="50000"/>
+            </a:schemeClr>
+          </a:lnRef>
+          <a:fillRef idx="1">
+            <a:schemeClr val="accent1"/>
+          </a:fillRef>
+          <a:effectRef idx="0">
+            <a:schemeClr val="accent1"/>
+          </a:effectRef>
+          <a:fontRef idx="minor">
+            <a:schemeClr val="lt1"/>
+          </a:fontRef>
+        </p:style>
+        <p:txBody>
+          <a:bodyPr rtlCol="0" anchor="ctr"/>
+          <a:lstStyle/>
+          <a:p>
+            <a:pPr algn="ctr"/>
+            <a:endParaRPr lang="fr-FR"/>
+          </a:p>
+        </p:txBody>
+      </p:sp>
+      <p:sp>
+        <p:nvSpPr>
+          <p:cNvPr id="48" name="TextBox 47">
+            <a:extLst>
+              <a:ext uri="{FF2B5EF4-FFF2-40B4-BE49-F238E27FC236}">
+                <a16:creationId xmlns:a16="http://schemas.microsoft.com/office/drawing/2014/main" id="{5018F8A2-F4AE-4CE1-9093-E1C1116667DB}"/>
+              </a:ext>
+            </a:extLst>
+          </p:cNvPr>
+          <p:cNvSpPr txBox="1"/>
+          <p:nvPr/>
+        </p:nvSpPr>
+        <p:spPr>
+          <a:xfrm>
+            <a:off x="8875993" y="5218433"/>
+            <a:ext cx="583429" cy="369332"/>
+          </a:xfrm>
+          <a:prstGeom prst="rect">
+            <a:avLst/>
+          </a:prstGeom>
+          <a:noFill/>
+        </p:spPr>
+        <p:txBody>
+          <a:bodyPr wrap="none" rtlCol="0">
+            <a:spAutoFit/>
+          </a:bodyPr>
+          <a:lstStyle/>
+          <a:p>
+            <a:r>
+              <a:rPr lang="fr-FR" dirty="0" err="1"/>
+              <a:t>Task</a:t>
+            </a:r>
+            <a:endParaRPr lang="fr-FR" dirty="0"/>
+          </a:p>
+        </p:txBody>
+      </p:sp>
+      <p:sp>
+        <p:nvSpPr>
+          <p:cNvPr id="51" name="Rectangle 50">
+            <a:extLst>
+              <a:ext uri="{FF2B5EF4-FFF2-40B4-BE49-F238E27FC236}">
+                <a16:creationId xmlns:a16="http://schemas.microsoft.com/office/drawing/2014/main" id="{828F0CBC-1F42-42D8-B6DB-BE2157936898}"/>
+              </a:ext>
+            </a:extLst>
+          </p:cNvPr>
+          <p:cNvSpPr/>
+          <p:nvPr/>
+        </p:nvSpPr>
+        <p:spPr>
+          <a:xfrm>
+            <a:off x="9852291" y="4949818"/>
+            <a:ext cx="781123" cy="490665"/>
+          </a:xfrm>
+          <a:prstGeom prst="rect">
+            <a:avLst/>
+          </a:prstGeom>
+          <a:solidFill>
+            <a:schemeClr val="accent1">
+              <a:lumMod val="40000"/>
+              <a:lumOff val="60000"/>
+            </a:schemeClr>
+          </a:solidFill>
+          <a:ln w="25400">
+            <a:solidFill>
+              <a:schemeClr val="accent1">
+                <a:shade val="50000"/>
+              </a:schemeClr>
+            </a:solidFill>
+          </a:ln>
+        </p:spPr>
+        <p:style>
+          <a:lnRef idx="2">
+            <a:schemeClr val="accent1">
+              <a:shade val="50000"/>
+            </a:schemeClr>
+          </a:lnRef>
+          <a:fillRef idx="1">
+            <a:schemeClr val="accent1"/>
+          </a:fillRef>
+          <a:effectRef idx="0">
+            <a:schemeClr val="accent1"/>
+          </a:effectRef>
+          <a:fontRef idx="minor">
+            <a:schemeClr val="lt1"/>
+          </a:fontRef>
+        </p:style>
+        <p:txBody>
+          <a:bodyPr rtlCol="0" anchor="ctr"/>
+          <a:lstStyle/>
+          <a:p>
+            <a:pPr algn="ctr"/>
+            <a:endParaRPr lang="fr-FR"/>
+          </a:p>
+        </p:txBody>
+      </p:sp>
+      <p:sp>
+        <p:nvSpPr>
+          <p:cNvPr id="52" name="TextBox 51">
+            <a:extLst>
+              <a:ext uri="{FF2B5EF4-FFF2-40B4-BE49-F238E27FC236}">
+                <a16:creationId xmlns:a16="http://schemas.microsoft.com/office/drawing/2014/main" id="{C7DC6C03-F906-41E1-99DE-0C563A765B5A}"/>
+              </a:ext>
+            </a:extLst>
+          </p:cNvPr>
+          <p:cNvSpPr txBox="1"/>
+          <p:nvPr/>
+        </p:nvSpPr>
+        <p:spPr>
+          <a:xfrm>
+            <a:off x="9926533" y="4986097"/>
+            <a:ext cx="753732" cy="369332"/>
+          </a:xfrm>
+          <a:prstGeom prst="rect">
+            <a:avLst/>
+          </a:prstGeom>
+          <a:noFill/>
+        </p:spPr>
+        <p:txBody>
+          <a:bodyPr wrap="none" rtlCol="0">
+            <a:spAutoFit/>
+          </a:bodyPr>
+          <a:lstStyle/>
+          <a:p>
+            <a:r>
+              <a:rPr lang="fr-FR" dirty="0"/>
+              <a:t>Cache</a:t>
+            </a:r>
+          </a:p>
+        </p:txBody>
+      </p:sp>
+      <p:sp>
+        <p:nvSpPr>
+          <p:cNvPr id="53" name="Rectangle 52">
+            <a:extLst>
+              <a:ext uri="{FF2B5EF4-FFF2-40B4-BE49-F238E27FC236}">
+                <a16:creationId xmlns:a16="http://schemas.microsoft.com/office/drawing/2014/main" id="{C0670CF4-4535-4531-BE41-EDA4402AFA73}"/>
+              </a:ext>
+            </a:extLst>
+          </p:cNvPr>
+          <p:cNvSpPr/>
+          <p:nvPr/>
+        </p:nvSpPr>
+        <p:spPr>
+          <a:xfrm>
+            <a:off x="8640357" y="2355681"/>
+            <a:ext cx="781123" cy="490665"/>
+          </a:xfrm>
+          <a:prstGeom prst="rect">
+            <a:avLst/>
+          </a:prstGeom>
+          <a:solidFill>
+            <a:schemeClr val="accent1">
+              <a:lumMod val="40000"/>
+              <a:lumOff val="60000"/>
+            </a:schemeClr>
+          </a:solidFill>
+          <a:ln w="25400">
+            <a:solidFill>
+              <a:schemeClr val="accent1">
+                <a:shade val="50000"/>
+              </a:schemeClr>
+            </a:solidFill>
+          </a:ln>
+        </p:spPr>
+        <p:style>
+          <a:lnRef idx="2">
+            <a:schemeClr val="accent1">
+              <a:shade val="50000"/>
+            </a:schemeClr>
+          </a:lnRef>
+          <a:fillRef idx="1">
+            <a:schemeClr val="accent1"/>
+          </a:fillRef>
+          <a:effectRef idx="0">
+            <a:schemeClr val="accent1"/>
+          </a:effectRef>
+          <a:fontRef idx="minor">
+            <a:schemeClr val="lt1"/>
+          </a:fontRef>
+        </p:style>
+        <p:txBody>
+          <a:bodyPr rtlCol="0" anchor="ctr"/>
+          <a:lstStyle/>
+          <a:p>
+            <a:pPr algn="ctr"/>
+            <a:endParaRPr lang="fr-FR"/>
+          </a:p>
+        </p:txBody>
+      </p:sp>
+      <p:sp>
+        <p:nvSpPr>
+          <p:cNvPr id="54" name="Rectangle 53">
+            <a:extLst>
+              <a:ext uri="{FF2B5EF4-FFF2-40B4-BE49-F238E27FC236}">
+                <a16:creationId xmlns:a16="http://schemas.microsoft.com/office/drawing/2014/main" id="{62E40109-6680-43CD-B679-65273F6EE75D}"/>
+              </a:ext>
+            </a:extLst>
+          </p:cNvPr>
+          <p:cNvSpPr/>
+          <p:nvPr/>
+        </p:nvSpPr>
+        <p:spPr>
+          <a:xfrm>
+            <a:off x="8712709" y="2467115"/>
+            <a:ext cx="781123" cy="490665"/>
+          </a:xfrm>
+          <a:prstGeom prst="rect">
+            <a:avLst/>
+          </a:prstGeom>
+          <a:solidFill>
+            <a:schemeClr val="accent1">
+              <a:lumMod val="40000"/>
+              <a:lumOff val="60000"/>
+            </a:schemeClr>
+          </a:solidFill>
+          <a:ln w="25400">
+            <a:solidFill>
+              <a:schemeClr val="accent1">
+                <a:shade val="50000"/>
+              </a:schemeClr>
+            </a:solidFill>
+          </a:ln>
+        </p:spPr>
+        <p:style>
+          <a:lnRef idx="2">
+            <a:schemeClr val="accent1">
+              <a:shade val="50000"/>
+            </a:schemeClr>
+          </a:lnRef>
+          <a:fillRef idx="1">
+            <a:schemeClr val="accent1"/>
+          </a:fillRef>
+          <a:effectRef idx="0">
+            <a:schemeClr val="accent1"/>
+          </a:effectRef>
+          <a:fontRef idx="minor">
+            <a:schemeClr val="lt1"/>
+          </a:fontRef>
+        </p:style>
+        <p:txBody>
+          <a:bodyPr rtlCol="0" anchor="ctr"/>
+          <a:lstStyle/>
+          <a:p>
+            <a:pPr algn="ctr"/>
+            <a:endParaRPr lang="fr-FR"/>
+          </a:p>
+        </p:txBody>
+      </p:sp>
+      <p:sp>
+        <p:nvSpPr>
+          <p:cNvPr id="55" name="Rectangle 54">
+            <a:extLst>
+              <a:ext uri="{FF2B5EF4-FFF2-40B4-BE49-F238E27FC236}">
+                <a16:creationId xmlns:a16="http://schemas.microsoft.com/office/drawing/2014/main" id="{8FD87FE6-7C79-4A19-A8ED-FE6F964347C2}"/>
+              </a:ext>
+            </a:extLst>
+          </p:cNvPr>
+          <p:cNvSpPr/>
+          <p:nvPr/>
+        </p:nvSpPr>
+        <p:spPr>
+          <a:xfrm>
+            <a:off x="8799985" y="2599190"/>
+            <a:ext cx="781123" cy="490665"/>
+          </a:xfrm>
+          <a:prstGeom prst="rect">
+            <a:avLst/>
+          </a:prstGeom>
+          <a:solidFill>
+            <a:schemeClr val="accent1">
+              <a:lumMod val="40000"/>
+              <a:lumOff val="60000"/>
+            </a:schemeClr>
+          </a:solidFill>
+          <a:ln w="25400">
+            <a:solidFill>
+              <a:schemeClr val="accent1">
+                <a:shade val="50000"/>
+              </a:schemeClr>
+            </a:solidFill>
+          </a:ln>
+        </p:spPr>
+        <p:style>
+          <a:lnRef idx="2">
+            <a:schemeClr val="accent1">
+              <a:shade val="50000"/>
+            </a:schemeClr>
+          </a:lnRef>
+          <a:fillRef idx="1">
+            <a:schemeClr val="accent1"/>
+          </a:fillRef>
+          <a:effectRef idx="0">
+            <a:schemeClr val="accent1"/>
+          </a:effectRef>
+          <a:fontRef idx="minor">
+            <a:schemeClr val="lt1"/>
+          </a:fontRef>
+        </p:style>
+        <p:txBody>
+          <a:bodyPr rtlCol="0" anchor="ctr"/>
+          <a:lstStyle/>
+          <a:p>
+            <a:pPr algn="ctr"/>
+            <a:endParaRPr lang="fr-FR"/>
+          </a:p>
+        </p:txBody>
+      </p:sp>
+      <p:sp>
+        <p:nvSpPr>
+          <p:cNvPr id="56" name="TextBox 55">
+            <a:extLst>
+              <a:ext uri="{FF2B5EF4-FFF2-40B4-BE49-F238E27FC236}">
+                <a16:creationId xmlns:a16="http://schemas.microsoft.com/office/drawing/2014/main" id="{BB86DAC6-3D15-4D28-90DD-428C621403D5}"/>
+              </a:ext>
+            </a:extLst>
+          </p:cNvPr>
+          <p:cNvSpPr txBox="1"/>
+          <p:nvPr/>
+        </p:nvSpPr>
+        <p:spPr>
+          <a:xfrm>
+            <a:off x="8874227" y="2635469"/>
+            <a:ext cx="583429" cy="369332"/>
+          </a:xfrm>
+          <a:prstGeom prst="rect">
+            <a:avLst/>
+          </a:prstGeom>
+          <a:noFill/>
+        </p:spPr>
+        <p:txBody>
+          <a:bodyPr wrap="none" rtlCol="0">
+            <a:spAutoFit/>
+          </a:bodyPr>
+          <a:lstStyle/>
+          <a:p>
+            <a:r>
+              <a:rPr lang="fr-FR" dirty="0" err="1"/>
+              <a:t>Task</a:t>
+            </a:r>
+            <a:endParaRPr lang="fr-FR" dirty="0"/>
+          </a:p>
+        </p:txBody>
+      </p:sp>
+      <p:sp>
+        <p:nvSpPr>
+          <p:cNvPr id="57" name="Rectangle 56">
+            <a:extLst>
+              <a:ext uri="{FF2B5EF4-FFF2-40B4-BE49-F238E27FC236}">
+                <a16:creationId xmlns:a16="http://schemas.microsoft.com/office/drawing/2014/main" id="{592DDE6D-903B-421E-B514-E204EB682DD1}"/>
+              </a:ext>
+            </a:extLst>
+          </p:cNvPr>
+          <p:cNvSpPr/>
+          <p:nvPr/>
+        </p:nvSpPr>
+        <p:spPr>
+          <a:xfrm>
+            <a:off x="9850525" y="2366854"/>
+            <a:ext cx="781123" cy="490665"/>
+          </a:xfrm>
+          <a:prstGeom prst="rect">
+            <a:avLst/>
+          </a:prstGeom>
+          <a:solidFill>
+            <a:schemeClr val="accent1">
+              <a:lumMod val="40000"/>
+              <a:lumOff val="60000"/>
+            </a:schemeClr>
+          </a:solidFill>
+          <a:ln w="25400">
+            <a:solidFill>
+              <a:schemeClr val="accent1">
+                <a:shade val="50000"/>
+              </a:schemeClr>
+            </a:solidFill>
+          </a:ln>
+        </p:spPr>
+        <p:style>
+          <a:lnRef idx="2">
+            <a:schemeClr val="accent1">
+              <a:shade val="50000"/>
+            </a:schemeClr>
+          </a:lnRef>
+          <a:fillRef idx="1">
+            <a:schemeClr val="accent1"/>
+          </a:fillRef>
+          <a:effectRef idx="0">
+            <a:schemeClr val="accent1"/>
+          </a:effectRef>
+          <a:fontRef idx="minor">
+            <a:schemeClr val="lt1"/>
+          </a:fontRef>
+        </p:style>
+        <p:txBody>
+          <a:bodyPr rtlCol="0" anchor="ctr"/>
+          <a:lstStyle/>
+          <a:p>
+            <a:pPr algn="ctr"/>
+            <a:endParaRPr lang="fr-FR"/>
+          </a:p>
+        </p:txBody>
+      </p:sp>
+      <p:sp>
+        <p:nvSpPr>
+          <p:cNvPr id="58" name="TextBox 57">
+            <a:extLst>
+              <a:ext uri="{FF2B5EF4-FFF2-40B4-BE49-F238E27FC236}">
+                <a16:creationId xmlns:a16="http://schemas.microsoft.com/office/drawing/2014/main" id="{0A21A801-2CC7-42CE-B597-FC74EE53736B}"/>
+              </a:ext>
+            </a:extLst>
+          </p:cNvPr>
+          <p:cNvSpPr txBox="1"/>
+          <p:nvPr/>
+        </p:nvSpPr>
+        <p:spPr>
+          <a:xfrm>
+            <a:off x="9924767" y="2403133"/>
+            <a:ext cx="753732" cy="369332"/>
+          </a:xfrm>
+          <a:prstGeom prst="rect">
+            <a:avLst/>
+          </a:prstGeom>
+          <a:noFill/>
+        </p:spPr>
+        <p:txBody>
+          <a:bodyPr wrap="none" rtlCol="0">
+            <a:spAutoFit/>
+          </a:bodyPr>
+          <a:lstStyle/>
+          <a:p>
+            <a:r>
+              <a:rPr lang="fr-FR" dirty="0"/>
+              <a:t>Cache</a:t>
+            </a:r>
+          </a:p>
+        </p:txBody>
+      </p:sp>
+      <p:sp>
+        <p:nvSpPr>
+          <p:cNvPr id="59" name="TextBox 58">
+            <a:extLst>
+              <a:ext uri="{FF2B5EF4-FFF2-40B4-BE49-F238E27FC236}">
+                <a16:creationId xmlns:a16="http://schemas.microsoft.com/office/drawing/2014/main" id="{05E08A0E-485F-4E58-B53B-ADF0355AF041}"/>
+              </a:ext>
+            </a:extLst>
+          </p:cNvPr>
+          <p:cNvSpPr txBox="1"/>
+          <p:nvPr/>
+        </p:nvSpPr>
+        <p:spPr>
+          <a:xfrm>
+            <a:off x="8943412" y="1447291"/>
+            <a:ext cx="1606787" cy="369332"/>
+          </a:xfrm>
+          <a:prstGeom prst="rect">
+            <a:avLst/>
+          </a:prstGeom>
+          <a:noFill/>
+        </p:spPr>
+        <p:txBody>
+          <a:bodyPr wrap="none" rtlCol="0">
+            <a:spAutoFit/>
+          </a:bodyPr>
+          <a:lstStyle/>
+          <a:p>
+            <a:r>
+              <a:rPr lang="fr-FR" b="1" dirty="0"/>
+              <a:t>Spark </a:t>
+            </a:r>
+            <a:r>
+              <a:rPr lang="fr-FR" b="1" dirty="0" err="1"/>
+              <a:t>Executor</a:t>
+            </a:r>
+            <a:endParaRPr lang="fr-FR" b="1" dirty="0"/>
+          </a:p>
+        </p:txBody>
+      </p:sp>
+      <p:sp>
+        <p:nvSpPr>
+          <p:cNvPr id="60" name="TextBox 59">
+            <a:extLst>
+              <a:ext uri="{FF2B5EF4-FFF2-40B4-BE49-F238E27FC236}">
+                <a16:creationId xmlns:a16="http://schemas.microsoft.com/office/drawing/2014/main" id="{6C7EF164-4FD7-4F08-A746-5E1CA1BF22F9}"/>
+              </a:ext>
+            </a:extLst>
+          </p:cNvPr>
+          <p:cNvSpPr txBox="1"/>
+          <p:nvPr/>
+        </p:nvSpPr>
+        <p:spPr>
+          <a:xfrm>
+            <a:off x="8892024" y="4084531"/>
+            <a:ext cx="1606787" cy="369332"/>
+          </a:xfrm>
+          <a:prstGeom prst="rect">
+            <a:avLst/>
+          </a:prstGeom>
+          <a:noFill/>
+        </p:spPr>
+        <p:txBody>
+          <a:bodyPr wrap="none" rtlCol="0">
+            <a:spAutoFit/>
+          </a:bodyPr>
+          <a:lstStyle/>
+          <a:p>
+            <a:r>
+              <a:rPr lang="fr-FR" b="1" dirty="0"/>
+              <a:t>Spark </a:t>
+            </a:r>
+            <a:r>
+              <a:rPr lang="fr-FR" b="1" dirty="0" err="1"/>
+              <a:t>Executor</a:t>
+            </a:r>
+            <a:endParaRPr lang="fr-FR" b="1" dirty="0"/>
+          </a:p>
+        </p:txBody>
+      </p:sp>
+    </p:spTree>
+    <p:extLst>
+      <p:ext uri="{BB962C8B-B14F-4D97-AF65-F5344CB8AC3E}">
+        <p14:creationId xmlns:p14="http://schemas.microsoft.com/office/powerpoint/2010/main" val="1950401596"/>
+      </p:ext>
+    </p:extLst>
+  </p:cSld>
+  <p:clrMapOvr>
+    <a:masterClrMapping/>
+  </p:clrMapOvr>
+</p:sld>
+</file>
+
+<file path=ppt/slides/slide45.xml><?xml version="1.0" encoding="utf-8"?>
+<p:sld xmlns:a="http://schemas.openxmlformats.org/drawingml/2006/main" xmlns:r="http://schemas.openxmlformats.org/officeDocument/2006/relationships" xmlns:p="http://schemas.openxmlformats.org/presentationml/2006/main">
+  <p:cSld>
+    <p:spTree>
+      <p:nvGrpSpPr>
+        <p:cNvPr id="1" name=""/>
+        <p:cNvGrpSpPr/>
+        <p:nvPr/>
+      </p:nvGrpSpPr>
+      <p:grpSpPr>
+        <a:xfrm>
+          <a:off x="0" y="0"/>
+          <a:ext cx="0" cy="0"/>
+          <a:chOff x="0" y="0"/>
+          <a:chExt cx="0" cy="0"/>
+        </a:xfrm>
+      </p:grpSpPr>
+      <p:sp>
+        <p:nvSpPr>
+          <p:cNvPr id="2" name="Title 1">
+            <a:extLst>
+              <a:ext uri="{FF2B5EF4-FFF2-40B4-BE49-F238E27FC236}">
+                <a16:creationId xmlns:a16="http://schemas.microsoft.com/office/drawing/2014/main" id="{A4316124-B2A9-445F-AFB6-89439E90290E}"/>
+              </a:ext>
+            </a:extLst>
+          </p:cNvPr>
+          <p:cNvSpPr>
+            <a:spLocks noGrp="1"/>
+          </p:cNvSpPr>
+          <p:nvPr>
+            <p:ph type="title"/>
+          </p:nvPr>
+        </p:nvSpPr>
+        <p:spPr>
+          <a:xfrm>
+            <a:off x="528320" y="2695098"/>
+            <a:ext cx="10515600" cy="1890059"/>
+          </a:xfrm>
+        </p:spPr>
+        <p:txBody>
+          <a:bodyPr>
+            <a:normAutofit fontScale="90000"/>
+          </a:bodyPr>
+          <a:lstStyle/>
+          <a:p>
+            <a:pPr algn="ctr"/>
+            <a:r>
+              <a:rPr lang="fr-FR" dirty="0"/>
+              <a:t>Questions ?</a:t>
+            </a:r>
+            <a:br>
+              <a:rPr lang="fr-FR" dirty="0"/>
+            </a:br>
+            <a:br>
+              <a:rPr lang="fr-FR" dirty="0"/>
+            </a:br>
+            <a:r>
+              <a:rPr lang="fr-FR" dirty="0"/>
+              <a:t>... Next </a:t>
+            </a:r>
+            <a:r>
+              <a:rPr lang="fr-FR" dirty="0" err="1"/>
+              <a:t>Steps</a:t>
+            </a:r>
+            <a:r>
+              <a:rPr lang="fr-FR" dirty="0"/>
+              <a:t> ?</a:t>
+            </a:r>
+          </a:p>
+        </p:txBody>
+      </p:sp>
+    </p:spTree>
+    <p:extLst>
+      <p:ext uri="{BB962C8B-B14F-4D97-AF65-F5344CB8AC3E}">
+        <p14:creationId xmlns:p14="http://schemas.microsoft.com/office/powerpoint/2010/main" val="2074433196"/>
       </p:ext>
     </p:extLst>
   </p:cSld>
